--- a/assets/Ayalew_Cherenet_Portfolio_Presentation_Flashcards.pptx
+++ b/assets/Ayalew_Cherenet_Portfolio_Presentation_Flashcards.pptx
@@ -77,6 +77,9 @@
               <a:lnSpc>
                 <a:spcPct val="90000"/>
               </a:lnSpc>
+              <a:tabLst>
+                <a:tab pos="0" algn="l"/>
+              </a:tabLst>
             </a:pPr>
             <a:r>
               <a:rPr lang="en-US" sz="4400" b="0" u="none" strike="noStrike">
@@ -382,7 +385,7 @@
             <a:pPr indent="0" algn="r">
               <a:buNone/>
             </a:pPr>
-            <a:fld id="{990EC2D4-81F8-4DB8-8F18-73D483987ADF}" type="slidenum">
+            <a:fld id="{ED0CC048-D901-4D9E-83C3-7B9C192E0368}" type="slidenum">
               <a:rPr lang="en-US" sz="1400" b="0" u="none" strike="noStrike">
                 <a:solidFill>
                   <a:srgbClr val="000000"/>
@@ -483,6 +486,9 @@
                 <a:spcPct val="100000"/>
               </a:lnSpc>
               <a:buNone/>
+              <a:tabLst>
+                <a:tab pos="0" algn="l"/>
+              </a:tabLst>
             </a:pPr>
             <a:r>
               <a:rPr lang="en-US" sz="2000" b="0" u="none" strike="noStrike">
@@ -492,6 +498,7 @@
                 <a:effectLst/>
                 <a:uFillTx/>
                 <a:latin typeface="Arial"/>
+                <a:ea typeface="Arial"/>
               </a:rPr>
               <a:t>Timing: 0:00–0:42</a:t>
             </a:r>
@@ -510,6 +517,9 @@
                 <a:spcPct val="100000"/>
               </a:lnSpc>
               <a:buNone/>
+              <a:tabLst>
+                <a:tab pos="0" algn="l"/>
+              </a:tabLst>
             </a:pPr>
             <a:r>
               <a:rPr lang="en-US" sz="2000" b="0" u="none" strike="noStrike">
@@ -519,8 +529,9 @@
                 <a:effectLst/>
                 <a:uFillTx/>
                 <a:latin typeface="Arial"/>
-              </a:rPr>
-              <a:t>Name, Wade College, IT &amp; Cybersecurity, graduation Sept 2026</a:t>
+                <a:ea typeface="Arial"/>
+              </a:rPr>
+              <a:t>Practice flashcard: Opening</a:t>
             </a:r>
             <a:endParaRPr lang="en-US" sz="2000" b="0" u="none" strike="noStrike">
               <a:solidFill>
@@ -537,6 +548,28 @@
                 <a:spcPct val="100000"/>
               </a:lnSpc>
               <a:buNone/>
+              <a:tabLst>
+                <a:tab pos="0" algn="l"/>
+              </a:tabLst>
+            </a:pPr>
+            <a:endParaRPr lang="en-US" sz="2000" b="0" u="none" strike="noStrike">
+              <a:solidFill>
+                <a:srgbClr val="000000"/>
+              </a:solidFill>
+              <a:effectLst/>
+              <a:uFillTx/>
+              <a:latin typeface="Arial"/>
+            </a:endParaRPr>
+          </a:p>
+          <a:p>
+            <a:pPr indent="0" algn="l">
+              <a:lnSpc>
+                <a:spcPct val="100000"/>
+              </a:lnSpc>
+              <a:buNone/>
+              <a:tabLst>
+                <a:tab pos="0" algn="l"/>
+              </a:tabLst>
             </a:pPr>
             <a:r>
               <a:rPr lang="en-US" sz="2000" b="0" u="none" strike="noStrike">
@@ -546,8 +579,9 @@
                 <a:effectLst/>
                 <a:uFillTx/>
                 <a:latin typeface="Arial"/>
-              </a:rPr>
-              <a:t>Goal: entry-level SOC Analyst</a:t>
+                <a:ea typeface="Arial"/>
+              </a:rPr>
+              <a:t>Talking points:</a:t>
             </a:r>
             <a:endParaRPr lang="en-US" sz="2000" b="0" u="none" strike="noStrike">
               <a:solidFill>
@@ -564,6 +598,9 @@
                 <a:spcPct val="100000"/>
               </a:lnSpc>
               <a:buNone/>
+              <a:tabLst>
+                <a:tab pos="0" algn="l"/>
+              </a:tabLst>
             </a:pPr>
             <a:r>
               <a:rPr lang="en-US" sz="2000" b="0" u="none" strike="noStrike">
@@ -573,8 +610,9 @@
                 <a:effectLst/>
                 <a:uFillTx/>
                 <a:latin typeface="Arial"/>
-              </a:rPr>
-              <a:t>Portfolio = practical projects + programming + documentation + business problem-solving</a:t>
+                <a:ea typeface="Arial"/>
+              </a:rPr>
+              <a:t>• I’m Ayalew Cherenet, an Information Technology (IT) and Cybersecurity student at Wade College graduating in September 2026</a:t>
             </a:r>
             <a:endParaRPr lang="en-US" sz="2000" b="0" u="none" strike="noStrike">
               <a:solidFill>
@@ -591,6 +629,9 @@
                 <a:spcPct val="100000"/>
               </a:lnSpc>
               <a:buNone/>
+              <a:tabLst>
+                <a:tab pos="0" algn="l"/>
+              </a:tabLst>
             </a:pPr>
             <a:r>
               <a:rPr lang="en-US" sz="2000" b="0" u="none" strike="noStrike">
@@ -600,8 +641,71 @@
                 <a:effectLst/>
                 <a:uFillTx/>
                 <a:latin typeface="Arial"/>
-              </a:rPr>
-              <a:t>Tagline: protect systems, solve problems, keep learning</a:t>
+                <a:ea typeface="Arial"/>
+              </a:rPr>
+              <a:t>• My goal is an entry-level SOC Analyst job in Dallas–Fort Worth. SOC means Security Operations Center — the team that watches for cyber threats</a:t>
+            </a:r>
+            <a:endParaRPr lang="en-US" sz="2000" b="0" u="none" strike="noStrike">
+              <a:solidFill>
+                <a:srgbClr val="000000"/>
+              </a:solidFill>
+              <a:effectLst/>
+              <a:uFillTx/>
+              <a:latin typeface="Arial"/>
+            </a:endParaRPr>
+          </a:p>
+          <a:p>
+            <a:pPr indent="0" algn="l">
+              <a:lnSpc>
+                <a:spcPct val="100000"/>
+              </a:lnSpc>
+              <a:buNone/>
+              <a:tabLst>
+                <a:tab pos="0" algn="l"/>
+              </a:tabLst>
+            </a:pPr>
+            <a:r>
+              <a:rPr lang="en-US" sz="2000" b="0" u="none" strike="noStrike">
+                <a:solidFill>
+                  <a:srgbClr val="000000"/>
+                </a:solidFill>
+                <a:effectLst/>
+                <a:uFillTx/>
+                <a:latin typeface="Arial"/>
+                <a:ea typeface="Arial"/>
+              </a:rPr>
+              <a:t>• This portfolio shows how I think about risk, write clear documentation, and solve problems</a:t>
+            </a:r>
+            <a:endParaRPr lang="en-US" sz="2000" b="0" u="none" strike="noStrike">
+              <a:solidFill>
+                <a:srgbClr val="000000"/>
+              </a:solidFill>
+              <a:effectLst/>
+              <a:uFillTx/>
+              <a:latin typeface="Arial"/>
+            </a:endParaRPr>
+          </a:p>
+          <a:p>
+            <a:pPr indent="0" algn="l">
+              <a:lnSpc>
+                <a:spcPct val="100000"/>
+              </a:lnSpc>
+              <a:buNone/>
+              <a:tabLst>
+                <a:tab pos="0" algn="l"/>
+              </a:tabLst>
+            </a:pPr>
+            <a:r>
+              <a:rPr lang="en-US" sz="2000" b="0" u="none" strike="noStrike">
+                <a:solidFill>
+                  <a:srgbClr val="000000"/>
+                </a:solidFill>
+                <a:effectLst/>
+                <a:uFillTx/>
+                <a:latin typeface="Arial"/>
+                <a:ea typeface="Arial"/>
+              </a:rPr>
+              <a:t>• My theme: Protect systems. Solve problems. Keep learning.</a:t>
             </a:r>
             <a:endParaRPr lang="en-US" sz="2000" b="0" u="none" strike="noStrike">
               <a:solidFill>
@@ -734,6 +838,9 @@
                 <a:spcPct val="100000"/>
               </a:lnSpc>
               <a:buNone/>
+              <a:tabLst>
+                <a:tab pos="0" algn="l"/>
+              </a:tabLst>
             </a:pPr>
             <a:r>
               <a:rPr lang="en-US" sz="2000" b="0" u="none" strike="noStrike">
@@ -743,6 +850,7 @@
                 <a:effectLst/>
                 <a:uFillTx/>
                 <a:latin typeface="Arial"/>
+                <a:ea typeface="Arial"/>
               </a:rPr>
               <a:t>Timing: 7:09–7:55</a:t>
             </a:r>
@@ -761,6 +869,9 @@
                 <a:spcPct val="100000"/>
               </a:lnSpc>
               <a:buNone/>
+              <a:tabLst>
+                <a:tab pos="0" algn="l"/>
+              </a:tabLst>
             </a:pPr>
             <a:r>
               <a:rPr lang="en-US" sz="2000" b="0" u="none" strike="noStrike">
@@ -770,8 +881,9 @@
                 <a:effectLst/>
                 <a:uFillTx/>
                 <a:latin typeface="Arial"/>
-              </a:rPr>
-              <a:t>Programming I project — Python + Tkinter desktop app</a:t>
+                <a:ea typeface="Arial"/>
+              </a:rPr>
+              <a:t>Practice flashcard: Additional Project — Food Expense Tracker</a:t>
             </a:r>
             <a:endParaRPr lang="en-US" sz="2000" b="0" u="none" strike="noStrike">
               <a:solidFill>
@@ -788,6 +900,28 @@
                 <a:spcPct val="100000"/>
               </a:lnSpc>
               <a:buNone/>
+              <a:tabLst>
+                <a:tab pos="0" algn="l"/>
+              </a:tabLst>
+            </a:pPr>
+            <a:endParaRPr lang="en-US" sz="2000" b="0" u="none" strike="noStrike">
+              <a:solidFill>
+                <a:srgbClr val="000000"/>
+              </a:solidFill>
+              <a:effectLst/>
+              <a:uFillTx/>
+              <a:latin typeface="Arial"/>
+            </a:endParaRPr>
+          </a:p>
+          <a:p>
+            <a:pPr indent="0" algn="l">
+              <a:lnSpc>
+                <a:spcPct val="100000"/>
+              </a:lnSpc>
+              <a:buNone/>
+              <a:tabLst>
+                <a:tab pos="0" algn="l"/>
+              </a:tabLst>
             </a:pPr>
             <a:r>
               <a:rPr lang="en-US" sz="2000" b="0" u="none" strike="noStrike">
@@ -797,8 +931,9 @@
                 <a:effectLst/>
                 <a:uFillTx/>
                 <a:latin typeface="Arial"/>
-              </a:rPr>
-              <a:t>Add, edit, delete, filter, sort, and search expenses</a:t>
+                <a:ea typeface="Arial"/>
+              </a:rPr>
+              <a:t>Talking points:</a:t>
             </a:r>
             <a:endParaRPr lang="en-US" sz="2000" b="0" u="none" strike="noStrike">
               <a:solidFill>
@@ -815,6 +950,9 @@
                 <a:spcPct val="100000"/>
               </a:lnSpc>
               <a:buNone/>
+              <a:tabLst>
+                <a:tab pos="0" algn="l"/>
+              </a:tabLst>
             </a:pPr>
             <a:r>
               <a:rPr lang="en-US" sz="2000" b="0" u="none" strike="noStrike">
@@ -824,8 +962,9 @@
                 <a:effectLst/>
                 <a:uFillTx/>
                 <a:latin typeface="Arial"/>
-              </a:rPr>
-              <a:t>JSON storage, input validation, category totals, and CSV export</a:t>
+                <a:ea typeface="Arial"/>
+              </a:rPr>
+              <a:t>• I built a desktop app with Python and Tkinter as a programming practice project</a:t>
             </a:r>
             <a:endParaRPr lang="en-US" sz="2000" b="0" u="none" strike="noStrike">
               <a:solidFill>
@@ -842,6 +981,9 @@
                 <a:spcPct val="100000"/>
               </a:lnSpc>
               <a:buNone/>
+              <a:tabLst>
+                <a:tab pos="0" algn="l"/>
+              </a:tabLst>
             </a:pPr>
             <a:r>
               <a:rPr lang="en-US" sz="2000" b="0" u="none" strike="noStrike">
@@ -851,8 +993,71 @@
                 <a:effectLst/>
                 <a:uFillTx/>
                 <a:latin typeface="Arial"/>
-              </a:rPr>
-              <a:t>Shows practical software and data-handling skills</a:t>
+                <a:ea typeface="Arial"/>
+              </a:rPr>
+              <a:t>• Users can add, edit, delete, search, filter, and sort expense records</a:t>
+            </a:r>
+            <a:endParaRPr lang="en-US" sz="2000" b="0" u="none" strike="noStrike">
+              <a:solidFill>
+                <a:srgbClr val="000000"/>
+              </a:solidFill>
+              <a:effectLst/>
+              <a:uFillTx/>
+              <a:latin typeface="Arial"/>
+            </a:endParaRPr>
+          </a:p>
+          <a:p>
+            <a:pPr indent="0" algn="l">
+              <a:lnSpc>
+                <a:spcPct val="100000"/>
+              </a:lnSpc>
+              <a:buNone/>
+              <a:tabLst>
+                <a:tab pos="0" algn="l"/>
+              </a:tabLst>
+            </a:pPr>
+            <a:r>
+              <a:rPr lang="en-US" sz="2000" b="0" u="none" strike="noStrike">
+                <a:solidFill>
+                  <a:srgbClr val="000000"/>
+                </a:solidFill>
+                <a:effectLst/>
+                <a:uFillTx/>
+                <a:latin typeface="Arial"/>
+                <a:ea typeface="Arial"/>
+              </a:rPr>
+              <a:t>• It saves data in JSON (JavaScript Object Notation), checks user input, calculates totals, and exports CSV (Comma-Separated Values)</a:t>
+            </a:r>
+            <a:endParaRPr lang="en-US" sz="2000" b="0" u="none" strike="noStrike">
+              <a:solidFill>
+                <a:srgbClr val="000000"/>
+              </a:solidFill>
+              <a:effectLst/>
+              <a:uFillTx/>
+              <a:latin typeface="Arial"/>
+            </a:endParaRPr>
+          </a:p>
+          <a:p>
+            <a:pPr indent="0" algn="l">
+              <a:lnSpc>
+                <a:spcPct val="100000"/>
+              </a:lnSpc>
+              <a:buNone/>
+              <a:tabLst>
+                <a:tab pos="0" algn="l"/>
+              </a:tabLst>
+            </a:pPr>
+            <a:r>
+              <a:rPr lang="en-US" sz="2000" b="0" u="none" strike="noStrike">
+                <a:solidFill>
+                  <a:srgbClr val="000000"/>
+                </a:solidFill>
+                <a:effectLst/>
+                <a:uFillTx/>
+                <a:latin typeface="Arial"/>
+                <a:ea typeface="Arial"/>
+              </a:rPr>
+              <a:t>• This shows practical programming, handling structured data, and building something useful for users</a:t>
             </a:r>
             <a:endParaRPr lang="en-US" sz="2000" b="0" u="none" strike="noStrike">
               <a:solidFill>
@@ -985,6 +1190,9 @@
                 <a:spcPct val="100000"/>
               </a:lnSpc>
               <a:buNone/>
+              <a:tabLst>
+                <a:tab pos="0" algn="l"/>
+              </a:tabLst>
             </a:pPr>
             <a:r>
               <a:rPr lang="en-US" sz="2000" b="0" u="none" strike="noStrike">
@@ -994,6 +1202,7 @@
                 <a:effectLst/>
                 <a:uFillTx/>
                 <a:latin typeface="Arial"/>
+                <a:ea typeface="Arial"/>
               </a:rPr>
               <a:t>Timing: 7:55–8:36</a:t>
             </a:r>
@@ -1012,6 +1221,9 @@
                 <a:spcPct val="100000"/>
               </a:lnSpc>
               <a:buNone/>
+              <a:tabLst>
+                <a:tab pos="0" algn="l"/>
+              </a:tabLst>
             </a:pPr>
             <a:r>
               <a:rPr lang="en-US" sz="2000" b="0" u="none" strike="noStrike">
@@ -1021,8 +1233,9 @@
                 <a:effectLst/>
                 <a:uFillTx/>
                 <a:latin typeface="Arial"/>
-              </a:rPr>
-              <a:t>Shopify e-commerce project: brand storytelling, product organization, mobile usability</a:t>
+                <a:ea typeface="Arial"/>
+              </a:rPr>
+              <a:t>Practice flashcard: Additional Project — MAKEDA (Queen of Sheba)</a:t>
             </a:r>
             <a:endParaRPr lang="en-US" sz="2000" b="0" u="none" strike="noStrike">
               <a:solidFill>
@@ -1039,6 +1252,28 @@
                 <a:spcPct val="100000"/>
               </a:lnSpc>
               <a:buNone/>
+              <a:tabLst>
+                <a:tab pos="0" algn="l"/>
+              </a:tabLst>
+            </a:pPr>
+            <a:endParaRPr lang="en-US" sz="2000" b="0" u="none" strike="noStrike">
+              <a:solidFill>
+                <a:srgbClr val="000000"/>
+              </a:solidFill>
+              <a:effectLst/>
+              <a:uFillTx/>
+              <a:latin typeface="Arial"/>
+            </a:endParaRPr>
+          </a:p>
+          <a:p>
+            <a:pPr indent="0" algn="l">
+              <a:lnSpc>
+                <a:spcPct val="100000"/>
+              </a:lnSpc>
+              <a:buNone/>
+              <a:tabLst>
+                <a:tab pos="0" algn="l"/>
+              </a:tabLst>
             </a:pPr>
             <a:r>
               <a:rPr lang="en-US" sz="2000" b="0" u="none" strike="noStrike">
@@ -1048,8 +1283,9 @@
                 <a:effectLst/>
                 <a:uFillTx/>
                 <a:latin typeface="Arial"/>
-              </a:rPr>
-              <a:t>E-commerce security awareness: secure checkout, MFA, and privacy</a:t>
+                <a:ea typeface="Arial"/>
+              </a:rPr>
+              <a:t>Talking points:</a:t>
             </a:r>
             <a:endParaRPr lang="en-US" sz="2000" b="0" u="none" strike="noStrike">
               <a:solidFill>
@@ -1066,6 +1302,9 @@
                 <a:spcPct val="100000"/>
               </a:lnSpc>
               <a:buNone/>
+              <a:tabLst>
+                <a:tab pos="0" algn="l"/>
+              </a:tabLst>
             </a:pPr>
             <a:r>
               <a:rPr lang="en-US" sz="2000" b="0" u="none" strike="noStrike">
@@ -1075,8 +1314,9 @@
                 <a:effectLst/>
                 <a:uFillTx/>
                 <a:latin typeface="Arial"/>
-              </a:rPr>
-              <a:t>Bridges technical and business needs</a:t>
+                <a:ea typeface="Arial"/>
+              </a:rPr>
+              <a:t>• I created a Shopify online store focused on Ethiopian-inspired fashion with clear product organization and good mobile experience</a:t>
             </a:r>
             <a:endParaRPr lang="en-US" sz="2000" b="0" u="none" strike="noStrike">
               <a:solidFill>
@@ -1093,6 +1333,9 @@
                 <a:spcPct val="100000"/>
               </a:lnSpc>
               <a:buNone/>
+              <a:tabLst>
+                <a:tab pos="0" algn="l"/>
+              </a:tabLst>
             </a:pPr>
             <a:r>
               <a:rPr lang="en-US" sz="2000" b="0" u="none" strike="noStrike">
@@ -1102,8 +1345,71 @@
                 <a:effectLst/>
                 <a:uFillTx/>
                 <a:latin typeface="Arial"/>
-              </a:rPr>
-              <a:t>Connects to RetailHub: online stores must protect customers, data, payments, and trust</a:t>
+                <a:ea typeface="Arial"/>
+              </a:rPr>
+              <a:t>• I paid attention to security: multi-factor login for the admin account, limited permissions, secure checkout, and customer privacy</a:t>
+            </a:r>
+            <a:endParaRPr lang="en-US" sz="2000" b="0" u="none" strike="noStrike">
+              <a:solidFill>
+                <a:srgbClr val="000000"/>
+              </a:solidFill>
+              <a:effectLst/>
+              <a:uFillTx/>
+              <a:latin typeface="Arial"/>
+            </a:endParaRPr>
+          </a:p>
+          <a:p>
+            <a:pPr indent="0" algn="l">
+              <a:lnSpc>
+                <a:spcPct val="100000"/>
+              </a:lnSpc>
+              <a:buNone/>
+              <a:tabLst>
+                <a:tab pos="0" algn="l"/>
+              </a:tabLst>
+            </a:pPr>
+            <a:r>
+              <a:rPr lang="en-US" sz="2000" b="0" u="none" strike="noStrike">
+                <a:solidFill>
+                  <a:srgbClr val="000000"/>
+                </a:solidFill>
+                <a:effectLst/>
+                <a:uFillTx/>
+                <a:latin typeface="Arial"/>
+                <a:ea typeface="Arial"/>
+              </a:rPr>
+              <a:t>• It shows that technical choices must support both business goals and customer trust</a:t>
+            </a:r>
+            <a:endParaRPr lang="en-US" sz="2000" b="0" u="none" strike="noStrike">
+              <a:solidFill>
+                <a:srgbClr val="000000"/>
+              </a:solidFill>
+              <a:effectLst/>
+              <a:uFillTx/>
+              <a:latin typeface="Arial"/>
+            </a:endParaRPr>
+          </a:p>
+          <a:p>
+            <a:pPr indent="0" algn="l">
+              <a:lnSpc>
+                <a:spcPct val="100000"/>
+              </a:lnSpc>
+              <a:buNone/>
+              <a:tabLst>
+                <a:tab pos="0" algn="l"/>
+              </a:tabLst>
+            </a:pPr>
+            <a:r>
+              <a:rPr lang="en-US" sz="2000" b="0" u="none" strike="noStrike">
+                <a:solidFill>
+                  <a:srgbClr val="000000"/>
+                </a:solidFill>
+                <a:effectLst/>
+                <a:uFillTx/>
+                <a:latin typeface="Arial"/>
+                <a:ea typeface="Arial"/>
+              </a:rPr>
+              <a:t>• This connects to the RetailHub project — online stores must protect customers, data, payments, and reputation</a:t>
             </a:r>
             <a:endParaRPr lang="en-US" sz="2000" b="0" u="none" strike="noStrike">
               <a:solidFill>
@@ -1236,6 +1542,9 @@
                 <a:spcPct val="100000"/>
               </a:lnSpc>
               <a:buNone/>
+              <a:tabLst>
+                <a:tab pos="0" algn="l"/>
+              </a:tabLst>
             </a:pPr>
             <a:r>
               <a:rPr lang="en-US" sz="2000" b="0" u="none" strike="noStrike">
@@ -1245,6 +1554,7 @@
                 <a:effectLst/>
                 <a:uFillTx/>
                 <a:latin typeface="Arial"/>
+                <a:ea typeface="Arial"/>
               </a:rPr>
               <a:t>Timing: 8:36–9:08</a:t>
             </a:r>
@@ -1263,6 +1573,9 @@
                 <a:spcPct val="100000"/>
               </a:lnSpc>
               <a:buNone/>
+              <a:tabLst>
+                <a:tab pos="0" algn="l"/>
+              </a:tabLst>
             </a:pPr>
             <a:r>
               <a:rPr lang="en-US" sz="2000" b="0" u="none" strike="noStrike">
@@ -1272,8 +1585,9 @@
                 <a:effectLst/>
                 <a:uFillTx/>
                 <a:latin typeface="Arial"/>
-              </a:rPr>
-              <a:t>Brings all 8 projects together on one site</a:t>
+                <a:ea typeface="Arial"/>
+              </a:rPr>
+              <a:t>Practice flashcard: Live GitHub Portfolio</a:t>
             </a:r>
             <a:endParaRPr lang="en-US" sz="2000" b="0" u="none" strike="noStrike">
               <a:solidFill>
@@ -1290,6 +1604,28 @@
                 <a:spcPct val="100000"/>
               </a:lnSpc>
               <a:buNone/>
+              <a:tabLst>
+                <a:tab pos="0" algn="l"/>
+              </a:tabLst>
+            </a:pPr>
+            <a:endParaRPr lang="en-US" sz="2000" b="0" u="none" strike="noStrike">
+              <a:solidFill>
+                <a:srgbClr val="000000"/>
+              </a:solidFill>
+              <a:effectLst/>
+              <a:uFillTx/>
+              <a:latin typeface="Arial"/>
+            </a:endParaRPr>
+          </a:p>
+          <a:p>
+            <a:pPr indent="0" algn="l">
+              <a:lnSpc>
+                <a:spcPct val="100000"/>
+              </a:lnSpc>
+              <a:buNone/>
+              <a:tabLst>
+                <a:tab pos="0" algn="l"/>
+              </a:tabLst>
             </a:pPr>
             <a:r>
               <a:rPr lang="en-US" sz="2000" b="0" u="none" strike="noStrike">
@@ -1299,8 +1635,9 @@
                 <a:effectLst/>
                 <a:uFillTx/>
                 <a:latin typeface="Arial"/>
-              </a:rPr>
-              <a:t>Recruiters can review project pages, documentation, diagrams, a live practice demo, GitHub work, and the MAKEDA showcase</a:t>
+                <a:ea typeface="Arial"/>
+              </a:rPr>
+              <a:t>Talking points:</a:t>
             </a:r>
             <a:endParaRPr lang="en-US" sz="2000" b="0" u="none" strike="noStrike">
               <a:solidFill>
@@ -1317,6 +1654,9 @@
                 <a:spcPct val="100000"/>
               </a:lnSpc>
               <a:buNone/>
+              <a:tabLst>
+                <a:tab pos="0" algn="l"/>
+              </a:tabLst>
             </a:pPr>
             <a:r>
               <a:rPr lang="en-US" sz="2000" b="0" u="none" strike="noStrike">
@@ -1326,8 +1666,9 @@
                 <a:effectLst/>
                 <a:uFillTx/>
                 <a:latin typeface="Arial"/>
-              </a:rPr>
-              <a:t>Each project: problem → approach → tools/concepts → outcome or recommendation</a:t>
+                <a:ea typeface="Arial"/>
+              </a:rPr>
+              <a:t>• My GitHub Pages website brings all eight projects together in one easy-to-explore place</a:t>
             </a:r>
             <a:endParaRPr lang="en-US" sz="2000" b="0" u="none" strike="noStrike">
               <a:solidFill>
@@ -1344,6 +1685,9 @@
                 <a:spcPct val="100000"/>
               </a:lnSpc>
               <a:buNone/>
+              <a:tabLst>
+                <a:tab pos="0" algn="l"/>
+              </a:tabLst>
             </a:pPr>
             <a:r>
               <a:rPr lang="en-US" sz="2000" b="0" u="none" strike="noStrike">
@@ -1353,8 +1697,71 @@
                 <a:effectLst/>
                 <a:uFillTx/>
                 <a:latin typeface="Arial"/>
-              </a:rPr>
-              <a:t>Goal: easy to explore and easy to understand</a:t>
+                <a:ea typeface="Arial"/>
+              </a:rPr>
+              <a:t>• Recruiters can look at the case studies, diagrams, documentation, the live practice demo, and the MAKEDA store</a:t>
+            </a:r>
+            <a:endParaRPr lang="en-US" sz="2000" b="0" u="none" strike="noStrike">
+              <a:solidFill>
+                <a:srgbClr val="000000"/>
+              </a:solidFill>
+              <a:effectLst/>
+              <a:uFillTx/>
+              <a:latin typeface="Arial"/>
+            </a:endParaRPr>
+          </a:p>
+          <a:p>
+            <a:pPr indent="0" algn="l">
+              <a:lnSpc>
+                <a:spcPct val="100000"/>
+              </a:lnSpc>
+              <a:buNone/>
+              <a:tabLst>
+                <a:tab pos="0" algn="l"/>
+              </a:tabLst>
+            </a:pPr>
+            <a:r>
+              <a:rPr lang="en-US" sz="2000" b="0" u="none" strike="noStrike">
+                <a:solidFill>
+                  <a:srgbClr val="000000"/>
+                </a:solidFill>
+                <a:effectLst/>
+                <a:uFillTx/>
+                <a:latin typeface="Arial"/>
+                <a:ea typeface="Arial"/>
+              </a:rPr>
+              <a:t>• Every project follows a clear story: problem → approach → tools and ideas → result or recommendation</a:t>
+            </a:r>
+            <a:endParaRPr lang="en-US" sz="2000" b="0" u="none" strike="noStrike">
+              <a:solidFill>
+                <a:srgbClr val="000000"/>
+              </a:solidFill>
+              <a:effectLst/>
+              <a:uFillTx/>
+              <a:latin typeface="Arial"/>
+            </a:endParaRPr>
+          </a:p>
+          <a:p>
+            <a:pPr indent="0" algn="l">
+              <a:lnSpc>
+                <a:spcPct val="100000"/>
+              </a:lnSpc>
+              <a:buNone/>
+              <a:tabLst>
+                <a:tab pos="0" algn="l"/>
+              </a:tabLst>
+            </a:pPr>
+            <a:r>
+              <a:rPr lang="en-US" sz="2000" b="0" u="none" strike="noStrike">
+                <a:solidFill>
+                  <a:srgbClr val="000000"/>
+                </a:solidFill>
+                <a:effectLst/>
+                <a:uFillTx/>
+                <a:latin typeface="Arial"/>
+                <a:ea typeface="Arial"/>
+              </a:rPr>
+              <a:t>• My goal is to make the work easy to understand and discuss in an interview</a:t>
             </a:r>
             <a:endParaRPr lang="en-US" sz="2000" b="0" u="none" strike="noStrike">
               <a:solidFill>
@@ -1487,6 +1894,9 @@
                 <a:spcPct val="100000"/>
               </a:lnSpc>
               <a:buNone/>
+              <a:tabLst>
+                <a:tab pos="0" algn="l"/>
+              </a:tabLst>
             </a:pPr>
             <a:r>
               <a:rPr lang="en-US" sz="2000" b="0" u="none" strike="noStrike">
@@ -1496,6 +1906,7 @@
                 <a:effectLst/>
                 <a:uFillTx/>
                 <a:latin typeface="Arial"/>
+                <a:ea typeface="Arial"/>
               </a:rPr>
               <a:t>Timing: 9:08–9:32</a:t>
             </a:r>
@@ -1514,6 +1925,9 @@
                 <a:spcPct val="100000"/>
               </a:lnSpc>
               <a:buNone/>
+              <a:tabLst>
+                <a:tab pos="0" algn="l"/>
+              </a:tabLst>
             </a:pPr>
             <a:r>
               <a:rPr lang="en-US" sz="2000" b="0" u="none" strike="noStrike">
@@ -1523,8 +1937,9 @@
                 <a:effectLst/>
                 <a:uFillTx/>
                 <a:latin typeface="Arial"/>
-              </a:rPr>
-              <a:t>Completing the Google Cybersecurity Professional Certificate</a:t>
+                <a:ea typeface="Arial"/>
+              </a:rPr>
+              <a:t>Practice flashcard: Certifications &amp; Growth</a:t>
             </a:r>
             <a:endParaRPr lang="en-US" sz="2000" b="0" u="none" strike="noStrike">
               <a:solidFill>
@@ -1541,6 +1956,28 @@
                 <a:spcPct val="100000"/>
               </a:lnSpc>
               <a:buNone/>
+              <a:tabLst>
+                <a:tab pos="0" algn="l"/>
+              </a:tabLst>
+            </a:pPr>
+            <a:endParaRPr lang="en-US" sz="2000" b="0" u="none" strike="noStrike">
+              <a:solidFill>
+                <a:srgbClr val="000000"/>
+              </a:solidFill>
+              <a:effectLst/>
+              <a:uFillTx/>
+              <a:latin typeface="Arial"/>
+            </a:endParaRPr>
+          </a:p>
+          <a:p>
+            <a:pPr indent="0" algn="l">
+              <a:lnSpc>
+                <a:spcPct val="100000"/>
+              </a:lnSpc>
+              <a:buNone/>
+              <a:tabLst>
+                <a:tab pos="0" algn="l"/>
+              </a:tabLst>
             </a:pPr>
             <a:r>
               <a:rPr lang="en-US" sz="2000" b="0" u="none" strike="noStrike">
@@ -1550,8 +1987,9 @@
                 <a:effectLst/>
                 <a:uFillTx/>
                 <a:latin typeface="Arial"/>
-              </a:rPr>
-              <a:t>Preparing for CompTIA Security+ next</a:t>
+                <a:ea typeface="Arial"/>
+              </a:rPr>
+              <a:t>Talking points:</a:t>
             </a:r>
             <a:endParaRPr lang="en-US" sz="2000" b="0" u="none" strike="noStrike">
               <a:solidFill>
@@ -1568,6 +2006,9 @@
                 <a:spcPct val="100000"/>
               </a:lnSpc>
               <a:buNone/>
+              <a:tabLst>
+                <a:tab pos="0" algn="l"/>
+              </a:tabLst>
             </a:pPr>
             <a:r>
               <a:rPr lang="en-US" sz="2000" b="0" u="none" strike="noStrike">
@@ -1577,8 +2018,9 @@
                 <a:effectLst/>
                 <a:uFillTx/>
                 <a:latin typeface="Arial"/>
-              </a:rPr>
-              <a:t>Next: more SOC-focused projects and sharper incident response and monitoring skills</a:t>
+                <a:ea typeface="Arial"/>
+              </a:rPr>
+              <a:t>• Completed: Google Foundations of Cybersecurity</a:t>
             </a:r>
             <a:endParaRPr lang="en-US" sz="2000" b="0" u="none" strike="noStrike">
               <a:solidFill>
@@ -1595,6 +2037,9 @@
                 <a:spcPct val="100000"/>
               </a:lnSpc>
               <a:buNone/>
+              <a:tabLst>
+                <a:tab pos="0" algn="l"/>
+              </a:tabLst>
             </a:pPr>
             <a:r>
               <a:rPr lang="en-US" sz="2000" b="0" u="none" strike="noStrike">
@@ -1604,8 +2049,71 @@
                 <a:effectLst/>
                 <a:uFillTx/>
                 <a:latin typeface="Arial"/>
-              </a:rPr>
-              <a:t>Goal: contribute to a cybersecurity team in Dallas–Fort Worth</a:t>
+                <a:ea typeface="Arial"/>
+              </a:rPr>
+              <a:t>• In progress: Google Cybersecurity Professional Certificate</a:t>
+            </a:r>
+            <a:endParaRPr lang="en-US" sz="2000" b="0" u="none" strike="noStrike">
+              <a:solidFill>
+                <a:srgbClr val="000000"/>
+              </a:solidFill>
+              <a:effectLst/>
+              <a:uFillTx/>
+              <a:latin typeface="Arial"/>
+            </a:endParaRPr>
+          </a:p>
+          <a:p>
+            <a:pPr indent="0" algn="l">
+              <a:lnSpc>
+                <a:spcPct val="100000"/>
+              </a:lnSpc>
+              <a:buNone/>
+              <a:tabLst>
+                <a:tab pos="0" algn="l"/>
+              </a:tabLst>
+            </a:pPr>
+            <a:r>
+              <a:rPr lang="en-US" sz="2000" b="0" u="none" strike="noStrike">
+                <a:solidFill>
+                  <a:srgbClr val="000000"/>
+                </a:solidFill>
+                <a:effectLst/>
+                <a:uFillTx/>
+                <a:latin typeface="Arial"/>
+                <a:ea typeface="Arial"/>
+              </a:rPr>
+              <a:t>• Next milestone: CompTIA Security+</a:t>
+            </a:r>
+            <a:endParaRPr lang="en-US" sz="2000" b="0" u="none" strike="noStrike">
+              <a:solidFill>
+                <a:srgbClr val="000000"/>
+              </a:solidFill>
+              <a:effectLst/>
+              <a:uFillTx/>
+              <a:latin typeface="Arial"/>
+            </a:endParaRPr>
+          </a:p>
+          <a:p>
+            <a:pPr indent="0" algn="l">
+              <a:lnSpc>
+                <a:spcPct val="100000"/>
+              </a:lnSpc>
+              <a:buNone/>
+              <a:tabLst>
+                <a:tab pos="0" algn="l"/>
+              </a:tabLst>
+            </a:pPr>
+            <a:r>
+              <a:rPr lang="en-US" sz="2000" b="0" u="none" strike="noStrike">
+                <a:solidFill>
+                  <a:srgbClr val="000000"/>
+                </a:solidFill>
+                <a:effectLst/>
+                <a:uFillTx/>
+                <a:latin typeface="Arial"/>
+                <a:ea typeface="Arial"/>
+              </a:rPr>
+              <a:t>• Next focus: more hands-on SOC practice — reading logs, responding to incidents, and monitoring systems</a:t>
             </a:r>
             <a:endParaRPr lang="en-US" sz="2000" b="0" u="none" strike="noStrike">
               <a:solidFill>
@@ -1738,6 +2246,9 @@
                 <a:spcPct val="100000"/>
               </a:lnSpc>
               <a:buNone/>
+              <a:tabLst>
+                <a:tab pos="0" algn="l"/>
+              </a:tabLst>
             </a:pPr>
             <a:r>
               <a:rPr lang="en-US" sz="2000" b="0" u="none" strike="noStrike">
@@ -1747,6 +2258,7 @@
                 <a:effectLst/>
                 <a:uFillTx/>
                 <a:latin typeface="Arial"/>
+                <a:ea typeface="Arial"/>
               </a:rPr>
               <a:t>Timing: 9:32–10:00</a:t>
             </a:r>
@@ -1765,6 +2277,9 @@
                 <a:spcPct val="100000"/>
               </a:lnSpc>
               <a:buNone/>
+              <a:tabLst>
+                <a:tab pos="0" algn="l"/>
+              </a:tabLst>
             </a:pPr>
             <a:r>
               <a:rPr lang="en-US" sz="2000" b="0" u="none" strike="noStrike">
@@ -1774,8 +2289,9 @@
                 <a:effectLst/>
                 <a:uFillTx/>
                 <a:latin typeface="Arial"/>
-              </a:rPr>
-              <a:t>Portfolio = more than school assignments — it is career preparation</a:t>
+                <a:ea typeface="Arial"/>
+              </a:rPr>
+              <a:t>Practice flashcard: Closing</a:t>
             </a:r>
             <a:endParaRPr lang="en-US" sz="2000" b="0" u="none" strike="noStrike">
               <a:solidFill>
@@ -1792,6 +2308,28 @@
                 <a:spcPct val="100000"/>
               </a:lnSpc>
               <a:buNone/>
+              <a:tabLst>
+                <a:tab pos="0" algn="l"/>
+              </a:tabLst>
+            </a:pPr>
+            <a:endParaRPr lang="en-US" sz="2000" b="0" u="none" strike="noStrike">
+              <a:solidFill>
+                <a:srgbClr val="000000"/>
+              </a:solidFill>
+              <a:effectLst/>
+              <a:uFillTx/>
+              <a:latin typeface="Arial"/>
+            </a:endParaRPr>
+          </a:p>
+          <a:p>
+            <a:pPr indent="0" algn="l">
+              <a:lnSpc>
+                <a:spcPct val="100000"/>
+              </a:lnSpc>
+              <a:buNone/>
+              <a:tabLst>
+                <a:tab pos="0" algn="l"/>
+              </a:tabLst>
             </a:pPr>
             <a:r>
               <a:rPr lang="en-US" sz="2000" b="0" u="none" strike="noStrike">
@@ -1801,8 +2339,9 @@
                 <a:effectLst/>
                 <a:uFillTx/>
                 <a:latin typeface="Arial"/>
-              </a:rPr>
-              <a:t>Ready to learn from experienced professionals</a:t>
+                <a:ea typeface="Arial"/>
+              </a:rPr>
+              <a:t>Talking points:</a:t>
             </a:r>
             <a:endParaRPr lang="en-US" sz="2000" b="0" u="none" strike="noStrike">
               <a:solidFill>
@@ -1819,6 +2358,9 @@
                 <a:spcPct val="100000"/>
               </a:lnSpc>
               <a:buNone/>
+              <a:tabLst>
+                <a:tab pos="0" algn="l"/>
+              </a:tabLst>
             </a:pPr>
             <a:r>
               <a:rPr lang="en-US" sz="2000" b="0" u="none" strike="noStrike">
@@ -1828,8 +2370,9 @@
                 <a:effectLst/>
                 <a:uFillTx/>
                 <a:latin typeface="Arial"/>
-              </a:rPr>
-              <a:t>Bring strong documentation and attention to detail as a SOC Analyst</a:t>
+                <a:ea typeface="Arial"/>
+              </a:rPr>
+              <a:t>• My portfolio turns school projects into clear, risk-focused career preparation</a:t>
             </a:r>
             <a:endParaRPr lang="en-US" sz="2000" b="0" u="none" strike="noStrike">
               <a:solidFill>
@@ -1846,6 +2389,9 @@
                 <a:spcPct val="100000"/>
               </a:lnSpc>
               <a:buNone/>
+              <a:tabLst>
+                <a:tab pos="0" algn="l"/>
+              </a:tabLst>
             </a:pPr>
             <a:r>
               <a:rPr lang="en-US" sz="2000" b="0" u="none" strike="noStrike">
@@ -1855,8 +2401,400 @@
                 <a:effectLst/>
                 <a:uFillTx/>
                 <a:latin typeface="Arial"/>
-              </a:rPr>
-              <a:t>Thank the audience and invite questions</a:t>
+                <a:ea typeface="Arial"/>
+              </a:rPr>
+              <a:t>• I’m ready to contribute as a careful, process-oriented junior analyst who communicates clearly</a:t>
+            </a:r>
+            <a:endParaRPr lang="en-US" sz="2000" b="0" u="none" strike="noStrike">
+              <a:solidFill>
+                <a:srgbClr val="000000"/>
+              </a:solidFill>
+              <a:effectLst/>
+              <a:uFillTx/>
+              <a:latin typeface="Arial"/>
+            </a:endParaRPr>
+          </a:p>
+          <a:p>
+            <a:pPr indent="0" algn="l">
+              <a:lnSpc>
+                <a:spcPct val="100000"/>
+              </a:lnSpc>
+              <a:buNone/>
+              <a:tabLst>
+                <a:tab pos="0" algn="l"/>
+              </a:tabLst>
+            </a:pPr>
+            <a:r>
+              <a:rPr lang="en-US" sz="2000" b="0" u="none" strike="noStrike">
+                <a:solidFill>
+                  <a:srgbClr val="000000"/>
+                </a:solidFill>
+                <a:effectLst/>
+                <a:uFillTx/>
+                <a:latin typeface="Arial"/>
+                <a:ea typeface="Arial"/>
+              </a:rPr>
+              <a:t>• I’m looking for the chance to learn from experienced SOC professionals in Dallas–Fort Worth</a:t>
+            </a:r>
+            <a:endParaRPr lang="en-US" sz="2000" b="0" u="none" strike="noStrike">
+              <a:solidFill>
+                <a:srgbClr val="000000"/>
+              </a:solidFill>
+              <a:effectLst/>
+              <a:uFillTx/>
+              <a:latin typeface="Arial"/>
+            </a:endParaRPr>
+          </a:p>
+          <a:p>
+            <a:pPr indent="0" algn="l">
+              <a:lnSpc>
+                <a:spcPct val="100000"/>
+              </a:lnSpc>
+              <a:buNone/>
+              <a:tabLst>
+                <a:tab pos="0" algn="l"/>
+              </a:tabLst>
+            </a:pPr>
+            <a:r>
+              <a:rPr lang="en-US" sz="2000" b="0" u="none" strike="noStrike">
+                <a:solidFill>
+                  <a:srgbClr val="000000"/>
+                </a:solidFill>
+                <a:effectLst/>
+                <a:uFillTx/>
+                <a:latin typeface="Arial"/>
+                <a:ea typeface="Arial"/>
+              </a:rPr>
+              <a:t>• Thank you — I’m happy to answer any questions</a:t>
+            </a:r>
+            <a:endParaRPr lang="en-US" sz="2000" b="0" u="none" strike="noStrike">
+              <a:solidFill>
+                <a:srgbClr val="000000"/>
+              </a:solidFill>
+              <a:effectLst/>
+              <a:uFillTx/>
+              <a:latin typeface="Arial"/>
+            </a:endParaRPr>
+          </a:p>
+          <a:p>
+            <a:pPr indent="0" algn="l">
+              <a:lnSpc>
+                <a:spcPct val="100000"/>
+              </a:lnSpc>
+              <a:buNone/>
+              <a:tabLst>
+                <a:tab pos="0" algn="l"/>
+              </a:tabLst>
+            </a:pPr>
+            <a:endParaRPr lang="en-US" sz="2000" b="0" u="none" strike="noStrike">
+              <a:solidFill>
+                <a:srgbClr val="000000"/>
+              </a:solidFill>
+              <a:effectLst/>
+              <a:uFillTx/>
+              <a:latin typeface="Arial"/>
+            </a:endParaRPr>
+          </a:p>
+          <a:p>
+            <a:pPr indent="0" algn="l">
+              <a:lnSpc>
+                <a:spcPct val="100000"/>
+              </a:lnSpc>
+              <a:buNone/>
+              <a:tabLst>
+                <a:tab pos="0" algn="l"/>
+              </a:tabLst>
+            </a:pPr>
+            <a:r>
+              <a:rPr lang="en-US" sz="2000" b="0" u="none" strike="noStrike">
+                <a:solidFill>
+                  <a:srgbClr val="000000"/>
+                </a:solidFill>
+                <a:effectLst/>
+                <a:uFillTx/>
+                <a:latin typeface="Arial"/>
+                <a:ea typeface="Arial"/>
+              </a:rPr>
+              <a:t>Technical acronym glossary (reference only):</a:t>
+            </a:r>
+            <a:endParaRPr lang="en-US" sz="2000" b="0" u="none" strike="noStrike">
+              <a:solidFill>
+                <a:srgbClr val="000000"/>
+              </a:solidFill>
+              <a:effectLst/>
+              <a:uFillTx/>
+              <a:latin typeface="Arial"/>
+            </a:endParaRPr>
+          </a:p>
+          <a:p>
+            <a:pPr indent="0" algn="l">
+              <a:lnSpc>
+                <a:spcPct val="100000"/>
+              </a:lnSpc>
+              <a:buNone/>
+              <a:tabLst>
+                <a:tab pos="0" algn="l"/>
+              </a:tabLst>
+            </a:pPr>
+            <a:r>
+              <a:rPr lang="en-US" sz="2000" b="0" u="none" strike="noStrike">
+                <a:solidFill>
+                  <a:srgbClr val="000000"/>
+                </a:solidFill>
+                <a:effectLst/>
+                <a:uFillTx/>
+                <a:latin typeface="Arial"/>
+                <a:ea typeface="Arial"/>
+              </a:rPr>
+              <a:t>• IT: Information Technology · SOC: Security Operations Center</a:t>
+            </a:r>
+            <a:endParaRPr lang="en-US" sz="2000" b="0" u="none" strike="noStrike">
+              <a:solidFill>
+                <a:srgbClr val="000000"/>
+              </a:solidFill>
+              <a:effectLst/>
+              <a:uFillTx/>
+              <a:latin typeface="Arial"/>
+            </a:endParaRPr>
+          </a:p>
+          <a:p>
+            <a:pPr indent="0" algn="l">
+              <a:lnSpc>
+                <a:spcPct val="100000"/>
+              </a:lnSpc>
+              <a:buNone/>
+              <a:tabLst>
+                <a:tab pos="0" algn="l"/>
+              </a:tabLst>
+            </a:pPr>
+            <a:r>
+              <a:rPr lang="en-US" sz="2000" b="0" u="none" strike="noStrike">
+                <a:solidFill>
+                  <a:srgbClr val="000000"/>
+                </a:solidFill>
+                <a:effectLst/>
+                <a:uFillTx/>
+                <a:latin typeface="Arial"/>
+                <a:ea typeface="Arial"/>
+              </a:rPr>
+              <a:t>• MFA: Multi-Factor Authentication · EDR: Endpoint Detection and Response</a:t>
+            </a:r>
+            <a:endParaRPr lang="en-US" sz="2000" b="0" u="none" strike="noStrike">
+              <a:solidFill>
+                <a:srgbClr val="000000"/>
+              </a:solidFill>
+              <a:effectLst/>
+              <a:uFillTx/>
+              <a:latin typeface="Arial"/>
+            </a:endParaRPr>
+          </a:p>
+          <a:p>
+            <a:pPr indent="0" algn="l">
+              <a:lnSpc>
+                <a:spcPct val="100000"/>
+              </a:lnSpc>
+              <a:buNone/>
+              <a:tabLst>
+                <a:tab pos="0" algn="l"/>
+              </a:tabLst>
+            </a:pPr>
+            <a:r>
+              <a:rPr lang="en-US" sz="2000" b="0" u="none" strike="noStrike">
+                <a:solidFill>
+                  <a:srgbClr val="000000"/>
+                </a:solidFill>
+                <a:effectLst/>
+                <a:uFillTx/>
+                <a:latin typeface="Arial"/>
+                <a:ea typeface="Arial"/>
+              </a:rPr>
+              <a:t>• SIEM: Security Information and Event Management · SQL: Structured Query Language</a:t>
+            </a:r>
+            <a:endParaRPr lang="en-US" sz="2000" b="0" u="none" strike="noStrike">
+              <a:solidFill>
+                <a:srgbClr val="000000"/>
+              </a:solidFill>
+              <a:effectLst/>
+              <a:uFillTx/>
+              <a:latin typeface="Arial"/>
+            </a:endParaRPr>
+          </a:p>
+          <a:p>
+            <a:pPr indent="0" algn="l">
+              <a:lnSpc>
+                <a:spcPct val="100000"/>
+              </a:lnSpc>
+              <a:buNone/>
+              <a:tabLst>
+                <a:tab pos="0" algn="l"/>
+              </a:tabLst>
+            </a:pPr>
+            <a:r>
+              <a:rPr lang="en-US" sz="2000" b="0" u="none" strike="noStrike">
+                <a:solidFill>
+                  <a:srgbClr val="000000"/>
+                </a:solidFill>
+                <a:effectLst/>
+                <a:uFillTx/>
+                <a:latin typeface="Arial"/>
+                <a:ea typeface="Arial"/>
+              </a:rPr>
+              <a:t>• TLS: Transport Layer Security · AES: Advanced Encryption Standard · GCM: Galois/Counter Mode</a:t>
+            </a:r>
+            <a:endParaRPr lang="en-US" sz="2000" b="0" u="none" strike="noStrike">
+              <a:solidFill>
+                <a:srgbClr val="000000"/>
+              </a:solidFill>
+              <a:effectLst/>
+              <a:uFillTx/>
+              <a:latin typeface="Arial"/>
+            </a:endParaRPr>
+          </a:p>
+          <a:p>
+            <a:pPr indent="0" algn="l">
+              <a:lnSpc>
+                <a:spcPct val="100000"/>
+              </a:lnSpc>
+              <a:buNone/>
+              <a:tabLst>
+                <a:tab pos="0" algn="l"/>
+              </a:tabLst>
+            </a:pPr>
+            <a:r>
+              <a:rPr lang="en-US" sz="2000" b="0" u="none" strike="noStrike">
+                <a:solidFill>
+                  <a:srgbClr val="000000"/>
+                </a:solidFill>
+                <a:effectLst/>
+                <a:uFillTx/>
+                <a:latin typeface="Arial"/>
+                <a:ea typeface="Arial"/>
+              </a:rPr>
+              <a:t>• IPsec: Internet Protocol Security · VPN: Virtual Private Network</a:t>
+            </a:r>
+            <a:endParaRPr lang="en-US" sz="2000" b="0" u="none" strike="noStrike">
+              <a:solidFill>
+                <a:srgbClr val="000000"/>
+              </a:solidFill>
+              <a:effectLst/>
+              <a:uFillTx/>
+              <a:latin typeface="Arial"/>
+            </a:endParaRPr>
+          </a:p>
+          <a:p>
+            <a:pPr indent="0" algn="l">
+              <a:lnSpc>
+                <a:spcPct val="100000"/>
+              </a:lnSpc>
+              <a:buNone/>
+              <a:tabLst>
+                <a:tab pos="0" algn="l"/>
+              </a:tabLst>
+            </a:pPr>
+            <a:r>
+              <a:rPr lang="en-US" sz="2000" b="0" u="none" strike="noStrike">
+                <a:solidFill>
+                  <a:srgbClr val="000000"/>
+                </a:solidFill>
+                <a:effectLst/>
+                <a:uFillTx/>
+                <a:latin typeface="Arial"/>
+                <a:ea typeface="Arial"/>
+              </a:rPr>
+              <a:t>• RBAC: Role-Based Access Control · OWASP: Open Worldwide Application Security Project</a:t>
+            </a:r>
+            <a:endParaRPr lang="en-US" sz="2000" b="0" u="none" strike="noStrike">
+              <a:solidFill>
+                <a:srgbClr val="000000"/>
+              </a:solidFill>
+              <a:effectLst/>
+              <a:uFillTx/>
+              <a:latin typeface="Arial"/>
+            </a:endParaRPr>
+          </a:p>
+          <a:p>
+            <a:pPr indent="0" algn="l">
+              <a:lnSpc>
+                <a:spcPct val="100000"/>
+              </a:lnSpc>
+              <a:buNone/>
+              <a:tabLst>
+                <a:tab pos="0" algn="l"/>
+              </a:tabLst>
+            </a:pPr>
+            <a:r>
+              <a:rPr lang="en-US" sz="2000" b="0" u="none" strike="noStrike">
+                <a:solidFill>
+                  <a:srgbClr val="000000"/>
+                </a:solidFill>
+                <a:effectLst/>
+                <a:uFillTx/>
+                <a:latin typeface="Arial"/>
+                <a:ea typeface="Arial"/>
+              </a:rPr>
+              <a:t>• XSS: Cross-Site Scripting · WAF: Web Application Firewall</a:t>
+            </a:r>
+            <a:endParaRPr lang="en-US" sz="2000" b="0" u="none" strike="noStrike">
+              <a:solidFill>
+                <a:srgbClr val="000000"/>
+              </a:solidFill>
+              <a:effectLst/>
+              <a:uFillTx/>
+              <a:latin typeface="Arial"/>
+            </a:endParaRPr>
+          </a:p>
+          <a:p>
+            <a:pPr indent="0" algn="l">
+              <a:lnSpc>
+                <a:spcPct val="100000"/>
+              </a:lnSpc>
+              <a:buNone/>
+              <a:tabLst>
+                <a:tab pos="0" algn="l"/>
+              </a:tabLst>
+            </a:pPr>
+            <a:r>
+              <a:rPr lang="en-US" sz="2000" b="0" u="none" strike="noStrike">
+                <a:solidFill>
+                  <a:srgbClr val="000000"/>
+                </a:solidFill>
+                <a:effectLst/>
+                <a:uFillTx/>
+                <a:latin typeface="Arial"/>
+                <a:ea typeface="Arial"/>
+              </a:rPr>
+              <a:t>• CVSS: Common Vulnerability Scoring System · IoT: Internet of Things</a:t>
+            </a:r>
+            <a:endParaRPr lang="en-US" sz="2000" b="0" u="none" strike="noStrike">
+              <a:solidFill>
+                <a:srgbClr val="000000"/>
+              </a:solidFill>
+              <a:effectLst/>
+              <a:uFillTx/>
+              <a:latin typeface="Arial"/>
+            </a:endParaRPr>
+          </a:p>
+          <a:p>
+            <a:pPr indent="0" algn="l">
+              <a:lnSpc>
+                <a:spcPct val="100000"/>
+              </a:lnSpc>
+              <a:buNone/>
+              <a:tabLst>
+                <a:tab pos="0" algn="l"/>
+              </a:tabLst>
+            </a:pPr>
+            <a:r>
+              <a:rPr lang="en-US" sz="2000" b="0" u="none" strike="noStrike">
+                <a:solidFill>
+                  <a:srgbClr val="000000"/>
+                </a:solidFill>
+                <a:effectLst/>
+                <a:uFillTx/>
+                <a:latin typeface="Arial"/>
+                <a:ea typeface="Arial"/>
+              </a:rPr>
+              <a:t>• MQTT: Message Queuing Telemetry Transport · JSON: JavaScript Object Notation · CSV: Comma-Separated Values</a:t>
             </a:r>
             <a:endParaRPr lang="en-US" sz="2000" b="0" u="none" strike="noStrike">
               <a:solidFill>
@@ -1989,6 +2927,9 @@
                 <a:spcPct val="100000"/>
               </a:lnSpc>
               <a:buNone/>
+              <a:tabLst>
+                <a:tab pos="0" algn="l"/>
+              </a:tabLst>
             </a:pPr>
             <a:r>
               <a:rPr lang="en-US" sz="2000" b="0" u="none" strike="noStrike">
@@ -1998,6 +2939,7 @@
                 <a:effectLst/>
                 <a:uFillTx/>
                 <a:latin typeface="Arial"/>
+                <a:ea typeface="Arial"/>
               </a:rPr>
               <a:t>Timing: 0:42–1:23</a:t>
             </a:r>
@@ -2016,6 +2958,9 @@
                 <a:spcPct val="100000"/>
               </a:lnSpc>
               <a:buNone/>
+              <a:tabLst>
+                <a:tab pos="0" algn="l"/>
+              </a:tabLst>
             </a:pPr>
             <a:r>
               <a:rPr lang="en-US" sz="2000" b="0" u="none" strike="noStrike">
@@ -2025,8 +2970,9 @@
                 <a:effectLst/>
                 <a:uFillTx/>
                 <a:latin typeface="Arial"/>
-              </a:rPr>
-              <a:t>Detail-oriented — organizations depend on secure systems and people who notice problems early</a:t>
+                <a:ea typeface="Arial"/>
+              </a:rPr>
+              <a:t>Practice flashcard: About Me</a:t>
             </a:r>
             <a:endParaRPr lang="en-US" sz="2000" b="0" u="none" strike="noStrike">
               <a:solidFill>
@@ -2043,6 +2989,28 @@
                 <a:spcPct val="100000"/>
               </a:lnSpc>
               <a:buNone/>
+              <a:tabLst>
+                <a:tab pos="0" algn="l"/>
+              </a:tabLst>
+            </a:pPr>
+            <a:endParaRPr lang="en-US" sz="2000" b="0" u="none" strike="noStrike">
+              <a:solidFill>
+                <a:srgbClr val="000000"/>
+              </a:solidFill>
+              <a:effectLst/>
+              <a:uFillTx/>
+              <a:latin typeface="Arial"/>
+            </a:endParaRPr>
+          </a:p>
+          <a:p>
+            <a:pPr indent="0" algn="l">
+              <a:lnSpc>
+                <a:spcPct val="100000"/>
+              </a:lnSpc>
+              <a:buNone/>
+              <a:tabLst>
+                <a:tab pos="0" algn="l"/>
+              </a:tabLst>
             </a:pPr>
             <a:r>
               <a:rPr lang="en-US" sz="2000" b="0" u="none" strike="noStrike">
@@ -2052,8 +3020,9 @@
                 <a:effectLst/>
                 <a:uFillTx/>
                 <a:latin typeface="Arial"/>
-              </a:rPr>
-              <a:t>Work experience: reliability, process discipline, teamwork, and documentation</a:t>
+                <a:ea typeface="Arial"/>
+              </a:rPr>
+              <a:t>Talking points:</a:t>
             </a:r>
             <a:endParaRPr lang="en-US" sz="2000" b="0" u="none" strike="noStrike">
               <a:solidFill>
@@ -2070,6 +3039,9 @@
                 <a:spcPct val="100000"/>
               </a:lnSpc>
               <a:buNone/>
+              <a:tabLst>
+                <a:tab pos="0" algn="l"/>
+              </a:tabLst>
             </a:pPr>
             <a:r>
               <a:rPr lang="en-US" sz="2000" b="0" u="none" strike="noStrike">
@@ -2079,8 +3051,9 @@
                 <a:effectLst/>
                 <a:uFillTx/>
                 <a:latin typeface="Arial"/>
-              </a:rPr>
-              <a:t>Technical areas: risk assessment, threat and vulnerability management, network security, web app security</a:t>
+                <a:ea typeface="Arial"/>
+              </a:rPr>
+              <a:t>• I’m detail-oriented because security work depends on people who notice problems early</a:t>
             </a:r>
             <a:endParaRPr lang="en-US" sz="2000" b="0" u="none" strike="noStrike">
               <a:solidFill>
@@ -2097,6 +3070,9 @@
                 <a:spcPct val="100000"/>
               </a:lnSpc>
               <a:buNone/>
+              <a:tabLst>
+                <a:tab pos="0" algn="l"/>
+              </a:tabLst>
             </a:pPr>
             <a:r>
               <a:rPr lang="en-US" sz="2000" b="0" u="none" strike="noStrike">
@@ -2106,8 +3082,71 @@
                 <a:effectLst/>
                 <a:uFillTx/>
                 <a:latin typeface="Arial"/>
-              </a:rPr>
-              <a:t>Also: Linux, cryptography, database security, Python, SQL, incident response</a:t>
+                <a:ea typeface="Arial"/>
+              </a:rPr>
+              <a:t>• My previous jobs taught me reliability, following processes, teamwork, and clear documentation</a:t>
+            </a:r>
+            <a:endParaRPr lang="en-US" sz="2000" b="0" u="none" strike="noStrike">
+              <a:solidFill>
+                <a:srgbClr val="000000"/>
+              </a:solidFill>
+              <a:effectLst/>
+              <a:uFillTx/>
+              <a:latin typeface="Arial"/>
+            </a:endParaRPr>
+          </a:p>
+          <a:p>
+            <a:pPr indent="0" algn="l">
+              <a:lnSpc>
+                <a:spcPct val="100000"/>
+              </a:lnSpc>
+              <a:buNone/>
+              <a:tabLst>
+                <a:tab pos="0" algn="l"/>
+              </a:tabLst>
+            </a:pPr>
+            <a:r>
+              <a:rPr lang="en-US" sz="2000" b="0" u="none" strike="noStrike">
+                <a:solidFill>
+                  <a:srgbClr val="000000"/>
+                </a:solidFill>
+                <a:effectLst/>
+                <a:uFillTx/>
+                <a:latin typeface="Arial"/>
+                <a:ea typeface="Arial"/>
+              </a:rPr>
+              <a:t>• My main strengths: risk assessment, finding and fixing vulnerabilities, network security, and web application security</a:t>
+            </a:r>
+            <a:endParaRPr lang="en-US" sz="2000" b="0" u="none" strike="noStrike">
+              <a:solidFill>
+                <a:srgbClr val="000000"/>
+              </a:solidFill>
+              <a:effectLst/>
+              <a:uFillTx/>
+              <a:latin typeface="Arial"/>
+            </a:endParaRPr>
+          </a:p>
+          <a:p>
+            <a:pPr indent="0" algn="l">
+              <a:lnSpc>
+                <a:spcPct val="100000"/>
+              </a:lnSpc>
+              <a:buNone/>
+              <a:tabLst>
+                <a:tab pos="0" algn="l"/>
+              </a:tabLst>
+            </a:pPr>
+            <a:r>
+              <a:rPr lang="en-US" sz="2000" b="0" u="none" strike="noStrike">
+                <a:solidFill>
+                  <a:srgbClr val="000000"/>
+                </a:solidFill>
+                <a:effectLst/>
+                <a:uFillTx/>
+                <a:latin typeface="Arial"/>
+                <a:ea typeface="Arial"/>
+              </a:rPr>
+              <a:t>• I also have skills in Linux, encryption, databases, Python, SQL (Structured Query Language), and the basics of incident response</a:t>
             </a:r>
             <a:endParaRPr lang="en-US" sz="2000" b="0" u="none" strike="noStrike">
               <a:solidFill>
@@ -2240,6 +3279,9 @@
                 <a:spcPct val="100000"/>
               </a:lnSpc>
               <a:buNone/>
+              <a:tabLst>
+                <a:tab pos="0" algn="l"/>
+              </a:tabLst>
             </a:pPr>
             <a:r>
               <a:rPr lang="en-US" sz="2000" b="0" u="none" strike="noStrike">
@@ -2249,6 +3291,7 @@
                 <a:effectLst/>
                 <a:uFillTx/>
                 <a:latin typeface="Arial"/>
+                <a:ea typeface="Arial"/>
               </a:rPr>
               <a:t>Timing: 1:23–1:52</a:t>
             </a:r>
@@ -2267,6 +3310,9 @@
                 <a:spcPct val="100000"/>
               </a:lnSpc>
               <a:buNone/>
+              <a:tabLst>
+                <a:tab pos="0" algn="l"/>
+              </a:tabLst>
             </a:pPr>
             <a:r>
               <a:rPr lang="en-US" sz="2000" b="0" u="none" strike="noStrike">
@@ -2276,8 +3322,9 @@
                 <a:effectLst/>
                 <a:uFillTx/>
                 <a:latin typeface="Arial"/>
-              </a:rPr>
-              <a:t>SOC Analyst: monitors systems, investigates alerts, prioritizes risk, communicates findings</a:t>
+                <a:ea typeface="Arial"/>
+              </a:rPr>
+              <a:t>Practice flashcard: Why These Projects</a:t>
             </a:r>
             <a:endParaRPr lang="en-US" sz="2000" b="0" u="none" strike="noStrike">
               <a:solidFill>
@@ -2294,6 +3341,28 @@
                 <a:spcPct val="100000"/>
               </a:lnSpc>
               <a:buNone/>
+              <a:tabLst>
+                <a:tab pos="0" algn="l"/>
+              </a:tabLst>
+            </a:pPr>
+            <a:endParaRPr lang="en-US" sz="2000" b="0" u="none" strike="noStrike">
+              <a:solidFill>
+                <a:srgbClr val="000000"/>
+              </a:solidFill>
+              <a:effectLst/>
+              <a:uFillTx/>
+              <a:latin typeface="Arial"/>
+            </a:endParaRPr>
+          </a:p>
+          <a:p>
+            <a:pPr indent="0" algn="l">
+              <a:lnSpc>
+                <a:spcPct val="100000"/>
+              </a:lnSpc>
+              <a:buNone/>
+              <a:tabLst>
+                <a:tab pos="0" algn="l"/>
+              </a:tabLst>
             </a:pPr>
             <a:r>
               <a:rPr lang="en-US" sz="2000" b="0" u="none" strike="noStrike">
@@ -2303,8 +3372,9 @@
                 <a:effectLst/>
                 <a:uFillTx/>
                 <a:latin typeface="Arial"/>
-              </a:rPr>
-              <a:t>Projects show risk-based thinking, investigation, and remediation planning</a:t>
+                <a:ea typeface="Arial"/>
+              </a:rPr>
+              <a:t>Talking points:</a:t>
             </a:r>
             <a:endParaRPr lang="en-US" sz="2000" b="0" u="none" strike="noStrike">
               <a:solidFill>
@@ -2321,6 +3391,9 @@
                 <a:spcPct val="100000"/>
               </a:lnSpc>
               <a:buNone/>
+              <a:tabLst>
+                <a:tab pos="0" algn="l"/>
+              </a:tabLst>
             </a:pPr>
             <a:r>
               <a:rPr lang="en-US" sz="2000" b="0" u="none" strike="noStrike">
@@ -2330,8 +3403,71 @@
                 <a:effectLst/>
                 <a:uFillTx/>
                 <a:latin typeface="Arial"/>
-              </a:rPr>
-              <a:t>8 projects total: 6 cybersecurity case studies + 2 programming/e-commerce projects</a:t>
+                <a:ea typeface="Arial"/>
+              </a:rPr>
+              <a:t>• A SOC Analyst watches systems, investigates alerts, decides what is most important, and explains findings clearly</a:t>
+            </a:r>
+            <a:endParaRPr lang="en-US" sz="2000" b="0" u="none" strike="noStrike">
+              <a:solidFill>
+                <a:srgbClr val="000000"/>
+              </a:solidFill>
+              <a:effectLst/>
+              <a:uFillTx/>
+              <a:latin typeface="Arial"/>
+            </a:endParaRPr>
+          </a:p>
+          <a:p>
+            <a:pPr indent="0" algn="l">
+              <a:lnSpc>
+                <a:spcPct val="100000"/>
+              </a:lnSpc>
+              <a:buNone/>
+              <a:tabLst>
+                <a:tab pos="0" algn="l"/>
+              </a:tabLst>
+            </a:pPr>
+            <a:r>
+              <a:rPr lang="en-US" sz="2000" b="0" u="none" strike="noStrike">
+                <a:solidFill>
+                  <a:srgbClr val="000000"/>
+                </a:solidFill>
+                <a:effectLst/>
+                <a:uFillTx/>
+                <a:latin typeface="Arial"/>
+                <a:ea typeface="Arial"/>
+              </a:rPr>
+              <a:t>• I chose projects that practice exactly those skills: thinking about risk, investigating problems, planning fixes, and writing clear documentation</a:t>
+            </a:r>
+            <a:endParaRPr lang="en-US" sz="2000" b="0" u="none" strike="noStrike">
+              <a:solidFill>
+                <a:srgbClr val="000000"/>
+              </a:solidFill>
+              <a:effectLst/>
+              <a:uFillTx/>
+              <a:latin typeface="Arial"/>
+            </a:endParaRPr>
+          </a:p>
+          <a:p>
+            <a:pPr indent="0" algn="l">
+              <a:lnSpc>
+                <a:spcPct val="100000"/>
+              </a:lnSpc>
+              <a:buNone/>
+              <a:tabLst>
+                <a:tab pos="0" algn="l"/>
+              </a:tabLst>
+            </a:pPr>
+            <a:r>
+              <a:rPr lang="en-US" sz="2000" b="0" u="none" strike="noStrike">
+                <a:solidFill>
+                  <a:srgbClr val="000000"/>
+                </a:solidFill>
+                <a:effectLst/>
+                <a:uFillTx/>
+                <a:latin typeface="Arial"/>
+                <a:ea typeface="Arial"/>
+              </a:rPr>
+              <a:t>• Eight projects total — six cybersecurity case studies plus programming and e-commerce work</a:t>
             </a:r>
             <a:endParaRPr lang="en-US" sz="2000" b="0" u="none" strike="noStrike">
               <a:solidFill>
@@ -2464,6 +3600,9 @@
                 <a:spcPct val="100000"/>
               </a:lnSpc>
               <a:buNone/>
+              <a:tabLst>
+                <a:tab pos="0" algn="l"/>
+              </a:tabLst>
             </a:pPr>
             <a:r>
               <a:rPr lang="en-US" sz="2000" b="0" u="none" strike="noStrike">
@@ -2473,6 +3612,7 @@
                 <a:effectLst/>
                 <a:uFillTx/>
                 <a:latin typeface="Arial"/>
+                <a:ea typeface="Arial"/>
               </a:rPr>
               <a:t>Timing: 1:52–2:57</a:t>
             </a:r>
@@ -2491,6 +3631,9 @@
                 <a:spcPct val="100000"/>
               </a:lnSpc>
               <a:buNone/>
+              <a:tabLst>
+                <a:tab pos="0" algn="l"/>
+              </a:tabLst>
             </a:pPr>
             <a:r>
               <a:rPr lang="en-US" sz="2000" b="0" u="none" strike="noStrike">
@@ -2500,8 +3643,9 @@
                 <a:effectLst/>
                 <a:uFillTx/>
                 <a:latin typeface="Arial"/>
-              </a:rPr>
-              <a:t>Logistics company: 150 employees across 3 office locations</a:t>
+                <a:ea typeface="Arial"/>
+              </a:rPr>
+              <a:t>Practice flashcard: Project 1 — Northbridge Logistics Risk Assessment</a:t>
             </a:r>
             <a:endParaRPr lang="en-US" sz="2000" b="0" u="none" strike="noStrike">
               <a:solidFill>
@@ -2518,6 +3662,28 @@
                 <a:spcPct val="100000"/>
               </a:lnSpc>
               <a:buNone/>
+              <a:tabLst>
+                <a:tab pos="0" algn="l"/>
+              </a:tabLst>
+            </a:pPr>
+            <a:endParaRPr lang="en-US" sz="2000" b="0" u="none" strike="noStrike">
+              <a:solidFill>
+                <a:srgbClr val="000000"/>
+              </a:solidFill>
+              <a:effectLst/>
+              <a:uFillTx/>
+              <a:latin typeface="Arial"/>
+            </a:endParaRPr>
+          </a:p>
+          <a:p>
+            <a:pPr indent="0" algn="l">
+              <a:lnSpc>
+                <a:spcPct val="100000"/>
+              </a:lnSpc>
+              <a:buNone/>
+              <a:tabLst>
+                <a:tab pos="0" algn="l"/>
+              </a:tabLst>
             </a:pPr>
             <a:r>
               <a:rPr lang="en-US" sz="2000" b="0" u="none" strike="noStrike">
@@ -2527,8 +3693,9 @@
                 <a:effectLst/>
                 <a:uFillTx/>
                 <a:latin typeface="Arial"/>
-              </a:rPr>
-              <a:t>Identified assets, threats, vulnerabilities, and business impact</a:t>
+                <a:ea typeface="Arial"/>
+              </a:rPr>
+              <a:t>Talking points:</a:t>
             </a:r>
             <a:endParaRPr lang="en-US" sz="2000" b="0" u="none" strike="noStrike">
               <a:solidFill>
@@ -2545,6 +3712,9 @@
                 <a:spcPct val="100000"/>
               </a:lnSpc>
               <a:buNone/>
+              <a:tabLst>
+                <a:tab pos="0" algn="l"/>
+              </a:tabLst>
             </a:pPr>
             <a:r>
               <a:rPr lang="en-US" sz="2000" b="0" u="none" strike="noStrike">
@@ -2554,8 +3724,9 @@
                 <a:effectLst/>
                 <a:uFillTx/>
                 <a:latin typeface="Arial"/>
-              </a:rPr>
-              <a:t>Controls: MFA, EDR, network segmentation, SIEM, patching, backup and disaster recovery</a:t>
+                <a:ea typeface="Arial"/>
+              </a:rPr>
+              <a:t>• Risk assessment for a mid-sized logistics company: 150 employees, 3 offices, 180 computers, and 20 servers</a:t>
             </a:r>
             <a:endParaRPr lang="en-US" sz="2000" b="0" u="none" strike="noStrike">
               <a:solidFill>
@@ -2572,6 +3743,9 @@
                 <a:spcPct val="100000"/>
               </a:lnSpc>
               <a:buNone/>
+              <a:tabLst>
+                <a:tab pos="0" algn="l"/>
+              </a:tabLst>
             </a:pPr>
             <a:r>
               <a:rPr lang="en-US" sz="2000" b="0" u="none" strike="noStrike">
@@ -2581,8 +3755,9 @@
                 <a:effectLst/>
                 <a:uFillTx/>
                 <a:latin typeface="Arial"/>
-              </a:rPr>
-              <a:t>Key point: prioritizing risk and building a roadmap, not just naming tools</a:t>
+                <a:ea typeface="Arial"/>
+              </a:rPr>
+              <a:t>• I listed the important assets, possible threats, weak points, how likely attacks were, and the business impact</a:t>
             </a:r>
             <a:endParaRPr lang="en-US" sz="2000" b="0" u="none" strike="noStrike">
               <a:solidFill>
@@ -2599,6 +3774,9 @@
                 <a:spcPct val="100000"/>
               </a:lnSpc>
               <a:buNone/>
+              <a:tabLst>
+                <a:tab pos="0" algn="l"/>
+              </a:tabLst>
             </a:pPr>
             <a:r>
               <a:rPr lang="en-US" sz="2000" b="0" u="none" strike="noStrike">
@@ -2608,8 +3786,40 @@
                 <a:effectLst/>
                 <a:uFillTx/>
                 <a:latin typeface="Arial"/>
-              </a:rPr>
-              <a:t>Roadmap: contain highest risks → detect and harden → validate controls</a:t>
+                <a:ea typeface="Arial"/>
+              </a:rPr>
+              <a:t>• I recommended stronger logins using MFA (Multi-Factor Authentication), endpoint protection using EDR (Endpoint Detection and Response), network separation, SIEM (Security Information and Event Management), regular updates, and tested backups</a:t>
+            </a:r>
+            <a:endParaRPr lang="en-US" sz="2000" b="0" u="none" strike="noStrike">
+              <a:solidFill>
+                <a:srgbClr val="000000"/>
+              </a:solidFill>
+              <a:effectLst/>
+              <a:uFillTx/>
+              <a:latin typeface="Arial"/>
+            </a:endParaRPr>
+          </a:p>
+          <a:p>
+            <a:pPr indent="0" algn="l">
+              <a:lnSpc>
+                <a:spcPct val="100000"/>
+              </a:lnSpc>
+              <a:buNone/>
+              <a:tabLst>
+                <a:tab pos="0" algn="l"/>
+              </a:tabLst>
+            </a:pPr>
+            <a:r>
+              <a:rPr lang="en-US" sz="2000" b="0" u="none" strike="noStrike">
+                <a:solidFill>
+                  <a:srgbClr val="000000"/>
+                </a:solidFill>
+                <a:effectLst/>
+                <a:uFillTx/>
+                <a:latin typeface="Arial"/>
+                <a:ea typeface="Arial"/>
+              </a:rPr>
+              <a:t>• SOC takeaway: Turning technical findings into a clear, prioritized plan that leaders can act on</a:t>
             </a:r>
             <a:endParaRPr lang="en-US" sz="2000" b="0" u="none" strike="noStrike">
               <a:solidFill>
@@ -2742,6 +3952,9 @@
                 <a:spcPct val="100000"/>
               </a:lnSpc>
               <a:buNone/>
+              <a:tabLst>
+                <a:tab pos="0" algn="l"/>
+              </a:tabLst>
             </a:pPr>
             <a:r>
               <a:rPr lang="en-US" sz="2000" b="0" u="none" strike="noStrike">
@@ -2751,6 +3964,7 @@
                 <a:effectLst/>
                 <a:uFillTx/>
                 <a:latin typeface="Arial"/>
+                <a:ea typeface="Arial"/>
               </a:rPr>
               <a:t>Timing: 2:57–3:48</a:t>
             </a:r>
@@ -2769,6 +3983,9 @@
                 <a:spcPct val="100000"/>
               </a:lnSpc>
               <a:buNone/>
+              <a:tabLst>
+                <a:tab pos="0" algn="l"/>
+              </a:tabLst>
             </a:pPr>
             <a:r>
               <a:rPr lang="en-US" sz="2000" b="0" u="none" strike="noStrike">
@@ -2778,8 +3995,9 @@
                 <a:effectLst/>
                 <a:uFillTx/>
                 <a:latin typeface="Arial"/>
-              </a:rPr>
-              <a:t>Protecting healthcare information: confidentiality, integrity, and availability</a:t>
+                <a:ea typeface="Arial"/>
+              </a:rPr>
+              <a:t>Practice flashcard: Project 2 — SecureHealth Cryptography &amp; Network Security</a:t>
             </a:r>
             <a:endParaRPr lang="en-US" sz="2000" b="0" u="none" strike="noStrike">
               <a:solidFill>
@@ -2796,6 +4014,28 @@
                 <a:spcPct val="100000"/>
               </a:lnSpc>
               <a:buNone/>
+              <a:tabLst>
+                <a:tab pos="0" algn="l"/>
+              </a:tabLst>
+            </a:pPr>
+            <a:endParaRPr lang="en-US" sz="2000" b="0" u="none" strike="noStrike">
+              <a:solidFill>
+                <a:srgbClr val="000000"/>
+              </a:solidFill>
+              <a:effectLst/>
+              <a:uFillTx/>
+              <a:latin typeface="Arial"/>
+            </a:endParaRPr>
+          </a:p>
+          <a:p>
+            <a:pPr indent="0" algn="l">
+              <a:lnSpc>
+                <a:spcPct val="100000"/>
+              </a:lnSpc>
+              <a:buNone/>
+              <a:tabLst>
+                <a:tab pos="0" algn="l"/>
+              </a:tabLst>
             </a:pPr>
             <a:r>
               <a:rPr lang="en-US" sz="2000" b="0" u="none" strike="noStrike">
@@ -2805,8 +4045,9 @@
                 <a:effectLst/>
                 <a:uFillTx/>
                 <a:latin typeface="Arial"/>
-              </a:rPr>
-              <a:t>TLS 1.3 for data in transit; AES-256-GCM for sensitive data</a:t>
+                <a:ea typeface="Arial"/>
+              </a:rPr>
+              <a:t>Talking points:</a:t>
             </a:r>
             <a:endParaRPr lang="en-US" sz="2000" b="0" u="none" strike="noStrike">
               <a:solidFill>
@@ -2823,6 +4064,9 @@
                 <a:spcPct val="100000"/>
               </a:lnSpc>
               <a:buNone/>
+              <a:tabLst>
+                <a:tab pos="0" algn="l"/>
+              </a:tabLst>
             </a:pPr>
             <a:r>
               <a:rPr lang="en-US" sz="2000" b="0" u="none" strike="noStrike">
@@ -2832,8 +4076,9 @@
                 <a:effectLst/>
                 <a:uFillTx/>
                 <a:latin typeface="Arial"/>
-              </a:rPr>
-              <a:t>PKI for certificates, secure key management, and IPsec VPN between locations</a:t>
+                <a:ea typeface="Arial"/>
+              </a:rPr>
+              <a:t>• I designed a layered security plan to protect sensitive healthcare information</a:t>
             </a:r>
             <a:endParaRPr lang="en-US" sz="2000" b="0" u="none" strike="noStrike">
               <a:solidFill>
@@ -2850,6 +4095,9 @@
                 <a:spcPct val="100000"/>
               </a:lnSpc>
               <a:buNone/>
+              <a:tabLst>
+                <a:tab pos="0" algn="l"/>
+              </a:tabLst>
             </a:pPr>
             <a:r>
               <a:rPr lang="en-US" sz="2000" b="0" u="none" strike="noStrike">
@@ -2859,8 +4107,9 @@
                 <a:effectLst/>
                 <a:uFillTx/>
                 <a:latin typeface="Arial"/>
-              </a:rPr>
-              <a:t>Tied to HIPAA and HITECH requirements</a:t>
+                <a:ea typeface="Arial"/>
+              </a:rPr>
+              <a:t>• I chose TLS 1.3 (Transport Layer Security) for data moving across the network and AES-256-GCM (Advanced Encryption Standard with Galois/Counter Mode) for stored data</a:t>
             </a:r>
             <a:endParaRPr lang="en-US" sz="2000" b="0" u="none" strike="noStrike">
               <a:solidFill>
@@ -2877,6 +4126,9 @@
                 <a:spcPct val="100000"/>
               </a:lnSpc>
               <a:buNone/>
+              <a:tabLst>
+                <a:tab pos="0" algn="l"/>
+              </a:tabLst>
             </a:pPr>
             <a:r>
               <a:rPr lang="en-US" sz="2000" b="0" u="none" strike="noStrike">
@@ -2886,8 +4138,40 @@
                 <a:effectLst/>
                 <a:uFillTx/>
                 <a:latin typeface="Arial"/>
-              </a:rPr>
-              <a:t>Lesson: encryption must be managed through the full key and certificate lifecycle</a:t>
+                <a:ea typeface="Arial"/>
+              </a:rPr>
+              <a:t>• I also planned certificate and key management plus an IPsec VPN: Internet Protocol Security over a Virtual Private Network</a:t>
+            </a:r>
+            <a:endParaRPr lang="en-US" sz="2000" b="0" u="none" strike="noStrike">
+              <a:solidFill>
+                <a:srgbClr val="000000"/>
+              </a:solidFill>
+              <a:effectLst/>
+              <a:uFillTx/>
+              <a:latin typeface="Arial"/>
+            </a:endParaRPr>
+          </a:p>
+          <a:p>
+            <a:pPr indent="0" algn="l">
+              <a:lnSpc>
+                <a:spcPct val="100000"/>
+              </a:lnSpc>
+              <a:buNone/>
+              <a:tabLst>
+                <a:tab pos="0" algn="l"/>
+              </a:tabLst>
+            </a:pPr>
+            <a:r>
+              <a:rPr lang="en-US" sz="2000" b="0" u="none" strike="noStrike">
+                <a:solidFill>
+                  <a:srgbClr val="000000"/>
+                </a:solidFill>
+                <a:effectLst/>
+                <a:uFillTx/>
+                <a:latin typeface="Arial"/>
+                <a:ea typeface="Arial"/>
+              </a:rPr>
+              <a:t>• Key lesson: Strong encryption only works if keys are created, stored, rotated, and revoked safely</a:t>
             </a:r>
             <a:endParaRPr lang="en-US" sz="2000" b="0" u="none" strike="noStrike">
               <a:solidFill>
@@ -3020,6 +4304,9 @@
                 <a:spcPct val="100000"/>
               </a:lnSpc>
               <a:buNone/>
+              <a:tabLst>
+                <a:tab pos="0" algn="l"/>
+              </a:tabLst>
             </a:pPr>
             <a:r>
               <a:rPr lang="en-US" sz="2000" b="0" u="none" strike="noStrike">
@@ -3029,6 +4316,7 @@
                 <a:effectLst/>
                 <a:uFillTx/>
                 <a:latin typeface="Arial"/>
+                <a:ea typeface="Arial"/>
               </a:rPr>
               <a:t>Timing: 3:48–4:35</a:t>
             </a:r>
@@ -3047,6 +4335,9 @@
                 <a:spcPct val="100000"/>
               </a:lnSpc>
               <a:buNone/>
+              <a:tabLst>
+                <a:tab pos="0" algn="l"/>
+              </a:tabLst>
             </a:pPr>
             <a:r>
               <a:rPr lang="en-US" sz="2000" b="0" u="none" strike="noStrike">
@@ -3056,8 +4347,9 @@
                 <a:effectLst/>
                 <a:uFillTx/>
                 <a:latin typeface="Arial"/>
-              </a:rPr>
-              <a:t>Secure PostgreSQL database for a healthcare clinic</a:t>
+                <a:ea typeface="Arial"/>
+              </a:rPr>
+              <a:t>Practice flashcard: Project 3 — Healthcare Clinic Secure Database Design</a:t>
             </a:r>
             <a:endParaRPr lang="en-US" sz="2000" b="0" u="none" strike="noStrike">
               <a:solidFill>
@@ -3074,6 +4366,28 @@
                 <a:spcPct val="100000"/>
               </a:lnSpc>
               <a:buNone/>
+              <a:tabLst>
+                <a:tab pos="0" algn="l"/>
+              </a:tabLst>
+            </a:pPr>
+            <a:endParaRPr lang="en-US" sz="2000" b="0" u="none" strike="noStrike">
+              <a:solidFill>
+                <a:srgbClr val="000000"/>
+              </a:solidFill>
+              <a:effectLst/>
+              <a:uFillTx/>
+              <a:latin typeface="Arial"/>
+            </a:endParaRPr>
+          </a:p>
+          <a:p>
+            <a:pPr indent="0" algn="l">
+              <a:lnSpc>
+                <a:spcPct val="100000"/>
+              </a:lnSpc>
+              <a:buNone/>
+              <a:tabLst>
+                <a:tab pos="0" algn="l"/>
+              </a:tabLst>
             </a:pPr>
             <a:r>
               <a:rPr lang="en-US" sz="2000" b="0" u="none" strike="noStrike">
@@ -3083,8 +4397,9 @@
                 <a:effectLst/>
                 <a:uFillTx/>
                 <a:latin typeface="Arial"/>
-              </a:rPr>
-              <a:t>RBAC and least privilege, encryption at rest, and encrypted connections</a:t>
+                <a:ea typeface="Arial"/>
+              </a:rPr>
+              <a:t>Talking points:</a:t>
             </a:r>
             <a:endParaRPr lang="en-US" sz="2000" b="0" u="none" strike="noStrike">
               <a:solidFill>
@@ -3101,6 +4416,9 @@
                 <a:spcPct val="100000"/>
               </a:lnSpc>
               <a:buNone/>
+              <a:tabLst>
+                <a:tab pos="0" algn="l"/>
+              </a:tabLst>
             </a:pPr>
             <a:r>
               <a:rPr lang="en-US" sz="2000" b="0" u="none" strike="noStrike">
@@ -3110,8 +4428,9 @@
                 <a:effectLst/>
                 <a:uFillTx/>
                 <a:latin typeface="Arial"/>
-              </a:rPr>
-              <a:t>Audit logging, backups, and recovery planning</a:t>
+                <a:ea typeface="Arial"/>
+              </a:rPr>
+              <a:t>• I designed a clean PostgreSQL database model for a healthcare clinic focused on keeping data private, accurate, and available</a:t>
             </a:r>
             <a:endParaRPr lang="en-US" sz="2000" b="0" u="none" strike="noStrike">
               <a:solidFill>
@@ -3128,6 +4447,9 @@
                 <a:spcPct val="100000"/>
               </a:lnSpc>
               <a:buNone/>
+              <a:tabLst>
+                <a:tab pos="0" algn="l"/>
+              </a:tabLst>
             </a:pPr>
             <a:r>
               <a:rPr lang="en-US" sz="2000" b="0" u="none" strike="noStrike">
@@ -3137,8 +4459,9 @@
                 <a:effectLst/>
                 <a:uFillTx/>
                 <a:latin typeface="Arial"/>
-              </a:rPr>
-              <a:t>Staff access only what their job needs — reduces risk and supports privacy</a:t>
+                <a:ea typeface="Arial"/>
+              </a:rPr>
+              <a:t>• I used RBAC (Role-Based Access Control) so each staff member only sees what they need</a:t>
             </a:r>
             <a:endParaRPr lang="en-US" sz="2000" b="0" u="none" strike="noStrike">
               <a:solidFill>
@@ -3155,6 +4478,9 @@
                 <a:spcPct val="100000"/>
               </a:lnSpc>
               <a:buNone/>
+              <a:tabLst>
+                <a:tab pos="0" algn="l"/>
+              </a:tabLst>
             </a:pPr>
             <a:r>
               <a:rPr lang="en-US" sz="2000" b="0" u="none" strike="noStrike">
@@ -3164,8 +4490,40 @@
                 <a:effectLst/>
                 <a:uFillTx/>
                 <a:latin typeface="Arial"/>
-              </a:rPr>
-              <a:t>Lesson: weak access control and poor logging can lead to incidents</a:t>
+                <a:ea typeface="Arial"/>
+              </a:rPr>
+              <a:t>• I recommended encryption, secure connections, activity logs, backups, and a recovery plan</a:t>
+            </a:r>
+            <a:endParaRPr lang="en-US" sz="2000" b="0" u="none" strike="noStrike">
+              <a:solidFill>
+                <a:srgbClr val="000000"/>
+              </a:solidFill>
+              <a:effectLst/>
+              <a:uFillTx/>
+              <a:latin typeface="Arial"/>
+            </a:endParaRPr>
+          </a:p>
+          <a:p>
+            <a:pPr indent="0" algn="l">
+              <a:lnSpc>
+                <a:spcPct val="100000"/>
+              </a:lnSpc>
+              <a:buNone/>
+              <a:tabLst>
+                <a:tab pos="0" algn="l"/>
+              </a:tabLst>
+            </a:pPr>
+            <a:r>
+              <a:rPr lang="en-US" sz="2000" b="0" u="none" strike="noStrike">
+                <a:solidFill>
+                  <a:srgbClr val="000000"/>
+                </a:solidFill>
+                <a:effectLst/>
+                <a:uFillTx/>
+                <a:latin typeface="Arial"/>
+                <a:ea typeface="Arial"/>
+              </a:rPr>
+              <a:t>• SOC takeaway: Weak access control and missing logs can turn a small problem into a serious incident</a:t>
             </a:r>
             <a:endParaRPr lang="en-US" sz="2000" b="0" u="none" strike="noStrike">
               <a:solidFill>
@@ -3298,6 +4656,9 @@
                 <a:spcPct val="100000"/>
               </a:lnSpc>
               <a:buNone/>
+              <a:tabLst>
+                <a:tab pos="0" algn="l"/>
+              </a:tabLst>
             </a:pPr>
             <a:r>
               <a:rPr lang="en-US" sz="2000" b="0" u="none" strike="noStrike">
@@ -3307,6 +4668,7 @@
                 <a:effectLst/>
                 <a:uFillTx/>
                 <a:latin typeface="Arial"/>
+                <a:ea typeface="Arial"/>
               </a:rPr>
               <a:t>Timing: 4:35–5:28</a:t>
             </a:r>
@@ -3325,6 +4687,9 @@
                 <a:spcPct val="100000"/>
               </a:lnSpc>
               <a:buNone/>
+              <a:tabLst>
+                <a:tab pos="0" algn="l"/>
+              </a:tabLst>
             </a:pPr>
             <a:r>
               <a:rPr lang="en-US" sz="2000" b="0" u="none" strike="noStrike">
@@ -3334,8 +4699,9 @@
                 <a:effectLst/>
                 <a:uFillTx/>
                 <a:latin typeface="Arial"/>
-              </a:rPr>
-              <a:t>E-commerce app reviewed against the OWASP Top 10</a:t>
+                <a:ea typeface="Arial"/>
+              </a:rPr>
+              <a:t>Practice flashcard: Project 4 — RetailHub OWASP Web App Assessment</a:t>
             </a:r>
             <a:endParaRPr lang="en-US" sz="2000" b="0" u="none" strike="noStrike">
               <a:solidFill>
@@ -3352,6 +4718,28 @@
                 <a:spcPct val="100000"/>
               </a:lnSpc>
               <a:buNone/>
+              <a:tabLst>
+                <a:tab pos="0" algn="l"/>
+              </a:tabLst>
+            </a:pPr>
+            <a:endParaRPr lang="en-US" sz="2000" b="0" u="none" strike="noStrike">
+              <a:solidFill>
+                <a:srgbClr val="000000"/>
+              </a:solidFill>
+              <a:effectLst/>
+              <a:uFillTx/>
+              <a:latin typeface="Arial"/>
+            </a:endParaRPr>
+          </a:p>
+          <a:p>
+            <a:pPr indent="0" algn="l">
+              <a:lnSpc>
+                <a:spcPct val="100000"/>
+              </a:lnSpc>
+              <a:buNone/>
+              <a:tabLst>
+                <a:tab pos="0" algn="l"/>
+              </a:tabLst>
             </a:pPr>
             <a:r>
               <a:rPr lang="en-US" sz="2000" b="0" u="none" strike="noStrike">
@@ -3361,8 +4749,9 @@
                 <a:effectLst/>
                 <a:uFillTx/>
                 <a:latin typeface="Arial"/>
-              </a:rPr>
-              <a:t>Risks: broken access control, injection, XSS, weak authentication, insufficient logging</a:t>
+                <a:ea typeface="Arial"/>
+              </a:rPr>
+              <a:t>Talking points:</a:t>
             </a:r>
             <a:endParaRPr lang="en-US" sz="2000" b="0" u="none" strike="noStrike">
               <a:solidFill>
@@ -3379,6 +4768,9 @@
                 <a:spcPct val="100000"/>
               </a:lnSpc>
               <a:buNone/>
+              <a:tabLst>
+                <a:tab pos="0" algn="l"/>
+              </a:tabLst>
             </a:pPr>
             <a:r>
               <a:rPr lang="en-US" sz="2000" b="0" u="none" strike="noStrike">
@@ -3388,8 +4780,9 @@
                 <a:effectLst/>
                 <a:uFillTx/>
                 <a:latin typeface="Arial"/>
-              </a:rPr>
-              <a:t>Remediation: MFA, stronger access controls, input validation, SAST/DAST</a:t>
+                <a:ea typeface="Arial"/>
+              </a:rPr>
+              <a:t>• I reviewed an online store against the OWASP Top 10. OWASP means Open Worldwide Application Security Project, and its Top 10 highlights critical web application risks</a:t>
             </a:r>
             <a:endParaRPr lang="en-US" sz="2000" b="0" u="none" strike="noStrike">
               <a:solidFill>
@@ -3406,6 +4799,9 @@
                 <a:spcPct val="100000"/>
               </a:lnSpc>
               <a:buNone/>
+              <a:tabLst>
+                <a:tab pos="0" algn="l"/>
+              </a:tabLst>
             </a:pPr>
             <a:r>
               <a:rPr lang="en-US" sz="2000" b="0" u="none" strike="noStrike">
@@ -3415,8 +4811,9 @@
                 <a:effectLst/>
                 <a:uFillTx/>
                 <a:latin typeface="Arial"/>
-              </a:rPr>
-              <a:t>Also: logging, monitoring, and a web application firewall</a:t>
+                <a:ea typeface="Arial"/>
+              </a:rPr>
+              <a:t>• The highest risks were broken access control, injection attacks, XSS (Cross-Site Scripting), weak logins, and missing logs</a:t>
             </a:r>
             <a:endParaRPr lang="en-US" sz="2000" b="0" u="none" strike="noStrike">
               <a:solidFill>
@@ -3433,6 +4830,9 @@
                 <a:spcPct val="100000"/>
               </a:lnSpc>
               <a:buNone/>
+              <a:tabLst>
+                <a:tab pos="0" algn="l"/>
+              </a:tabLst>
             </a:pPr>
             <a:r>
               <a:rPr lang="en-US" sz="2000" b="0" u="none" strike="noStrike">
@@ -3442,8 +4842,40 @@
                 <a:effectLst/>
                 <a:uFillTx/>
                 <a:latin typeface="Arial"/>
-              </a:rPr>
-              <a:t>Why it matters for SOC: web weaknesses lead to alerts, incidents, and business impact</a:t>
+                <a:ea typeface="Arial"/>
+              </a:rPr>
+              <a:t>• I recommended multi-factor login, stronger permissions, input checking, secure coding, automated testing, better logging, and a WAF (Web Application Firewall)</a:t>
+            </a:r>
+            <a:endParaRPr lang="en-US" sz="2000" b="0" u="none" strike="noStrike">
+              <a:solidFill>
+                <a:srgbClr val="000000"/>
+              </a:solidFill>
+              <a:effectLst/>
+              <a:uFillTx/>
+              <a:latin typeface="Arial"/>
+            </a:endParaRPr>
+          </a:p>
+          <a:p>
+            <a:pPr indent="0" algn="l">
+              <a:lnSpc>
+                <a:spcPct val="100000"/>
+              </a:lnSpc>
+              <a:buNone/>
+              <a:tabLst>
+                <a:tab pos="0" algn="l"/>
+              </a:tabLst>
+            </a:pPr>
+            <a:r>
+              <a:rPr lang="en-US" sz="2000" b="0" u="none" strike="noStrike">
+                <a:solidFill>
+                  <a:srgbClr val="000000"/>
+                </a:solidFill>
+                <a:effectLst/>
+                <a:uFillTx/>
+                <a:latin typeface="Arial"/>
+                <a:ea typeface="Arial"/>
+              </a:rPr>
+              <a:t>• SOC connection: Web weaknesses create alerts, incidents, customer problems, and business risk</a:t>
             </a:r>
             <a:endParaRPr lang="en-US" sz="2000" b="0" u="none" strike="noStrike">
               <a:solidFill>
@@ -3576,6 +5008,9 @@
                 <a:spcPct val="100000"/>
               </a:lnSpc>
               <a:buNone/>
+              <a:tabLst>
+                <a:tab pos="0" algn="l"/>
+              </a:tabLst>
             </a:pPr>
             <a:r>
               <a:rPr lang="en-US" sz="2000" b="0" u="none" strike="noStrike">
@@ -3585,6 +5020,7 @@
                 <a:effectLst/>
                 <a:uFillTx/>
                 <a:latin typeface="Arial"/>
+                <a:ea typeface="Arial"/>
               </a:rPr>
               <a:t>Timing: 5:28–6:19</a:t>
             </a:r>
@@ -3603,6 +5039,9 @@
                 <a:spcPct val="100000"/>
               </a:lnSpc>
               <a:buNone/>
+              <a:tabLst>
+                <a:tab pos="0" algn="l"/>
+              </a:tabLst>
             </a:pPr>
             <a:r>
               <a:rPr lang="en-US" sz="2000" b="0" u="none" strike="noStrike">
@@ -3612,8 +5051,9 @@
                 <a:effectLst/>
                 <a:uFillTx/>
                 <a:latin typeface="Arial"/>
-              </a:rPr>
-              <a:t>Full lifecycle: discover → prioritize → remediate → verify → report</a:t>
+                <a:ea typeface="Arial"/>
+              </a:rPr>
+              <a:t>Practice flashcard: Project 5 — ABC Logistics Threat &amp; Vulnerability Mgmt</a:t>
             </a:r>
             <a:endParaRPr lang="en-US" sz="2000" b="0" u="none" strike="noStrike">
               <a:solidFill>
@@ -3630,6 +5070,28 @@
                 <a:spcPct val="100000"/>
               </a:lnSpc>
               <a:buNone/>
+              <a:tabLst>
+                <a:tab pos="0" algn="l"/>
+              </a:tabLst>
+            </a:pPr>
+            <a:endParaRPr lang="en-US" sz="2000" b="0" u="none" strike="noStrike">
+              <a:solidFill>
+                <a:srgbClr val="000000"/>
+              </a:solidFill>
+              <a:effectLst/>
+              <a:uFillTx/>
+              <a:latin typeface="Arial"/>
+            </a:endParaRPr>
+          </a:p>
+          <a:p>
+            <a:pPr indent="0" algn="l">
+              <a:lnSpc>
+                <a:spcPct val="100000"/>
+              </a:lnSpc>
+              <a:buNone/>
+              <a:tabLst>
+                <a:tab pos="0" algn="l"/>
+              </a:tabLst>
             </a:pPr>
             <a:r>
               <a:rPr lang="en-US" sz="2000" b="0" u="none" strike="noStrike">
@@ -3639,8 +5101,9 @@
                 <a:effectLst/>
                 <a:uFillTx/>
                 <a:latin typeface="Arial"/>
-              </a:rPr>
-              <a:t>Prioritized with CVSS scoring, asset importance, exploitability, and business impact</a:t>
+                <a:ea typeface="Arial"/>
+              </a:rPr>
+              <a:t>Talking points:</a:t>
             </a:r>
             <a:endParaRPr lang="en-US" sz="2000" b="0" u="none" strike="noStrike">
               <a:solidFill>
@@ -3657,6 +5120,9 @@
                 <a:spcPct val="100000"/>
               </a:lnSpc>
               <a:buNone/>
+              <a:tabLst>
+                <a:tab pos="0" algn="l"/>
+              </a:tabLst>
             </a:pPr>
             <a:r>
               <a:rPr lang="en-US" sz="2000" b="0" u="none" strike="noStrike">
@@ -3666,8 +5132,9 @@
                 <a:effectLst/>
                 <a:uFillTx/>
                 <a:latin typeface="Arial"/>
-              </a:rPr>
-              <a:t>Not every vulnerability is equal — a repeatable process focuses on what matters most</a:t>
+                <a:ea typeface="Arial"/>
+              </a:rPr>
+              <a:t>• I built a clear process: discover → prioritize → fix → verify → report</a:t>
             </a:r>
             <a:endParaRPr lang="en-US" sz="2000" b="0" u="none" strike="noStrike">
               <a:solidFill>
@@ -3684,6 +5151,9 @@
                 <a:spcPct val="100000"/>
               </a:lnSpc>
               <a:buNone/>
+              <a:tabLst>
+                <a:tab pos="0" algn="l"/>
+              </a:tabLst>
             </a:pPr>
             <a:r>
               <a:rPr lang="en-US" sz="2000" b="0" u="none" strike="noStrike">
@@ -3693,8 +5163,71 @@
                 <a:effectLst/>
                 <a:uFillTx/>
                 <a:latin typeface="Arial"/>
-              </a:rPr>
-              <a:t>Closest project to day-to-day SOC work</a:t>
+                <a:ea typeface="Arial"/>
+              </a:rPr>
+              <a:t>• I ranked problems using CVSS (Common Vulnerability Scoring System), exploitability, system importance, and business impact</a:t>
+            </a:r>
+            <a:endParaRPr lang="en-US" sz="2000" b="0" u="none" strike="noStrike">
+              <a:solidFill>
+                <a:srgbClr val="000000"/>
+              </a:solidFill>
+              <a:effectLst/>
+              <a:uFillTx/>
+              <a:latin typeface="Arial"/>
+            </a:endParaRPr>
+          </a:p>
+          <a:p>
+            <a:pPr indent="0" algn="l">
+              <a:lnSpc>
+                <a:spcPct val="100000"/>
+              </a:lnSpc>
+              <a:buNone/>
+              <a:tabLst>
+                <a:tab pos="0" algn="l"/>
+              </a:tabLst>
+            </a:pPr>
+            <a:r>
+              <a:rPr lang="en-US" sz="2000" b="0" u="none" strike="noStrike">
+                <a:solidFill>
+                  <a:srgbClr val="000000"/>
+                </a:solidFill>
+                <a:effectLst/>
+                <a:uFillTx/>
+                <a:latin typeface="Arial"/>
+                <a:ea typeface="Arial"/>
+              </a:rPr>
+              <a:t>• Every step included who owns the fix, what evidence is needed, re-checking after the fix, and reporting to leadership</a:t>
+            </a:r>
+            <a:endParaRPr lang="en-US" sz="2000" b="0" u="none" strike="noStrike">
+              <a:solidFill>
+                <a:srgbClr val="000000"/>
+              </a:solidFill>
+              <a:effectLst/>
+              <a:uFillTx/>
+              <a:latin typeface="Arial"/>
+            </a:endParaRPr>
+          </a:p>
+          <a:p>
+            <a:pPr indent="0" algn="l">
+              <a:lnSpc>
+                <a:spcPct val="100000"/>
+              </a:lnSpc>
+              <a:buNone/>
+              <a:tabLst>
+                <a:tab pos="0" algn="l"/>
+              </a:tabLst>
+            </a:pPr>
+            <a:r>
+              <a:rPr lang="en-US" sz="2000" b="0" u="none" strike="noStrike">
+                <a:solidFill>
+                  <a:srgbClr val="000000"/>
+                </a:solidFill>
+                <a:effectLst/>
+                <a:uFillTx/>
+                <a:latin typeface="Arial"/>
+                <a:ea typeface="Arial"/>
+              </a:rPr>
+              <a:t>• This project is the closest to real day-to-day security operations work</a:t>
             </a:r>
             <a:endParaRPr lang="en-US" sz="2000" b="0" u="none" strike="noStrike">
               <a:solidFill>
@@ -3827,6 +5360,9 @@
                 <a:spcPct val="100000"/>
               </a:lnSpc>
               <a:buNone/>
+              <a:tabLst>
+                <a:tab pos="0" algn="l"/>
+              </a:tabLst>
             </a:pPr>
             <a:r>
               <a:rPr lang="en-US" sz="2000" b="0" u="none" strike="noStrike">
@@ -3836,6 +5372,7 @@
                 <a:effectLst/>
                 <a:uFillTx/>
                 <a:latin typeface="Arial"/>
+                <a:ea typeface="Arial"/>
               </a:rPr>
               <a:t>Timing: 6:19–7:09</a:t>
             </a:r>
@@ -3854,6 +5391,9 @@
                 <a:spcPct val="100000"/>
               </a:lnSpc>
               <a:buNone/>
+              <a:tabLst>
+                <a:tab pos="0" algn="l"/>
+              </a:tabLst>
             </a:pPr>
             <a:r>
               <a:rPr lang="en-US" sz="2000" b="0" u="none" strike="noStrike">
@@ -3863,8 +5403,9 @@
                 <a:effectLst/>
                 <a:uFillTx/>
                 <a:latin typeface="Arial"/>
-              </a:rPr>
-              <a:t>Raspberry Pi + sensors, MQTT over TLS, and a cloud dashboard</a:t>
+                <a:ea typeface="Arial"/>
+              </a:rPr>
+              <a:t>Practice flashcard: Project 6 — IoT (Internet of Things) Smart Home Monitoring System</a:t>
             </a:r>
             <a:endParaRPr lang="en-US" sz="2000" b="0" u="none" strike="noStrike">
               <a:solidFill>
@@ -3881,6 +5422,28 @@
                 <a:spcPct val="100000"/>
               </a:lnSpc>
               <a:buNone/>
+              <a:tabLst>
+                <a:tab pos="0" algn="l"/>
+              </a:tabLst>
+            </a:pPr>
+            <a:endParaRPr lang="en-US" sz="2000" b="0" u="none" strike="noStrike">
+              <a:solidFill>
+                <a:srgbClr val="000000"/>
+              </a:solidFill>
+              <a:effectLst/>
+              <a:uFillTx/>
+              <a:latin typeface="Arial"/>
+            </a:endParaRPr>
+          </a:p>
+          <a:p>
+            <a:pPr indent="0" algn="l">
+              <a:lnSpc>
+                <a:spcPct val="100000"/>
+              </a:lnSpc>
+              <a:buNone/>
+              <a:tabLst>
+                <a:tab pos="0" algn="l"/>
+              </a:tabLst>
             </a:pPr>
             <a:r>
               <a:rPr lang="en-US" sz="2000" b="0" u="none" strike="noStrike">
@@ -3890,8 +5453,9 @@
                 <a:effectLst/>
                 <a:uFillTx/>
                 <a:latin typeface="Arial"/>
-              </a:rPr>
-              <a:t>Threshold-based alerts when values leave a safe range</a:t>
+                <a:ea typeface="Arial"/>
+              </a:rPr>
+              <a:t>Talking points:</a:t>
             </a:r>
             <a:endParaRPr lang="en-US" sz="2000" b="0" u="none" strike="noStrike">
               <a:solidFill>
@@ -3908,6 +5472,9 @@
                 <a:spcPct val="100000"/>
               </a:lnSpc>
               <a:buNone/>
+              <a:tabLst>
+                <a:tab pos="0" algn="l"/>
+              </a:tabLst>
             </a:pPr>
             <a:r>
               <a:rPr lang="en-US" sz="2000" b="0" u="none" strike="noStrike">
@@ -3917,8 +5484,9 @@
                 <a:effectLst/>
                 <a:uFillTx/>
                 <a:latin typeface="Arial"/>
-              </a:rPr>
-              <a:t>Security focus: data in transit, secure device communication, encrypted alerts</a:t>
+                <a:ea typeface="Arial"/>
+              </a:rPr>
+              <a:t>• I designed the full system path: sensors → Raspberry Pi → message broker → dashboard and alerts</a:t>
             </a:r>
             <a:endParaRPr lang="en-US" sz="2000" b="0" u="none" strike="noStrike">
               <a:solidFill>
@@ -3935,6 +5503,9 @@
                 <a:spcPct val="100000"/>
               </a:lnSpc>
               <a:buNone/>
+              <a:tabLst>
+                <a:tab pos="0" algn="l"/>
+              </a:tabLst>
             </a:pPr>
             <a:r>
               <a:rPr lang="en-US" sz="2000" b="0" u="none" strike="noStrike">
@@ -3944,8 +5515,71 @@
                 <a:effectLst/>
                 <a:uFillTx/>
                 <a:latin typeface="Arial"/>
-              </a:rPr>
-              <a:t>Lesson: every connected device is useful data and a new security risk</a:t>
+                <a:ea typeface="Arial"/>
+              </a:rPr>
+              <a:t>• I required MQTT over TLS: Message Queuing Telemetry Transport protected by Transport Layer Security, so sensor data stays private while moving</a:t>
+            </a:r>
+            <a:endParaRPr lang="en-US" sz="2000" b="0" u="none" strike="noStrike">
+              <a:solidFill>
+                <a:srgbClr val="000000"/>
+              </a:solidFill>
+              <a:effectLst/>
+              <a:uFillTx/>
+              <a:latin typeface="Arial"/>
+            </a:endParaRPr>
+          </a:p>
+          <a:p>
+            <a:pPr indent="0" algn="l">
+              <a:lnSpc>
+                <a:spcPct val="100000"/>
+              </a:lnSpc>
+              <a:buNone/>
+              <a:tabLst>
+                <a:tab pos="0" algn="l"/>
+              </a:tabLst>
+            </a:pPr>
+            <a:r>
+              <a:rPr lang="en-US" sz="2000" b="0" u="none" strike="noStrike">
+                <a:solidFill>
+                  <a:srgbClr val="000000"/>
+                </a:solidFill>
+                <a:effectLst/>
+                <a:uFillTx/>
+                <a:latin typeface="Arial"/>
+                <a:ea typeface="Arial"/>
+              </a:rPr>
+              <a:t>• The design includes local storage if the internet goes down, sensor calibration, and alerts when readings go outside safe limits</a:t>
+            </a:r>
+            <a:endParaRPr lang="en-US" sz="2000" b="0" u="none" strike="noStrike">
+              <a:solidFill>
+                <a:srgbClr val="000000"/>
+              </a:solidFill>
+              <a:effectLst/>
+              <a:uFillTx/>
+              <a:latin typeface="Arial"/>
+            </a:endParaRPr>
+          </a:p>
+          <a:p>
+            <a:pPr indent="0" algn="l">
+              <a:lnSpc>
+                <a:spcPct val="100000"/>
+              </a:lnSpc>
+              <a:buNone/>
+              <a:tabLst>
+                <a:tab pos="0" algn="l"/>
+              </a:tabLst>
+            </a:pPr>
+            <a:r>
+              <a:rPr lang="en-US" sz="2000" b="0" u="none" strike="noStrike">
+                <a:solidFill>
+                  <a:srgbClr val="000000"/>
+                </a:solidFill>
+                <a:effectLst/>
+                <a:uFillTx/>
+                <a:latin typeface="Arial"/>
+                <a:ea typeface="Arial"/>
+              </a:rPr>
+              <a:t>• Key lesson: Every connected device gives useful data but also adds new security and reliability risks</a:t>
             </a:r>
             <a:endParaRPr lang="en-US" sz="2000" b="0" u="none" strike="noStrike">
               <a:solidFill>
@@ -4034,8 +5668,8 @@
         </p:nvSpPr>
         <p:spPr>
           <a:xfrm>
-            <a:off x="609480" y="273600"/>
-            <a:ext cx="10972440" cy="1144800"/>
+            <a:off x="609480" y="502920"/>
+            <a:ext cx="10972080" cy="686160"/>
           </a:xfrm>
           <a:prstGeom prst="rect">
             <a:avLst/>
@@ -4055,6 +5689,9 @@
                 <a:spcPct val="90000"/>
               </a:lnSpc>
               <a:buNone/>
+              <a:tabLst>
+                <a:tab pos="0" algn="l"/>
+              </a:tabLst>
             </a:pPr>
             <a:endParaRPr lang="en-US" sz="4400" b="0" u="none" strike="noStrike">
               <a:solidFill>
@@ -4079,8 +5716,8 @@
         </p:nvSpPr>
         <p:spPr>
           <a:xfrm>
-            <a:off x="609480" y="1604520"/>
-            <a:ext cx="10972440" cy="3977280"/>
+            <a:off x="609480" y="3364920"/>
+            <a:ext cx="10972080" cy="456120"/>
           </a:xfrm>
           <a:prstGeom prst="rect">
             <a:avLst/>
@@ -4150,8 +5787,8 @@
         </p:nvSpPr>
         <p:spPr>
           <a:xfrm>
-            <a:off x="609480" y="273600"/>
-            <a:ext cx="10972440" cy="1144800"/>
+            <a:off x="609480" y="543960"/>
+            <a:ext cx="10972080" cy="603720"/>
           </a:xfrm>
           <a:prstGeom prst="rect">
             <a:avLst/>
@@ -4163,7 +5800,7 @@
         </p:spPr>
         <p:txBody>
           <a:bodyPr lIns="0" tIns="0" rIns="0" bIns="0" anchor="ctr">
-            <a:noAutofit/>
+            <a:spAutoFit/>
           </a:bodyPr>
           <a:lstStyle>
             <a:lvl1pPr indent="0" algn="l">
@@ -4171,6 +5808,9 @@
                 <a:spcPct val="90000"/>
               </a:lnSpc>
               <a:buNone/>
+              <a:tabLst>
+                <a:tab pos="0" algn="l"/>
+              </a:tabLst>
               <a:defRPr lang="en-US" sz="4400" b="0" u="none" strike="noStrike">
                 <a:solidFill>
                   <a:schemeClr val="dk1"/>
@@ -4187,6 +5827,9 @@
                 <a:spcPct val="90000"/>
               </a:lnSpc>
               <a:buNone/>
+              <a:tabLst>
+                <a:tab pos="0" algn="l"/>
+              </a:tabLst>
             </a:pPr>
             <a:r>
               <a:rPr lang="en-US" sz="4400" b="0" u="none" strike="noStrike">
@@ -4394,7 +6037,7 @@
             </a:lvl7pPr>
           </a:lstStyle>
           <a:p>
-            <a:pPr marL="432000" indent="-324000" algn="l">
+            <a:pPr indent="-324000" algn="l">
               <a:lnSpc>
                 <a:spcPct val="90000"/>
               </a:lnSpc>
@@ -4682,7 +6325,7 @@
         <p:spPr>
           <a:xfrm>
             <a:off x="571680" y="533520"/>
-            <a:ext cx="11048760" cy="5790960"/>
+            <a:ext cx="11048400" cy="5790600"/>
           </a:xfrm>
           <a:prstGeom prst="roundRect">
             <a:avLst>
@@ -4731,7 +6374,7 @@
         <p:spPr>
           <a:xfrm>
             <a:off x="990720" y="905040"/>
-            <a:ext cx="6048000" cy="209160"/>
+            <a:ext cx="6047640" cy="208800"/>
           </a:xfrm>
           <a:prstGeom prst="rect">
             <a:avLst/>
@@ -4765,6 +6408,7 @@
                 <a:effectLst/>
                 <a:uFillTx/>
                 <a:latin typeface="Arial"/>
+                <a:ea typeface="Arial"/>
               </a:rPr>
               <a:t>AYALEW CHERENET  |  IT &amp; CYBERSECURITY PORTFOLIO</a:t>
             </a:r>
@@ -4788,7 +6432,7 @@
         <p:spPr>
           <a:xfrm>
             <a:off x="990720" y="1276200"/>
-            <a:ext cx="1523520" cy="237600"/>
+            <a:ext cx="1523160" cy="237240"/>
           </a:xfrm>
           <a:prstGeom prst="rect">
             <a:avLst/>
@@ -4822,6 +6466,7 @@
                 <a:effectLst/>
                 <a:uFillTx/>
                 <a:latin typeface="Arial"/>
+                <a:ea typeface="Arial"/>
               </a:rPr>
               <a:t>CARD 01</a:t>
             </a:r>
@@ -4845,7 +6490,7 @@
         <p:spPr>
           <a:xfrm>
             <a:off x="9620280" y="1276200"/>
-            <a:ext cx="1428480" cy="237600"/>
+            <a:ext cx="1428120" cy="237240"/>
           </a:xfrm>
           <a:prstGeom prst="rect">
             <a:avLst/>
@@ -4879,6 +6524,7 @@
                 <a:effectLst/>
                 <a:uFillTx/>
                 <a:latin typeface="Arial"/>
+                <a:ea typeface="Arial"/>
               </a:rPr>
               <a:t>0:00–0:42</a:t>
             </a:r>
@@ -4902,7 +6548,7 @@
         <p:spPr>
           <a:xfrm>
             <a:off x="990720" y="1676520"/>
-            <a:ext cx="590040" cy="47160"/>
+            <a:ext cx="589680" cy="46800"/>
           </a:xfrm>
           <a:prstGeom prst="roundRect">
             <a:avLst>
@@ -4948,7 +6594,7 @@
         <p:spPr>
           <a:xfrm>
             <a:off x="990720" y="1952640"/>
-            <a:ext cx="8762760" cy="952200"/>
+            <a:ext cx="8762400" cy="951840"/>
           </a:xfrm>
           <a:prstGeom prst="rect">
             <a:avLst/>
@@ -4982,6 +6628,7 @@
                 <a:effectLst/>
                 <a:uFillTx/>
                 <a:latin typeface="Arial"/>
+                <a:ea typeface="Arial"/>
               </a:rPr>
               <a:t>Opening</a:t>
             </a:r>
@@ -5005,7 +6652,7 @@
         <p:spPr>
           <a:xfrm>
             <a:off x="990720" y="3162240"/>
-            <a:ext cx="2476080" cy="237600"/>
+            <a:ext cx="2475720" cy="237240"/>
           </a:xfrm>
           <a:prstGeom prst="rect">
             <a:avLst/>
@@ -5039,6 +6686,7 @@
                 <a:effectLst/>
                 <a:uFillTx/>
                 <a:latin typeface="Arial"/>
+                <a:ea typeface="Arial"/>
               </a:rPr>
               <a:t>WHAT TO SAY</a:t>
             </a:r>
@@ -5062,7 +6710,7 @@
         <p:spPr>
           <a:xfrm>
             <a:off x="1028880" y="3676680"/>
-            <a:ext cx="85320" cy="85320"/>
+            <a:ext cx="84960" cy="84960"/>
           </a:xfrm>
           <a:prstGeom prst="roundRect">
             <a:avLst>
@@ -5083,7 +6731,7 @@
           <a:fontRef idx="minor"/>
         </p:style>
         <p:txBody>
-          <a:bodyPr lIns="90000" tIns="15840" rIns="90000" bIns="15840" anchor="t">
+          <a:bodyPr lIns="42480" tIns="15840" rIns="42480" bIns="15840" anchor="t">
             <a:noAutofit/>
           </a:bodyPr>
           <a:p>
@@ -5108,7 +6756,7 @@
         <p:spPr>
           <a:xfrm>
             <a:off x="1333440" y="3562200"/>
-            <a:ext cx="8524440" cy="561600"/>
+            <a:ext cx="8524080" cy="561240"/>
           </a:xfrm>
           <a:prstGeom prst="rect">
             <a:avLst/>
@@ -5142,6 +6790,7 @@
                 <a:effectLst/>
                 <a:uFillTx/>
                 <a:latin typeface="Arial"/>
+                <a:ea typeface="Arial"/>
               </a:rPr>
               <a:t>Name, Wade College, IT &amp; Cybersecurity, graduation Sept 2026</a:t>
             </a:r>
@@ -5165,7 +6814,7 @@
         <p:spPr>
           <a:xfrm>
             <a:off x="1028880" y="4276800"/>
-            <a:ext cx="85320" cy="85320"/>
+            <a:ext cx="84960" cy="84960"/>
           </a:xfrm>
           <a:prstGeom prst="roundRect">
             <a:avLst>
@@ -5186,7 +6835,7 @@
           <a:fontRef idx="minor"/>
         </p:style>
         <p:txBody>
-          <a:bodyPr lIns="90000" tIns="15840" rIns="90000" bIns="15840" anchor="t">
+          <a:bodyPr lIns="42480" tIns="15840" rIns="42480" bIns="15840" anchor="t">
             <a:noAutofit/>
           </a:bodyPr>
           <a:p>
@@ -5211,7 +6860,7 @@
         <p:spPr>
           <a:xfrm>
             <a:off x="1333440" y="4162320"/>
-            <a:ext cx="8524440" cy="561600"/>
+            <a:ext cx="8524080" cy="561240"/>
           </a:xfrm>
           <a:prstGeom prst="rect">
             <a:avLst/>
@@ -5245,6 +6894,7 @@
                 <a:effectLst/>
                 <a:uFillTx/>
                 <a:latin typeface="Arial"/>
+                <a:ea typeface="Arial"/>
               </a:rPr>
               <a:t>Goal: entry-level SOC Analyst</a:t>
             </a:r>
@@ -5268,7 +6918,7 @@
         <p:spPr>
           <a:xfrm>
             <a:off x="1028880" y="4876920"/>
-            <a:ext cx="85320" cy="85320"/>
+            <a:ext cx="84960" cy="84960"/>
           </a:xfrm>
           <a:prstGeom prst="roundRect">
             <a:avLst>
@@ -5289,7 +6939,7 @@
           <a:fontRef idx="minor"/>
         </p:style>
         <p:txBody>
-          <a:bodyPr lIns="90000" tIns="15840" rIns="90000" bIns="15840" anchor="t">
+          <a:bodyPr lIns="42480" tIns="15840" rIns="42480" bIns="15840" anchor="t">
             <a:noAutofit/>
           </a:bodyPr>
           <a:p>
@@ -5314,7 +6964,7 @@
         <p:spPr>
           <a:xfrm>
             <a:off x="1333440" y="4762440"/>
-            <a:ext cx="8524440" cy="561600"/>
+            <a:ext cx="8524080" cy="561240"/>
           </a:xfrm>
           <a:prstGeom prst="rect">
             <a:avLst/>
@@ -5348,6 +6998,7 @@
                 <a:effectLst/>
                 <a:uFillTx/>
                 <a:latin typeface="Arial"/>
+                <a:ea typeface="Arial"/>
               </a:rPr>
               <a:t>Portfolio = practical projects + programming + documentation + business problem-solving</a:t>
             </a:r>
@@ -5371,7 +7022,7 @@
         <p:spPr>
           <a:xfrm>
             <a:off x="1028880" y="5477040"/>
-            <a:ext cx="85320" cy="85320"/>
+            <a:ext cx="84960" cy="84960"/>
           </a:xfrm>
           <a:prstGeom prst="roundRect">
             <a:avLst>
@@ -5392,7 +7043,7 @@
           <a:fontRef idx="minor"/>
         </p:style>
         <p:txBody>
-          <a:bodyPr lIns="90000" tIns="15840" rIns="90000" bIns="15840" anchor="t">
+          <a:bodyPr lIns="42480" tIns="15840" rIns="42480" bIns="15840" anchor="t">
             <a:noAutofit/>
           </a:bodyPr>
           <a:p>
@@ -5417,7 +7068,7 @@
         <p:spPr>
           <a:xfrm>
             <a:off x="1333440" y="5362560"/>
-            <a:ext cx="8524440" cy="561600"/>
+            <a:ext cx="8524080" cy="561240"/>
           </a:xfrm>
           <a:prstGeom prst="rect">
             <a:avLst/>
@@ -5451,6 +7102,7 @@
                 <a:effectLst/>
                 <a:uFillTx/>
                 <a:latin typeface="Arial"/>
+                <a:ea typeface="Arial"/>
               </a:rPr>
               <a:t>Tagline: protect systems, solve problems, keep learning</a:t>
             </a:r>
@@ -5474,7 +7126,7 @@
         <p:spPr>
           <a:xfrm>
             <a:off x="10001160" y="4467240"/>
-            <a:ext cx="1047240" cy="571320"/>
+            <a:ext cx="1046880" cy="570960"/>
           </a:xfrm>
           <a:prstGeom prst="rect">
             <a:avLst/>
@@ -5508,6 +7160,7 @@
                 <a:effectLst/>
                 <a:uFillTx/>
                 <a:latin typeface="Arial"/>
+                <a:ea typeface="Arial"/>
               </a:rPr>
               <a:t>01 / 14</a:t>
             </a:r>
@@ -5531,7 +7184,7 @@
         <p:spPr>
           <a:xfrm>
             <a:off x="990720" y="5867280"/>
-            <a:ext cx="4571640" cy="171000"/>
+            <a:ext cx="4571280" cy="170640"/>
           </a:xfrm>
           <a:prstGeom prst="rect">
             <a:avLst/>
@@ -5565,6 +7218,7 @@
                 <a:effectLst/>
                 <a:uFillTx/>
                 <a:latin typeface="Arial"/>
+                <a:ea typeface="Arial"/>
               </a:rPr>
               <a:t>Presentation Flashcards  •  10-minute talk</a:t>
             </a:r>
@@ -5625,7 +7279,7 @@
         <p:spPr>
           <a:xfrm>
             <a:off x="571680" y="533520"/>
-            <a:ext cx="11048760" cy="5790960"/>
+            <a:ext cx="11048400" cy="5790600"/>
           </a:xfrm>
           <a:prstGeom prst="roundRect">
             <a:avLst>
@@ -5674,7 +7328,7 @@
         <p:spPr>
           <a:xfrm>
             <a:off x="990720" y="905040"/>
-            <a:ext cx="6048000" cy="209160"/>
+            <a:ext cx="6047640" cy="208800"/>
           </a:xfrm>
           <a:prstGeom prst="rect">
             <a:avLst/>
@@ -5708,6 +7362,7 @@
                 <a:effectLst/>
                 <a:uFillTx/>
                 <a:latin typeface="Arial"/>
+                <a:ea typeface="Arial"/>
               </a:rPr>
               <a:t>AYALEW CHERENET  |  IT &amp; CYBERSECURITY PORTFOLIO</a:t>
             </a:r>
@@ -5731,7 +7386,7 @@
         <p:spPr>
           <a:xfrm>
             <a:off x="990720" y="1276200"/>
-            <a:ext cx="1523520" cy="237600"/>
+            <a:ext cx="1523160" cy="237240"/>
           </a:xfrm>
           <a:prstGeom prst="rect">
             <a:avLst/>
@@ -5765,6 +7420,7 @@
                 <a:effectLst/>
                 <a:uFillTx/>
                 <a:latin typeface="Arial"/>
+                <a:ea typeface="Arial"/>
               </a:rPr>
               <a:t>CARD 10</a:t>
             </a:r>
@@ -5788,7 +7444,7 @@
         <p:spPr>
           <a:xfrm>
             <a:off x="9620280" y="1276200"/>
-            <a:ext cx="1428480" cy="237600"/>
+            <a:ext cx="1428120" cy="237240"/>
           </a:xfrm>
           <a:prstGeom prst="rect">
             <a:avLst/>
@@ -5822,6 +7478,7 @@
                 <a:effectLst/>
                 <a:uFillTx/>
                 <a:latin typeface="Arial"/>
+                <a:ea typeface="Arial"/>
               </a:rPr>
               <a:t>7:09–7:55</a:t>
             </a:r>
@@ -5845,7 +7502,7 @@
         <p:spPr>
           <a:xfrm>
             <a:off x="990720" y="1676520"/>
-            <a:ext cx="590040" cy="47160"/>
+            <a:ext cx="589680" cy="46800"/>
           </a:xfrm>
           <a:prstGeom prst="roundRect">
             <a:avLst>
@@ -5891,7 +7548,7 @@
         <p:spPr>
           <a:xfrm>
             <a:off x="990720" y="1952640"/>
-            <a:ext cx="8762760" cy="952200"/>
+            <a:ext cx="8762400" cy="951840"/>
           </a:xfrm>
           <a:prstGeom prst="rect">
             <a:avLst/>
@@ -5925,6 +7582,7 @@
                 <a:effectLst/>
                 <a:uFillTx/>
                 <a:latin typeface="Arial"/>
+                <a:ea typeface="Arial"/>
               </a:rPr>
               <a:t>Additional Project — Food Expense Tracker</a:t>
             </a:r>
@@ -5948,7 +7606,7 @@
         <p:spPr>
           <a:xfrm>
             <a:off x="990720" y="3162240"/>
-            <a:ext cx="2476080" cy="237600"/>
+            <a:ext cx="2475720" cy="237240"/>
           </a:xfrm>
           <a:prstGeom prst="rect">
             <a:avLst/>
@@ -5982,6 +7640,7 @@
                 <a:effectLst/>
                 <a:uFillTx/>
                 <a:latin typeface="Arial"/>
+                <a:ea typeface="Arial"/>
               </a:rPr>
               <a:t>WHAT TO SAY</a:t>
             </a:r>
@@ -6005,7 +7664,7 @@
         <p:spPr>
           <a:xfrm>
             <a:off x="1028880" y="3676680"/>
-            <a:ext cx="85320" cy="85320"/>
+            <a:ext cx="84960" cy="84960"/>
           </a:xfrm>
           <a:prstGeom prst="roundRect">
             <a:avLst>
@@ -6026,7 +7685,7 @@
           <a:fontRef idx="minor"/>
         </p:style>
         <p:txBody>
-          <a:bodyPr lIns="90000" tIns="15840" rIns="90000" bIns="15840" anchor="t">
+          <a:bodyPr lIns="42480" tIns="15840" rIns="42480" bIns="15840" anchor="t">
             <a:noAutofit/>
           </a:bodyPr>
           <a:p>
@@ -6051,7 +7710,7 @@
         <p:spPr>
           <a:xfrm>
             <a:off x="1333440" y="3562200"/>
-            <a:ext cx="8524440" cy="561600"/>
+            <a:ext cx="8524080" cy="561240"/>
           </a:xfrm>
           <a:prstGeom prst="rect">
             <a:avLst/>
@@ -6085,6 +7744,7 @@
                 <a:effectLst/>
                 <a:uFillTx/>
                 <a:latin typeface="Arial"/>
+                <a:ea typeface="Arial"/>
               </a:rPr>
               <a:t>Programming I project — Python + Tkinter desktop app</a:t>
             </a:r>
@@ -6108,7 +7768,7 @@
         <p:spPr>
           <a:xfrm>
             <a:off x="1028880" y="4276800"/>
-            <a:ext cx="85320" cy="85320"/>
+            <a:ext cx="84960" cy="84960"/>
           </a:xfrm>
           <a:prstGeom prst="roundRect">
             <a:avLst>
@@ -6129,7 +7789,7 @@
           <a:fontRef idx="minor"/>
         </p:style>
         <p:txBody>
-          <a:bodyPr lIns="90000" tIns="15840" rIns="90000" bIns="15840" anchor="t">
+          <a:bodyPr lIns="42480" tIns="15840" rIns="42480" bIns="15840" anchor="t">
             <a:noAutofit/>
           </a:bodyPr>
           <a:p>
@@ -6154,7 +7814,7 @@
         <p:spPr>
           <a:xfrm>
             <a:off x="1333440" y="4162320"/>
-            <a:ext cx="8524440" cy="561600"/>
+            <a:ext cx="8524080" cy="561240"/>
           </a:xfrm>
           <a:prstGeom prst="rect">
             <a:avLst/>
@@ -6188,6 +7848,7 @@
                 <a:effectLst/>
                 <a:uFillTx/>
                 <a:latin typeface="Arial"/>
+                <a:ea typeface="Arial"/>
               </a:rPr>
               <a:t>Add, edit, delete, filter, sort, and search expenses</a:t>
             </a:r>
@@ -6211,7 +7872,7 @@
         <p:spPr>
           <a:xfrm>
             <a:off x="1028880" y="4876920"/>
-            <a:ext cx="85320" cy="85320"/>
+            <a:ext cx="84960" cy="84960"/>
           </a:xfrm>
           <a:prstGeom prst="roundRect">
             <a:avLst>
@@ -6232,7 +7893,7 @@
           <a:fontRef idx="minor"/>
         </p:style>
         <p:txBody>
-          <a:bodyPr lIns="90000" tIns="15840" rIns="90000" bIns="15840" anchor="t">
+          <a:bodyPr lIns="42480" tIns="15840" rIns="42480" bIns="15840" anchor="t">
             <a:noAutofit/>
           </a:bodyPr>
           <a:p>
@@ -6257,7 +7918,7 @@
         <p:spPr>
           <a:xfrm>
             <a:off x="1333440" y="4762440"/>
-            <a:ext cx="8524440" cy="561600"/>
+            <a:ext cx="8524080" cy="561240"/>
           </a:xfrm>
           <a:prstGeom prst="rect">
             <a:avLst/>
@@ -6291,6 +7952,7 @@
                 <a:effectLst/>
                 <a:uFillTx/>
                 <a:latin typeface="Arial"/>
+                <a:ea typeface="Arial"/>
               </a:rPr>
               <a:t>JSON storage, input validation, category totals, and CSV export</a:t>
             </a:r>
@@ -6314,7 +7976,7 @@
         <p:spPr>
           <a:xfrm>
             <a:off x="1028880" y="5477040"/>
-            <a:ext cx="85320" cy="85320"/>
+            <a:ext cx="84960" cy="84960"/>
           </a:xfrm>
           <a:prstGeom prst="roundRect">
             <a:avLst>
@@ -6335,7 +7997,7 @@
           <a:fontRef idx="minor"/>
         </p:style>
         <p:txBody>
-          <a:bodyPr lIns="90000" tIns="15840" rIns="90000" bIns="15840" anchor="t">
+          <a:bodyPr lIns="42480" tIns="15840" rIns="42480" bIns="15840" anchor="t">
             <a:noAutofit/>
           </a:bodyPr>
           <a:p>
@@ -6360,7 +8022,7 @@
         <p:spPr>
           <a:xfrm>
             <a:off x="1333440" y="5362560"/>
-            <a:ext cx="8524440" cy="561600"/>
+            <a:ext cx="8524080" cy="561240"/>
           </a:xfrm>
           <a:prstGeom prst="rect">
             <a:avLst/>
@@ -6394,6 +8056,7 @@
                 <a:effectLst/>
                 <a:uFillTx/>
                 <a:latin typeface="Arial"/>
+                <a:ea typeface="Arial"/>
               </a:rPr>
               <a:t>Shows practical software and data-handling skills</a:t>
             </a:r>
@@ -6417,7 +8080,7 @@
         <p:spPr>
           <a:xfrm>
             <a:off x="10001160" y="4467240"/>
-            <a:ext cx="1047240" cy="571320"/>
+            <a:ext cx="1046880" cy="570960"/>
           </a:xfrm>
           <a:prstGeom prst="rect">
             <a:avLst/>
@@ -6451,6 +8114,7 @@
                 <a:effectLst/>
                 <a:uFillTx/>
                 <a:latin typeface="Arial"/>
+                <a:ea typeface="Arial"/>
               </a:rPr>
               <a:t>10 / 14</a:t>
             </a:r>
@@ -6474,7 +8138,7 @@
         <p:spPr>
           <a:xfrm>
             <a:off x="990720" y="5867280"/>
-            <a:ext cx="4571640" cy="171000"/>
+            <a:ext cx="4571280" cy="170640"/>
           </a:xfrm>
           <a:prstGeom prst="rect">
             <a:avLst/>
@@ -6508,6 +8172,7 @@
                 <a:effectLst/>
                 <a:uFillTx/>
                 <a:latin typeface="Arial"/>
+                <a:ea typeface="Arial"/>
               </a:rPr>
               <a:t>Presentation Flashcards  •  10-minute talk</a:t>
             </a:r>
@@ -6568,7 +8233,7 @@
         <p:spPr>
           <a:xfrm>
             <a:off x="571680" y="533520"/>
-            <a:ext cx="11048760" cy="5790960"/>
+            <a:ext cx="11048400" cy="5790600"/>
           </a:xfrm>
           <a:prstGeom prst="roundRect">
             <a:avLst>
@@ -6617,7 +8282,7 @@
         <p:spPr>
           <a:xfrm>
             <a:off x="990720" y="905040"/>
-            <a:ext cx="6048000" cy="209160"/>
+            <a:ext cx="6047640" cy="208800"/>
           </a:xfrm>
           <a:prstGeom prst="rect">
             <a:avLst/>
@@ -6651,6 +8316,7 @@
                 <a:effectLst/>
                 <a:uFillTx/>
                 <a:latin typeface="Arial"/>
+                <a:ea typeface="Arial"/>
               </a:rPr>
               <a:t>AYALEW CHERENET  |  IT &amp; CYBERSECURITY PORTFOLIO</a:t>
             </a:r>
@@ -6674,7 +8340,7 @@
         <p:spPr>
           <a:xfrm>
             <a:off x="990720" y="1276200"/>
-            <a:ext cx="1523520" cy="237600"/>
+            <a:ext cx="1523160" cy="237240"/>
           </a:xfrm>
           <a:prstGeom prst="rect">
             <a:avLst/>
@@ -6708,6 +8374,7 @@
                 <a:effectLst/>
                 <a:uFillTx/>
                 <a:latin typeface="Arial"/>
+                <a:ea typeface="Arial"/>
               </a:rPr>
               <a:t>CARD 11</a:t>
             </a:r>
@@ -6731,7 +8398,7 @@
         <p:spPr>
           <a:xfrm>
             <a:off x="9620280" y="1276200"/>
-            <a:ext cx="1428480" cy="237600"/>
+            <a:ext cx="1428120" cy="237240"/>
           </a:xfrm>
           <a:prstGeom prst="rect">
             <a:avLst/>
@@ -6765,6 +8432,7 @@
                 <a:effectLst/>
                 <a:uFillTx/>
                 <a:latin typeface="Arial"/>
+                <a:ea typeface="Arial"/>
               </a:rPr>
               <a:t>7:55–8:36</a:t>
             </a:r>
@@ -6788,7 +8456,7 @@
         <p:spPr>
           <a:xfrm>
             <a:off x="990720" y="1676520"/>
-            <a:ext cx="590040" cy="47160"/>
+            <a:ext cx="589680" cy="46800"/>
           </a:xfrm>
           <a:prstGeom prst="roundRect">
             <a:avLst>
@@ -6834,7 +8502,7 @@
         <p:spPr>
           <a:xfrm>
             <a:off x="990720" y="1952640"/>
-            <a:ext cx="8762760" cy="952200"/>
+            <a:ext cx="8762400" cy="951840"/>
           </a:xfrm>
           <a:prstGeom prst="rect">
             <a:avLst/>
@@ -6868,6 +8536,7 @@
                 <a:effectLst/>
                 <a:uFillTx/>
                 <a:latin typeface="Arial"/>
+                <a:ea typeface="Arial"/>
               </a:rPr>
               <a:t>Additional Project — MAKEDA (Queen of Sheba)</a:t>
             </a:r>
@@ -6891,7 +8560,7 @@
         <p:spPr>
           <a:xfrm>
             <a:off x="990720" y="3162240"/>
-            <a:ext cx="2476080" cy="237600"/>
+            <a:ext cx="2475720" cy="237240"/>
           </a:xfrm>
           <a:prstGeom prst="rect">
             <a:avLst/>
@@ -6925,6 +8594,7 @@
                 <a:effectLst/>
                 <a:uFillTx/>
                 <a:latin typeface="Arial"/>
+                <a:ea typeface="Arial"/>
               </a:rPr>
               <a:t>WHAT TO SAY</a:t>
             </a:r>
@@ -6948,7 +8618,7 @@
         <p:spPr>
           <a:xfrm>
             <a:off x="1028880" y="3676680"/>
-            <a:ext cx="85320" cy="85320"/>
+            <a:ext cx="84960" cy="84960"/>
           </a:xfrm>
           <a:prstGeom prst="roundRect">
             <a:avLst>
@@ -6969,7 +8639,7 @@
           <a:fontRef idx="minor"/>
         </p:style>
         <p:txBody>
-          <a:bodyPr lIns="90000" tIns="15840" rIns="90000" bIns="15840" anchor="t">
+          <a:bodyPr lIns="42480" tIns="15840" rIns="42480" bIns="15840" anchor="t">
             <a:noAutofit/>
           </a:bodyPr>
           <a:p>
@@ -6994,7 +8664,7 @@
         <p:spPr>
           <a:xfrm>
             <a:off x="1333440" y="3562200"/>
-            <a:ext cx="8524440" cy="561600"/>
+            <a:ext cx="8524080" cy="561240"/>
           </a:xfrm>
           <a:prstGeom prst="rect">
             <a:avLst/>
@@ -7028,6 +8698,7 @@
                 <a:effectLst/>
                 <a:uFillTx/>
                 <a:latin typeface="Arial"/>
+                <a:ea typeface="Arial"/>
               </a:rPr>
               <a:t>Shopify e-commerce project: brand storytelling, product organization, mobile usability</a:t>
             </a:r>
@@ -7051,7 +8722,7 @@
         <p:spPr>
           <a:xfrm>
             <a:off x="1028880" y="4276800"/>
-            <a:ext cx="85320" cy="85320"/>
+            <a:ext cx="84960" cy="84960"/>
           </a:xfrm>
           <a:prstGeom prst="roundRect">
             <a:avLst>
@@ -7072,7 +8743,7 @@
           <a:fontRef idx="minor"/>
         </p:style>
         <p:txBody>
-          <a:bodyPr lIns="90000" tIns="15840" rIns="90000" bIns="15840" anchor="t">
+          <a:bodyPr lIns="42480" tIns="15840" rIns="42480" bIns="15840" anchor="t">
             <a:noAutofit/>
           </a:bodyPr>
           <a:p>
@@ -7097,7 +8768,7 @@
         <p:spPr>
           <a:xfrm>
             <a:off x="1333440" y="4162320"/>
-            <a:ext cx="8524440" cy="561600"/>
+            <a:ext cx="8524080" cy="561240"/>
           </a:xfrm>
           <a:prstGeom prst="rect">
             <a:avLst/>
@@ -7131,6 +8802,7 @@
                 <a:effectLst/>
                 <a:uFillTx/>
                 <a:latin typeface="Arial"/>
+                <a:ea typeface="Arial"/>
               </a:rPr>
               <a:t>E-commerce security awareness: secure checkout, MFA, and privacy</a:t>
             </a:r>
@@ -7154,7 +8826,7 @@
         <p:spPr>
           <a:xfrm>
             <a:off x="1028880" y="4876920"/>
-            <a:ext cx="85320" cy="85320"/>
+            <a:ext cx="84960" cy="84960"/>
           </a:xfrm>
           <a:prstGeom prst="roundRect">
             <a:avLst>
@@ -7175,7 +8847,7 @@
           <a:fontRef idx="minor"/>
         </p:style>
         <p:txBody>
-          <a:bodyPr lIns="90000" tIns="15840" rIns="90000" bIns="15840" anchor="t">
+          <a:bodyPr lIns="42480" tIns="15840" rIns="42480" bIns="15840" anchor="t">
             <a:noAutofit/>
           </a:bodyPr>
           <a:p>
@@ -7200,7 +8872,7 @@
         <p:spPr>
           <a:xfrm>
             <a:off x="1333440" y="4762440"/>
-            <a:ext cx="8524440" cy="561600"/>
+            <a:ext cx="8524080" cy="561240"/>
           </a:xfrm>
           <a:prstGeom prst="rect">
             <a:avLst/>
@@ -7234,6 +8906,7 @@
                 <a:effectLst/>
                 <a:uFillTx/>
                 <a:latin typeface="Arial"/>
+                <a:ea typeface="Arial"/>
               </a:rPr>
               <a:t>Bridges technical and business needs</a:t>
             </a:r>
@@ -7257,7 +8930,7 @@
         <p:spPr>
           <a:xfrm>
             <a:off x="1028880" y="5477040"/>
-            <a:ext cx="85320" cy="85320"/>
+            <a:ext cx="84960" cy="84960"/>
           </a:xfrm>
           <a:prstGeom prst="roundRect">
             <a:avLst>
@@ -7278,7 +8951,7 @@
           <a:fontRef idx="minor"/>
         </p:style>
         <p:txBody>
-          <a:bodyPr lIns="90000" tIns="15840" rIns="90000" bIns="15840" anchor="t">
+          <a:bodyPr lIns="42480" tIns="15840" rIns="42480" bIns="15840" anchor="t">
             <a:noAutofit/>
           </a:bodyPr>
           <a:p>
@@ -7303,7 +8976,7 @@
         <p:spPr>
           <a:xfrm>
             <a:off x="1333440" y="5362560"/>
-            <a:ext cx="8524440" cy="561600"/>
+            <a:ext cx="8524080" cy="561240"/>
           </a:xfrm>
           <a:prstGeom prst="rect">
             <a:avLst/>
@@ -7337,6 +9010,7 @@
                 <a:effectLst/>
                 <a:uFillTx/>
                 <a:latin typeface="Arial"/>
+                <a:ea typeface="Arial"/>
               </a:rPr>
               <a:t>Connects to RetailHub: online stores must protect customers, data, payments, and trust</a:t>
             </a:r>
@@ -7360,7 +9034,7 @@
         <p:spPr>
           <a:xfrm>
             <a:off x="10001160" y="4467240"/>
-            <a:ext cx="1047240" cy="571320"/>
+            <a:ext cx="1046880" cy="570960"/>
           </a:xfrm>
           <a:prstGeom prst="rect">
             <a:avLst/>
@@ -7394,6 +9068,7 @@
                 <a:effectLst/>
                 <a:uFillTx/>
                 <a:latin typeface="Arial"/>
+                <a:ea typeface="Arial"/>
               </a:rPr>
               <a:t>11 / 14</a:t>
             </a:r>
@@ -7417,7 +9092,7 @@
         <p:spPr>
           <a:xfrm>
             <a:off x="990720" y="5867280"/>
-            <a:ext cx="4571640" cy="171000"/>
+            <a:ext cx="4571280" cy="170640"/>
           </a:xfrm>
           <a:prstGeom prst="rect">
             <a:avLst/>
@@ -7451,6 +9126,7 @@
                 <a:effectLst/>
                 <a:uFillTx/>
                 <a:latin typeface="Arial"/>
+                <a:ea typeface="Arial"/>
               </a:rPr>
               <a:t>Presentation Flashcards  •  10-minute talk</a:t>
             </a:r>
@@ -7511,7 +9187,7 @@
         <p:spPr>
           <a:xfrm>
             <a:off x="571680" y="533520"/>
-            <a:ext cx="11048760" cy="5790960"/>
+            <a:ext cx="11048400" cy="5790600"/>
           </a:xfrm>
           <a:prstGeom prst="roundRect">
             <a:avLst>
@@ -7560,7 +9236,7 @@
         <p:spPr>
           <a:xfrm>
             <a:off x="990720" y="905040"/>
-            <a:ext cx="6048000" cy="209160"/>
+            <a:ext cx="6047640" cy="208800"/>
           </a:xfrm>
           <a:prstGeom prst="rect">
             <a:avLst/>
@@ -7594,6 +9270,7 @@
                 <a:effectLst/>
                 <a:uFillTx/>
                 <a:latin typeface="Arial"/>
+                <a:ea typeface="Arial"/>
               </a:rPr>
               <a:t>AYALEW CHERENET  |  IT &amp; CYBERSECURITY PORTFOLIO</a:t>
             </a:r>
@@ -7617,7 +9294,7 @@
         <p:spPr>
           <a:xfrm>
             <a:off x="990720" y="1276200"/>
-            <a:ext cx="1523520" cy="237600"/>
+            <a:ext cx="1523160" cy="237240"/>
           </a:xfrm>
           <a:prstGeom prst="rect">
             <a:avLst/>
@@ -7651,6 +9328,7 @@
                 <a:effectLst/>
                 <a:uFillTx/>
                 <a:latin typeface="Arial"/>
+                <a:ea typeface="Arial"/>
               </a:rPr>
               <a:t>CARD 12</a:t>
             </a:r>
@@ -7674,7 +9352,7 @@
         <p:spPr>
           <a:xfrm>
             <a:off x="9620280" y="1276200"/>
-            <a:ext cx="1428480" cy="237600"/>
+            <a:ext cx="1428120" cy="237240"/>
           </a:xfrm>
           <a:prstGeom prst="rect">
             <a:avLst/>
@@ -7708,6 +9386,7 @@
                 <a:effectLst/>
                 <a:uFillTx/>
                 <a:latin typeface="Arial"/>
+                <a:ea typeface="Arial"/>
               </a:rPr>
               <a:t>8:36–9:08</a:t>
             </a:r>
@@ -7731,7 +9410,7 @@
         <p:spPr>
           <a:xfrm>
             <a:off x="990720" y="1676520"/>
-            <a:ext cx="590040" cy="47160"/>
+            <a:ext cx="589680" cy="46800"/>
           </a:xfrm>
           <a:prstGeom prst="roundRect">
             <a:avLst>
@@ -7777,7 +9456,7 @@
         <p:spPr>
           <a:xfrm>
             <a:off x="990720" y="1952640"/>
-            <a:ext cx="8762760" cy="952200"/>
+            <a:ext cx="8762400" cy="951840"/>
           </a:xfrm>
           <a:prstGeom prst="rect">
             <a:avLst/>
@@ -7811,6 +9490,7 @@
                 <a:effectLst/>
                 <a:uFillTx/>
                 <a:latin typeface="Arial"/>
+                <a:ea typeface="Arial"/>
               </a:rPr>
               <a:t>Live GitHub Portfolio</a:t>
             </a:r>
@@ -7834,7 +9514,7 @@
         <p:spPr>
           <a:xfrm>
             <a:off x="990720" y="3162240"/>
-            <a:ext cx="2476080" cy="237600"/>
+            <a:ext cx="2475720" cy="237240"/>
           </a:xfrm>
           <a:prstGeom prst="rect">
             <a:avLst/>
@@ -7868,6 +9548,7 @@
                 <a:effectLst/>
                 <a:uFillTx/>
                 <a:latin typeface="Arial"/>
+                <a:ea typeface="Arial"/>
               </a:rPr>
               <a:t>WHAT TO SAY</a:t>
             </a:r>
@@ -7891,7 +9572,7 @@
         <p:spPr>
           <a:xfrm>
             <a:off x="1028880" y="3676680"/>
-            <a:ext cx="85320" cy="85320"/>
+            <a:ext cx="84960" cy="84960"/>
           </a:xfrm>
           <a:prstGeom prst="roundRect">
             <a:avLst>
@@ -7912,7 +9593,7 @@
           <a:fontRef idx="minor"/>
         </p:style>
         <p:txBody>
-          <a:bodyPr lIns="90000" tIns="15840" rIns="90000" bIns="15840" anchor="t">
+          <a:bodyPr lIns="42480" tIns="15840" rIns="42480" bIns="15840" anchor="t">
             <a:noAutofit/>
           </a:bodyPr>
           <a:p>
@@ -7937,7 +9618,7 @@
         <p:spPr>
           <a:xfrm>
             <a:off x="1333440" y="3562200"/>
-            <a:ext cx="8524440" cy="561600"/>
+            <a:ext cx="8524080" cy="561240"/>
           </a:xfrm>
           <a:prstGeom prst="rect">
             <a:avLst/>
@@ -7971,6 +9652,7 @@
                 <a:effectLst/>
                 <a:uFillTx/>
                 <a:latin typeface="Arial"/>
+                <a:ea typeface="Arial"/>
               </a:rPr>
               <a:t>Brings all 8 projects together on one site</a:t>
             </a:r>
@@ -7994,7 +9676,7 @@
         <p:spPr>
           <a:xfrm>
             <a:off x="1028880" y="4276800"/>
-            <a:ext cx="85320" cy="85320"/>
+            <a:ext cx="84960" cy="84960"/>
           </a:xfrm>
           <a:prstGeom prst="roundRect">
             <a:avLst>
@@ -8015,7 +9697,7 @@
           <a:fontRef idx="minor"/>
         </p:style>
         <p:txBody>
-          <a:bodyPr lIns="90000" tIns="15840" rIns="90000" bIns="15840" anchor="t">
+          <a:bodyPr lIns="42480" tIns="15840" rIns="42480" bIns="15840" anchor="t">
             <a:noAutofit/>
           </a:bodyPr>
           <a:p>
@@ -8040,7 +9722,7 @@
         <p:spPr>
           <a:xfrm>
             <a:off x="1333440" y="4162320"/>
-            <a:ext cx="8524440" cy="561600"/>
+            <a:ext cx="8524080" cy="561240"/>
           </a:xfrm>
           <a:prstGeom prst="rect">
             <a:avLst/>
@@ -8074,6 +9756,7 @@
                 <a:effectLst/>
                 <a:uFillTx/>
                 <a:latin typeface="Arial"/>
+                <a:ea typeface="Arial"/>
               </a:rPr>
               <a:t>Recruiters can review project pages, documentation, diagrams, a live practice demo, GitHub work, and the MAKEDA showcase</a:t>
             </a:r>
@@ -8097,7 +9780,7 @@
         <p:spPr>
           <a:xfrm>
             <a:off x="1028880" y="4876920"/>
-            <a:ext cx="85320" cy="85320"/>
+            <a:ext cx="84960" cy="84960"/>
           </a:xfrm>
           <a:prstGeom prst="roundRect">
             <a:avLst>
@@ -8118,7 +9801,7 @@
           <a:fontRef idx="minor"/>
         </p:style>
         <p:txBody>
-          <a:bodyPr lIns="90000" tIns="15840" rIns="90000" bIns="15840" anchor="t">
+          <a:bodyPr lIns="42480" tIns="15840" rIns="42480" bIns="15840" anchor="t">
             <a:noAutofit/>
           </a:bodyPr>
           <a:p>
@@ -8143,7 +9826,7 @@
         <p:spPr>
           <a:xfrm>
             <a:off x="1333440" y="4762440"/>
-            <a:ext cx="8524440" cy="561600"/>
+            <a:ext cx="8524080" cy="561240"/>
           </a:xfrm>
           <a:prstGeom prst="rect">
             <a:avLst/>
@@ -8177,6 +9860,7 @@
                 <a:effectLst/>
                 <a:uFillTx/>
                 <a:latin typeface="Arial"/>
+                <a:ea typeface="Arial"/>
               </a:rPr>
               <a:t>Each project: problem → approach → tools/concepts → outcome or recommendation</a:t>
             </a:r>
@@ -8200,7 +9884,7 @@
         <p:spPr>
           <a:xfrm>
             <a:off x="1028880" y="5477040"/>
-            <a:ext cx="85320" cy="85320"/>
+            <a:ext cx="84960" cy="84960"/>
           </a:xfrm>
           <a:prstGeom prst="roundRect">
             <a:avLst>
@@ -8221,7 +9905,7 @@
           <a:fontRef idx="minor"/>
         </p:style>
         <p:txBody>
-          <a:bodyPr lIns="90000" tIns="15840" rIns="90000" bIns="15840" anchor="t">
+          <a:bodyPr lIns="42480" tIns="15840" rIns="42480" bIns="15840" anchor="t">
             <a:noAutofit/>
           </a:bodyPr>
           <a:p>
@@ -8246,7 +9930,7 @@
         <p:spPr>
           <a:xfrm>
             <a:off x="1333440" y="5362560"/>
-            <a:ext cx="8524440" cy="561600"/>
+            <a:ext cx="8524080" cy="561240"/>
           </a:xfrm>
           <a:prstGeom prst="rect">
             <a:avLst/>
@@ -8280,6 +9964,7 @@
                 <a:effectLst/>
                 <a:uFillTx/>
                 <a:latin typeface="Arial"/>
+                <a:ea typeface="Arial"/>
               </a:rPr>
               <a:t>Goal: easy to explore and easy to understand</a:t>
             </a:r>
@@ -8303,7 +9988,7 @@
         <p:spPr>
           <a:xfrm>
             <a:off x="10001160" y="4467240"/>
-            <a:ext cx="1047240" cy="571320"/>
+            <a:ext cx="1046880" cy="570960"/>
           </a:xfrm>
           <a:prstGeom prst="rect">
             <a:avLst/>
@@ -8337,6 +10022,7 @@
                 <a:effectLst/>
                 <a:uFillTx/>
                 <a:latin typeface="Arial"/>
+                <a:ea typeface="Arial"/>
               </a:rPr>
               <a:t>12 / 14</a:t>
             </a:r>
@@ -8360,7 +10046,7 @@
         <p:spPr>
           <a:xfrm>
             <a:off x="990720" y="5867280"/>
-            <a:ext cx="4571640" cy="171000"/>
+            <a:ext cx="4571280" cy="170640"/>
           </a:xfrm>
           <a:prstGeom prst="rect">
             <a:avLst/>
@@ -8394,6 +10080,7 @@
                 <a:effectLst/>
                 <a:uFillTx/>
                 <a:latin typeface="Arial"/>
+                <a:ea typeface="Arial"/>
               </a:rPr>
               <a:t>Presentation Flashcards  •  10-minute talk</a:t>
             </a:r>
@@ -8454,7 +10141,7 @@
         <p:spPr>
           <a:xfrm>
             <a:off x="571680" y="533520"/>
-            <a:ext cx="11048760" cy="5790960"/>
+            <a:ext cx="11048400" cy="5790600"/>
           </a:xfrm>
           <a:prstGeom prst="roundRect">
             <a:avLst>
@@ -8503,7 +10190,7 @@
         <p:spPr>
           <a:xfrm>
             <a:off x="990720" y="905040"/>
-            <a:ext cx="6048000" cy="209160"/>
+            <a:ext cx="6047640" cy="208800"/>
           </a:xfrm>
           <a:prstGeom prst="rect">
             <a:avLst/>
@@ -8537,6 +10224,7 @@
                 <a:effectLst/>
                 <a:uFillTx/>
                 <a:latin typeface="Arial"/>
+                <a:ea typeface="Arial"/>
               </a:rPr>
               <a:t>AYALEW CHERENET  |  IT &amp; CYBERSECURITY PORTFOLIO</a:t>
             </a:r>
@@ -8560,7 +10248,7 @@
         <p:spPr>
           <a:xfrm>
             <a:off x="990720" y="1276200"/>
-            <a:ext cx="1523520" cy="237600"/>
+            <a:ext cx="1523160" cy="237240"/>
           </a:xfrm>
           <a:prstGeom prst="rect">
             <a:avLst/>
@@ -8594,6 +10282,7 @@
                 <a:effectLst/>
                 <a:uFillTx/>
                 <a:latin typeface="Arial"/>
+                <a:ea typeface="Arial"/>
               </a:rPr>
               <a:t>CARD 13</a:t>
             </a:r>
@@ -8617,7 +10306,7 @@
         <p:spPr>
           <a:xfrm>
             <a:off x="9620280" y="1276200"/>
-            <a:ext cx="1428480" cy="237600"/>
+            <a:ext cx="1428120" cy="237240"/>
           </a:xfrm>
           <a:prstGeom prst="rect">
             <a:avLst/>
@@ -8651,6 +10340,7 @@
                 <a:effectLst/>
                 <a:uFillTx/>
                 <a:latin typeface="Arial"/>
+                <a:ea typeface="Arial"/>
               </a:rPr>
               <a:t>9:08–9:32</a:t>
             </a:r>
@@ -8674,7 +10364,7 @@
         <p:spPr>
           <a:xfrm>
             <a:off x="990720" y="1676520"/>
-            <a:ext cx="590040" cy="47160"/>
+            <a:ext cx="589680" cy="46800"/>
           </a:xfrm>
           <a:prstGeom prst="roundRect">
             <a:avLst>
@@ -8720,7 +10410,7 @@
         <p:spPr>
           <a:xfrm>
             <a:off x="990720" y="1952640"/>
-            <a:ext cx="8762760" cy="952200"/>
+            <a:ext cx="8762400" cy="951840"/>
           </a:xfrm>
           <a:prstGeom prst="rect">
             <a:avLst/>
@@ -8754,6 +10444,7 @@
                 <a:effectLst/>
                 <a:uFillTx/>
                 <a:latin typeface="Arial"/>
+                <a:ea typeface="Arial"/>
               </a:rPr>
               <a:t>Certifications &amp; Growth</a:t>
             </a:r>
@@ -8777,7 +10468,7 @@
         <p:spPr>
           <a:xfrm>
             <a:off x="990720" y="3162240"/>
-            <a:ext cx="2476080" cy="237600"/>
+            <a:ext cx="2475720" cy="237240"/>
           </a:xfrm>
           <a:prstGeom prst="rect">
             <a:avLst/>
@@ -8811,6 +10502,7 @@
                 <a:effectLst/>
                 <a:uFillTx/>
                 <a:latin typeface="Arial"/>
+                <a:ea typeface="Arial"/>
               </a:rPr>
               <a:t>WHAT TO SAY</a:t>
             </a:r>
@@ -8834,7 +10526,7 @@
         <p:spPr>
           <a:xfrm>
             <a:off x="1028880" y="3676680"/>
-            <a:ext cx="85320" cy="85320"/>
+            <a:ext cx="84960" cy="84960"/>
           </a:xfrm>
           <a:prstGeom prst="roundRect">
             <a:avLst>
@@ -8855,7 +10547,7 @@
           <a:fontRef idx="minor"/>
         </p:style>
         <p:txBody>
-          <a:bodyPr lIns="90000" tIns="15840" rIns="90000" bIns="15840" anchor="t">
+          <a:bodyPr lIns="42480" tIns="15840" rIns="42480" bIns="15840" anchor="t">
             <a:noAutofit/>
           </a:bodyPr>
           <a:p>
@@ -8880,7 +10572,7 @@
         <p:spPr>
           <a:xfrm>
             <a:off x="1333440" y="3562200"/>
-            <a:ext cx="8524440" cy="561600"/>
+            <a:ext cx="8524080" cy="561240"/>
           </a:xfrm>
           <a:prstGeom prst="rect">
             <a:avLst/>
@@ -8914,6 +10606,7 @@
                 <a:effectLst/>
                 <a:uFillTx/>
                 <a:latin typeface="Arial"/>
+                <a:ea typeface="Arial"/>
               </a:rPr>
               <a:t>Completing the Google Cybersecurity Professional Certificate</a:t>
             </a:r>
@@ -8937,7 +10630,7 @@
         <p:spPr>
           <a:xfrm>
             <a:off x="1028880" y="4276800"/>
-            <a:ext cx="85320" cy="85320"/>
+            <a:ext cx="84960" cy="84960"/>
           </a:xfrm>
           <a:prstGeom prst="roundRect">
             <a:avLst>
@@ -8958,7 +10651,7 @@
           <a:fontRef idx="minor"/>
         </p:style>
         <p:txBody>
-          <a:bodyPr lIns="90000" tIns="15840" rIns="90000" bIns="15840" anchor="t">
+          <a:bodyPr lIns="42480" tIns="15840" rIns="42480" bIns="15840" anchor="t">
             <a:noAutofit/>
           </a:bodyPr>
           <a:p>
@@ -8983,7 +10676,7 @@
         <p:spPr>
           <a:xfrm>
             <a:off x="1333440" y="4162320"/>
-            <a:ext cx="8524440" cy="561600"/>
+            <a:ext cx="8524080" cy="561240"/>
           </a:xfrm>
           <a:prstGeom prst="rect">
             <a:avLst/>
@@ -9017,6 +10710,7 @@
                 <a:effectLst/>
                 <a:uFillTx/>
                 <a:latin typeface="Arial"/>
+                <a:ea typeface="Arial"/>
               </a:rPr>
               <a:t>Preparing for CompTIA Security+ next</a:t>
             </a:r>
@@ -9040,7 +10734,7 @@
         <p:spPr>
           <a:xfrm>
             <a:off x="1028880" y="4876920"/>
-            <a:ext cx="85320" cy="85320"/>
+            <a:ext cx="84960" cy="84960"/>
           </a:xfrm>
           <a:prstGeom prst="roundRect">
             <a:avLst>
@@ -9061,7 +10755,7 @@
           <a:fontRef idx="minor"/>
         </p:style>
         <p:txBody>
-          <a:bodyPr lIns="90000" tIns="15840" rIns="90000" bIns="15840" anchor="t">
+          <a:bodyPr lIns="42480" tIns="15840" rIns="42480" bIns="15840" anchor="t">
             <a:noAutofit/>
           </a:bodyPr>
           <a:p>
@@ -9086,7 +10780,7 @@
         <p:spPr>
           <a:xfrm>
             <a:off x="1333440" y="4762440"/>
-            <a:ext cx="8524440" cy="561600"/>
+            <a:ext cx="8524080" cy="561240"/>
           </a:xfrm>
           <a:prstGeom prst="rect">
             <a:avLst/>
@@ -9120,6 +10814,7 @@
                 <a:effectLst/>
                 <a:uFillTx/>
                 <a:latin typeface="Arial"/>
+                <a:ea typeface="Arial"/>
               </a:rPr>
               <a:t>Next: more SOC-focused projects and sharper incident response and monitoring skills</a:t>
             </a:r>
@@ -9143,7 +10838,7 @@
         <p:spPr>
           <a:xfrm>
             <a:off x="1028880" y="5477040"/>
-            <a:ext cx="85320" cy="85320"/>
+            <a:ext cx="84960" cy="84960"/>
           </a:xfrm>
           <a:prstGeom prst="roundRect">
             <a:avLst>
@@ -9164,7 +10859,7 @@
           <a:fontRef idx="minor"/>
         </p:style>
         <p:txBody>
-          <a:bodyPr lIns="90000" tIns="15840" rIns="90000" bIns="15840" anchor="t">
+          <a:bodyPr lIns="42480" tIns="15840" rIns="42480" bIns="15840" anchor="t">
             <a:noAutofit/>
           </a:bodyPr>
           <a:p>
@@ -9189,7 +10884,7 @@
         <p:spPr>
           <a:xfrm>
             <a:off x="1333440" y="5362560"/>
-            <a:ext cx="8524440" cy="561600"/>
+            <a:ext cx="8524080" cy="561240"/>
           </a:xfrm>
           <a:prstGeom prst="rect">
             <a:avLst/>
@@ -9223,6 +10918,7 @@
                 <a:effectLst/>
                 <a:uFillTx/>
                 <a:latin typeface="Arial"/>
+                <a:ea typeface="Arial"/>
               </a:rPr>
               <a:t>Goal: contribute to a cybersecurity team in Dallas–Fort Worth</a:t>
             </a:r>
@@ -9246,7 +10942,7 @@
         <p:spPr>
           <a:xfrm>
             <a:off x="10001160" y="4467240"/>
-            <a:ext cx="1047240" cy="571320"/>
+            <a:ext cx="1046880" cy="570960"/>
           </a:xfrm>
           <a:prstGeom prst="rect">
             <a:avLst/>
@@ -9280,6 +10976,7 @@
                 <a:effectLst/>
                 <a:uFillTx/>
                 <a:latin typeface="Arial"/>
+                <a:ea typeface="Arial"/>
               </a:rPr>
               <a:t>13 / 14</a:t>
             </a:r>
@@ -9303,7 +11000,7 @@
         <p:spPr>
           <a:xfrm>
             <a:off x="990720" y="5867280"/>
-            <a:ext cx="4571640" cy="171000"/>
+            <a:ext cx="4571280" cy="170640"/>
           </a:xfrm>
           <a:prstGeom prst="rect">
             <a:avLst/>
@@ -9337,6 +11034,7 @@
                 <a:effectLst/>
                 <a:uFillTx/>
                 <a:latin typeface="Arial"/>
+                <a:ea typeface="Arial"/>
               </a:rPr>
               <a:t>Presentation Flashcards  •  10-minute talk</a:t>
             </a:r>
@@ -9397,7 +11095,7 @@
         <p:spPr>
           <a:xfrm>
             <a:off x="571680" y="533520"/>
-            <a:ext cx="11048760" cy="5790960"/>
+            <a:ext cx="11048400" cy="5790600"/>
           </a:xfrm>
           <a:prstGeom prst="roundRect">
             <a:avLst>
@@ -9446,7 +11144,7 @@
         <p:spPr>
           <a:xfrm>
             <a:off x="990720" y="905040"/>
-            <a:ext cx="6048000" cy="209160"/>
+            <a:ext cx="6047640" cy="208800"/>
           </a:xfrm>
           <a:prstGeom prst="rect">
             <a:avLst/>
@@ -9480,6 +11178,7 @@
                 <a:effectLst/>
                 <a:uFillTx/>
                 <a:latin typeface="Arial"/>
+                <a:ea typeface="Arial"/>
               </a:rPr>
               <a:t>AYALEW CHERENET  |  IT &amp; CYBERSECURITY PORTFOLIO</a:t>
             </a:r>
@@ -9503,7 +11202,7 @@
         <p:spPr>
           <a:xfrm>
             <a:off x="990720" y="1276200"/>
-            <a:ext cx="1523520" cy="237600"/>
+            <a:ext cx="1523160" cy="237240"/>
           </a:xfrm>
           <a:prstGeom prst="rect">
             <a:avLst/>
@@ -9537,6 +11236,7 @@
                 <a:effectLst/>
                 <a:uFillTx/>
                 <a:latin typeface="Arial"/>
+                <a:ea typeface="Arial"/>
               </a:rPr>
               <a:t>CARD 14</a:t>
             </a:r>
@@ -9560,7 +11260,7 @@
         <p:spPr>
           <a:xfrm>
             <a:off x="9620280" y="1276200"/>
-            <a:ext cx="1428480" cy="237600"/>
+            <a:ext cx="1428120" cy="237240"/>
           </a:xfrm>
           <a:prstGeom prst="rect">
             <a:avLst/>
@@ -9594,6 +11294,7 @@
                 <a:effectLst/>
                 <a:uFillTx/>
                 <a:latin typeface="Arial"/>
+                <a:ea typeface="Arial"/>
               </a:rPr>
               <a:t>9:32–10:00</a:t>
             </a:r>
@@ -9617,7 +11318,7 @@
         <p:spPr>
           <a:xfrm>
             <a:off x="990720" y="1676520"/>
-            <a:ext cx="590040" cy="47160"/>
+            <a:ext cx="589680" cy="46800"/>
           </a:xfrm>
           <a:prstGeom prst="roundRect">
             <a:avLst>
@@ -9663,7 +11364,7 @@
         <p:spPr>
           <a:xfrm>
             <a:off x="990720" y="1952640"/>
-            <a:ext cx="8762760" cy="952200"/>
+            <a:ext cx="8762400" cy="951840"/>
           </a:xfrm>
           <a:prstGeom prst="rect">
             <a:avLst/>
@@ -9697,6 +11398,7 @@
                 <a:effectLst/>
                 <a:uFillTx/>
                 <a:latin typeface="Arial"/>
+                <a:ea typeface="Arial"/>
               </a:rPr>
               <a:t>Closing</a:t>
             </a:r>
@@ -9720,7 +11422,7 @@
         <p:spPr>
           <a:xfrm>
             <a:off x="990720" y="3162240"/>
-            <a:ext cx="2476080" cy="237600"/>
+            <a:ext cx="2475720" cy="237240"/>
           </a:xfrm>
           <a:prstGeom prst="rect">
             <a:avLst/>
@@ -9754,6 +11456,7 @@
                 <a:effectLst/>
                 <a:uFillTx/>
                 <a:latin typeface="Arial"/>
+                <a:ea typeface="Arial"/>
               </a:rPr>
               <a:t>WHAT TO SAY</a:t>
             </a:r>
@@ -9777,7 +11480,7 @@
         <p:spPr>
           <a:xfrm>
             <a:off x="1028880" y="3676680"/>
-            <a:ext cx="85320" cy="85320"/>
+            <a:ext cx="84960" cy="84960"/>
           </a:xfrm>
           <a:prstGeom prst="roundRect">
             <a:avLst>
@@ -9798,7 +11501,7 @@
           <a:fontRef idx="minor"/>
         </p:style>
         <p:txBody>
-          <a:bodyPr lIns="90000" tIns="15840" rIns="90000" bIns="15840" anchor="t">
+          <a:bodyPr lIns="42480" tIns="15840" rIns="42480" bIns="15840" anchor="t">
             <a:noAutofit/>
           </a:bodyPr>
           <a:p>
@@ -9823,7 +11526,7 @@
         <p:spPr>
           <a:xfrm>
             <a:off x="1333440" y="3562200"/>
-            <a:ext cx="8524440" cy="561600"/>
+            <a:ext cx="8524080" cy="561240"/>
           </a:xfrm>
           <a:prstGeom prst="rect">
             <a:avLst/>
@@ -9857,6 +11560,7 @@
                 <a:effectLst/>
                 <a:uFillTx/>
                 <a:latin typeface="Arial"/>
+                <a:ea typeface="Arial"/>
               </a:rPr>
               <a:t>Portfolio = more than school assignments — it is career preparation</a:t>
             </a:r>
@@ -9880,7 +11584,7 @@
         <p:spPr>
           <a:xfrm>
             <a:off x="1028880" y="4276800"/>
-            <a:ext cx="85320" cy="85320"/>
+            <a:ext cx="84960" cy="84960"/>
           </a:xfrm>
           <a:prstGeom prst="roundRect">
             <a:avLst>
@@ -9901,7 +11605,7 @@
           <a:fontRef idx="minor"/>
         </p:style>
         <p:txBody>
-          <a:bodyPr lIns="90000" tIns="15840" rIns="90000" bIns="15840" anchor="t">
+          <a:bodyPr lIns="42480" tIns="15840" rIns="42480" bIns="15840" anchor="t">
             <a:noAutofit/>
           </a:bodyPr>
           <a:p>
@@ -9926,7 +11630,7 @@
         <p:spPr>
           <a:xfrm>
             <a:off x="1333440" y="4162320"/>
-            <a:ext cx="8524440" cy="561600"/>
+            <a:ext cx="8524080" cy="561240"/>
           </a:xfrm>
           <a:prstGeom prst="rect">
             <a:avLst/>
@@ -9960,6 +11664,7 @@
                 <a:effectLst/>
                 <a:uFillTx/>
                 <a:latin typeface="Arial"/>
+                <a:ea typeface="Arial"/>
               </a:rPr>
               <a:t>Ready to learn from experienced professionals</a:t>
             </a:r>
@@ -9983,7 +11688,7 @@
         <p:spPr>
           <a:xfrm>
             <a:off x="1028880" y="4876920"/>
-            <a:ext cx="85320" cy="85320"/>
+            <a:ext cx="84960" cy="84960"/>
           </a:xfrm>
           <a:prstGeom prst="roundRect">
             <a:avLst>
@@ -10004,7 +11709,7 @@
           <a:fontRef idx="minor"/>
         </p:style>
         <p:txBody>
-          <a:bodyPr lIns="90000" tIns="15840" rIns="90000" bIns="15840" anchor="t">
+          <a:bodyPr lIns="42480" tIns="15840" rIns="42480" bIns="15840" anchor="t">
             <a:noAutofit/>
           </a:bodyPr>
           <a:p>
@@ -10029,7 +11734,7 @@
         <p:spPr>
           <a:xfrm>
             <a:off x="1333440" y="4762440"/>
-            <a:ext cx="8524440" cy="561600"/>
+            <a:ext cx="8524080" cy="561240"/>
           </a:xfrm>
           <a:prstGeom prst="rect">
             <a:avLst/>
@@ -10063,6 +11768,7 @@
                 <a:effectLst/>
                 <a:uFillTx/>
                 <a:latin typeface="Arial"/>
+                <a:ea typeface="Arial"/>
               </a:rPr>
               <a:t>Bring strong documentation and attention to detail as a SOC Analyst</a:t>
             </a:r>
@@ -10086,7 +11792,7 @@
         <p:spPr>
           <a:xfrm>
             <a:off x="1028880" y="5477040"/>
-            <a:ext cx="85320" cy="85320"/>
+            <a:ext cx="84960" cy="84960"/>
           </a:xfrm>
           <a:prstGeom prst="roundRect">
             <a:avLst>
@@ -10107,7 +11813,7 @@
           <a:fontRef idx="minor"/>
         </p:style>
         <p:txBody>
-          <a:bodyPr lIns="90000" tIns="15840" rIns="90000" bIns="15840" anchor="t">
+          <a:bodyPr lIns="42480" tIns="15840" rIns="42480" bIns="15840" anchor="t">
             <a:noAutofit/>
           </a:bodyPr>
           <a:p>
@@ -10132,7 +11838,7 @@
         <p:spPr>
           <a:xfrm>
             <a:off x="1333440" y="5362560"/>
-            <a:ext cx="8524440" cy="561600"/>
+            <a:ext cx="8524080" cy="561240"/>
           </a:xfrm>
           <a:prstGeom prst="rect">
             <a:avLst/>
@@ -10166,6 +11872,7 @@
                 <a:effectLst/>
                 <a:uFillTx/>
                 <a:latin typeface="Arial"/>
+                <a:ea typeface="Arial"/>
               </a:rPr>
               <a:t>Thank the audience and invite questions</a:t>
             </a:r>
@@ -10189,7 +11896,7 @@
         <p:spPr>
           <a:xfrm>
             <a:off x="10001160" y="4467240"/>
-            <a:ext cx="1047240" cy="571320"/>
+            <a:ext cx="1046880" cy="570960"/>
           </a:xfrm>
           <a:prstGeom prst="rect">
             <a:avLst/>
@@ -10223,6 +11930,7 @@
                 <a:effectLst/>
                 <a:uFillTx/>
                 <a:latin typeface="Arial"/>
+                <a:ea typeface="Arial"/>
               </a:rPr>
               <a:t>14 / 14</a:t>
             </a:r>
@@ -10246,7 +11954,7 @@
         <p:spPr>
           <a:xfrm>
             <a:off x="990720" y="5867280"/>
-            <a:ext cx="4571640" cy="171000"/>
+            <a:ext cx="4571280" cy="170640"/>
           </a:xfrm>
           <a:prstGeom prst="rect">
             <a:avLst/>
@@ -10280,6 +11988,7 @@
                 <a:effectLst/>
                 <a:uFillTx/>
                 <a:latin typeface="Arial"/>
+                <a:ea typeface="Arial"/>
               </a:rPr>
               <a:t>Presentation Flashcards  •  10-minute talk</a:t>
             </a:r>
@@ -10340,7 +12049,7 @@
         <p:spPr>
           <a:xfrm>
             <a:off x="571680" y="533520"/>
-            <a:ext cx="11048760" cy="5790960"/>
+            <a:ext cx="11048400" cy="5790600"/>
           </a:xfrm>
           <a:prstGeom prst="roundRect">
             <a:avLst>
@@ -10389,7 +12098,7 @@
         <p:spPr>
           <a:xfrm>
             <a:off x="990720" y="905040"/>
-            <a:ext cx="6048000" cy="209160"/>
+            <a:ext cx="6047640" cy="208800"/>
           </a:xfrm>
           <a:prstGeom prst="rect">
             <a:avLst/>
@@ -10423,6 +12132,7 @@
                 <a:effectLst/>
                 <a:uFillTx/>
                 <a:latin typeface="Arial"/>
+                <a:ea typeface="Arial"/>
               </a:rPr>
               <a:t>AYALEW CHERENET  |  IT &amp; CYBERSECURITY PORTFOLIO</a:t>
             </a:r>
@@ -10446,7 +12156,7 @@
         <p:spPr>
           <a:xfrm>
             <a:off x="990720" y="1276200"/>
-            <a:ext cx="1523520" cy="237600"/>
+            <a:ext cx="1523160" cy="237240"/>
           </a:xfrm>
           <a:prstGeom prst="rect">
             <a:avLst/>
@@ -10480,6 +12190,7 @@
                 <a:effectLst/>
                 <a:uFillTx/>
                 <a:latin typeface="Arial"/>
+                <a:ea typeface="Arial"/>
               </a:rPr>
               <a:t>CARD 02</a:t>
             </a:r>
@@ -10503,7 +12214,7 @@
         <p:spPr>
           <a:xfrm>
             <a:off x="9620280" y="1276200"/>
-            <a:ext cx="1428480" cy="237600"/>
+            <a:ext cx="1428120" cy="237240"/>
           </a:xfrm>
           <a:prstGeom prst="rect">
             <a:avLst/>
@@ -10537,6 +12248,7 @@
                 <a:effectLst/>
                 <a:uFillTx/>
                 <a:latin typeface="Arial"/>
+                <a:ea typeface="Arial"/>
               </a:rPr>
               <a:t>0:42–1:23</a:t>
             </a:r>
@@ -10560,7 +12272,7 @@
         <p:spPr>
           <a:xfrm>
             <a:off x="990720" y="1676520"/>
-            <a:ext cx="590040" cy="47160"/>
+            <a:ext cx="589680" cy="46800"/>
           </a:xfrm>
           <a:prstGeom prst="roundRect">
             <a:avLst>
@@ -10606,7 +12318,7 @@
         <p:spPr>
           <a:xfrm>
             <a:off x="990720" y="1952640"/>
-            <a:ext cx="8762760" cy="952200"/>
+            <a:ext cx="8762400" cy="951840"/>
           </a:xfrm>
           <a:prstGeom prst="rect">
             <a:avLst/>
@@ -10640,6 +12352,7 @@
                 <a:effectLst/>
                 <a:uFillTx/>
                 <a:latin typeface="Arial"/>
+                <a:ea typeface="Arial"/>
               </a:rPr>
               <a:t>About Me</a:t>
             </a:r>
@@ -10663,7 +12376,7 @@
         <p:spPr>
           <a:xfrm>
             <a:off x="990720" y="3162240"/>
-            <a:ext cx="2476080" cy="237600"/>
+            <a:ext cx="2475720" cy="237240"/>
           </a:xfrm>
           <a:prstGeom prst="rect">
             <a:avLst/>
@@ -10697,6 +12410,7 @@
                 <a:effectLst/>
                 <a:uFillTx/>
                 <a:latin typeface="Arial"/>
+                <a:ea typeface="Arial"/>
               </a:rPr>
               <a:t>WHAT TO SAY</a:t>
             </a:r>
@@ -10720,7 +12434,7 @@
         <p:spPr>
           <a:xfrm>
             <a:off x="1028880" y="3676680"/>
-            <a:ext cx="85320" cy="85320"/>
+            <a:ext cx="84960" cy="84960"/>
           </a:xfrm>
           <a:prstGeom prst="roundRect">
             <a:avLst>
@@ -10741,7 +12455,7 @@
           <a:fontRef idx="minor"/>
         </p:style>
         <p:txBody>
-          <a:bodyPr lIns="90000" tIns="15840" rIns="90000" bIns="15840" anchor="t">
+          <a:bodyPr lIns="42480" tIns="15840" rIns="42480" bIns="15840" anchor="t">
             <a:noAutofit/>
           </a:bodyPr>
           <a:p>
@@ -10766,7 +12480,7 @@
         <p:spPr>
           <a:xfrm>
             <a:off x="1333440" y="3562200"/>
-            <a:ext cx="8524440" cy="561600"/>
+            <a:ext cx="8524080" cy="561240"/>
           </a:xfrm>
           <a:prstGeom prst="rect">
             <a:avLst/>
@@ -10800,6 +12514,7 @@
                 <a:effectLst/>
                 <a:uFillTx/>
                 <a:latin typeface="Arial"/>
+                <a:ea typeface="Arial"/>
               </a:rPr>
               <a:t>Detail-oriented — organizations depend on secure systems and people who notice problems early</a:t>
             </a:r>
@@ -10823,7 +12538,7 @@
         <p:spPr>
           <a:xfrm>
             <a:off x="1028880" y="4276800"/>
-            <a:ext cx="85320" cy="85320"/>
+            <a:ext cx="84960" cy="84960"/>
           </a:xfrm>
           <a:prstGeom prst="roundRect">
             <a:avLst>
@@ -10844,7 +12559,7 @@
           <a:fontRef idx="minor"/>
         </p:style>
         <p:txBody>
-          <a:bodyPr lIns="90000" tIns="15840" rIns="90000" bIns="15840" anchor="t">
+          <a:bodyPr lIns="42480" tIns="15840" rIns="42480" bIns="15840" anchor="t">
             <a:noAutofit/>
           </a:bodyPr>
           <a:p>
@@ -10869,7 +12584,7 @@
         <p:spPr>
           <a:xfrm>
             <a:off x="1333440" y="4162320"/>
-            <a:ext cx="8524440" cy="561600"/>
+            <a:ext cx="8524080" cy="561240"/>
           </a:xfrm>
           <a:prstGeom prst="rect">
             <a:avLst/>
@@ -10903,6 +12618,7 @@
                 <a:effectLst/>
                 <a:uFillTx/>
                 <a:latin typeface="Arial"/>
+                <a:ea typeface="Arial"/>
               </a:rPr>
               <a:t>Work experience: reliability, process discipline, teamwork, and documentation</a:t>
             </a:r>
@@ -10926,7 +12642,7 @@
         <p:spPr>
           <a:xfrm>
             <a:off x="1028880" y="4876920"/>
-            <a:ext cx="85320" cy="85320"/>
+            <a:ext cx="84960" cy="84960"/>
           </a:xfrm>
           <a:prstGeom prst="roundRect">
             <a:avLst>
@@ -10947,7 +12663,7 @@
           <a:fontRef idx="minor"/>
         </p:style>
         <p:txBody>
-          <a:bodyPr lIns="90000" tIns="15840" rIns="90000" bIns="15840" anchor="t">
+          <a:bodyPr lIns="42480" tIns="15840" rIns="42480" bIns="15840" anchor="t">
             <a:noAutofit/>
           </a:bodyPr>
           <a:p>
@@ -10972,7 +12688,7 @@
         <p:spPr>
           <a:xfrm>
             <a:off x="1333440" y="4762440"/>
-            <a:ext cx="8524440" cy="561600"/>
+            <a:ext cx="8524080" cy="561240"/>
           </a:xfrm>
           <a:prstGeom prst="rect">
             <a:avLst/>
@@ -11006,6 +12722,7 @@
                 <a:effectLst/>
                 <a:uFillTx/>
                 <a:latin typeface="Arial"/>
+                <a:ea typeface="Arial"/>
               </a:rPr>
               <a:t>Technical areas: risk assessment, threat and vulnerability management, network security, web app security</a:t>
             </a:r>
@@ -11029,7 +12746,7 @@
         <p:spPr>
           <a:xfrm>
             <a:off x="1028880" y="5477040"/>
-            <a:ext cx="85320" cy="85320"/>
+            <a:ext cx="84960" cy="84960"/>
           </a:xfrm>
           <a:prstGeom prst="roundRect">
             <a:avLst>
@@ -11050,7 +12767,7 @@
           <a:fontRef idx="minor"/>
         </p:style>
         <p:txBody>
-          <a:bodyPr lIns="90000" tIns="15840" rIns="90000" bIns="15840" anchor="t">
+          <a:bodyPr lIns="42480" tIns="15840" rIns="42480" bIns="15840" anchor="t">
             <a:noAutofit/>
           </a:bodyPr>
           <a:p>
@@ -11075,7 +12792,7 @@
         <p:spPr>
           <a:xfrm>
             <a:off x="1333440" y="5362560"/>
-            <a:ext cx="8524440" cy="561600"/>
+            <a:ext cx="8524080" cy="561240"/>
           </a:xfrm>
           <a:prstGeom prst="rect">
             <a:avLst/>
@@ -11109,6 +12826,7 @@
                 <a:effectLst/>
                 <a:uFillTx/>
                 <a:latin typeface="Arial"/>
+                <a:ea typeface="Arial"/>
               </a:rPr>
               <a:t>Also: Linux, cryptography, database security, Python, SQL, incident response</a:t>
             </a:r>
@@ -11132,7 +12850,7 @@
         <p:spPr>
           <a:xfrm>
             <a:off x="10001160" y="4467240"/>
-            <a:ext cx="1047240" cy="571320"/>
+            <a:ext cx="1046880" cy="570960"/>
           </a:xfrm>
           <a:prstGeom prst="rect">
             <a:avLst/>
@@ -11166,6 +12884,7 @@
                 <a:effectLst/>
                 <a:uFillTx/>
                 <a:latin typeface="Arial"/>
+                <a:ea typeface="Arial"/>
               </a:rPr>
               <a:t>02 / 14</a:t>
             </a:r>
@@ -11189,7 +12908,7 @@
         <p:spPr>
           <a:xfrm>
             <a:off x="990720" y="5867280"/>
-            <a:ext cx="4571640" cy="171000"/>
+            <a:ext cx="4571280" cy="170640"/>
           </a:xfrm>
           <a:prstGeom prst="rect">
             <a:avLst/>
@@ -11223,6 +12942,7 @@
                 <a:effectLst/>
                 <a:uFillTx/>
                 <a:latin typeface="Arial"/>
+                <a:ea typeface="Arial"/>
               </a:rPr>
               <a:t>Presentation Flashcards  •  10-minute talk</a:t>
             </a:r>
@@ -11283,7 +13003,7 @@
         <p:spPr>
           <a:xfrm>
             <a:off x="571680" y="533520"/>
-            <a:ext cx="11048760" cy="5790960"/>
+            <a:ext cx="11048400" cy="5790600"/>
           </a:xfrm>
           <a:prstGeom prst="roundRect">
             <a:avLst>
@@ -11332,7 +13052,7 @@
         <p:spPr>
           <a:xfrm>
             <a:off x="990720" y="905040"/>
-            <a:ext cx="6048000" cy="209160"/>
+            <a:ext cx="6047640" cy="208800"/>
           </a:xfrm>
           <a:prstGeom prst="rect">
             <a:avLst/>
@@ -11366,6 +13086,7 @@
                 <a:effectLst/>
                 <a:uFillTx/>
                 <a:latin typeface="Arial"/>
+                <a:ea typeface="Arial"/>
               </a:rPr>
               <a:t>AYALEW CHERENET  |  IT &amp; CYBERSECURITY PORTFOLIO</a:t>
             </a:r>
@@ -11389,7 +13110,7 @@
         <p:spPr>
           <a:xfrm>
             <a:off x="990720" y="1276200"/>
-            <a:ext cx="1523520" cy="237600"/>
+            <a:ext cx="1523160" cy="237240"/>
           </a:xfrm>
           <a:prstGeom prst="rect">
             <a:avLst/>
@@ -11423,6 +13144,7 @@
                 <a:effectLst/>
                 <a:uFillTx/>
                 <a:latin typeface="Arial"/>
+                <a:ea typeface="Arial"/>
               </a:rPr>
               <a:t>CARD 03</a:t>
             </a:r>
@@ -11446,7 +13168,7 @@
         <p:spPr>
           <a:xfrm>
             <a:off x="9620280" y="1276200"/>
-            <a:ext cx="1428480" cy="237600"/>
+            <a:ext cx="1428120" cy="237240"/>
           </a:xfrm>
           <a:prstGeom prst="rect">
             <a:avLst/>
@@ -11480,6 +13202,7 @@
                 <a:effectLst/>
                 <a:uFillTx/>
                 <a:latin typeface="Arial"/>
+                <a:ea typeface="Arial"/>
               </a:rPr>
               <a:t>1:23–1:52</a:t>
             </a:r>
@@ -11503,7 +13226,7 @@
         <p:spPr>
           <a:xfrm>
             <a:off x="990720" y="1676520"/>
-            <a:ext cx="590040" cy="47160"/>
+            <a:ext cx="589680" cy="46800"/>
           </a:xfrm>
           <a:prstGeom prst="roundRect">
             <a:avLst>
@@ -11549,7 +13272,7 @@
         <p:spPr>
           <a:xfrm>
             <a:off x="990720" y="1952640"/>
-            <a:ext cx="8762760" cy="952200"/>
+            <a:ext cx="8762400" cy="951840"/>
           </a:xfrm>
           <a:prstGeom prst="rect">
             <a:avLst/>
@@ -11583,6 +13306,7 @@
                 <a:effectLst/>
                 <a:uFillTx/>
                 <a:latin typeface="Arial"/>
+                <a:ea typeface="Arial"/>
               </a:rPr>
               <a:t>Why These Projects</a:t>
             </a:r>
@@ -11606,7 +13330,7 @@
         <p:spPr>
           <a:xfrm>
             <a:off x="990720" y="3162240"/>
-            <a:ext cx="2476080" cy="237600"/>
+            <a:ext cx="2475720" cy="237240"/>
           </a:xfrm>
           <a:prstGeom prst="rect">
             <a:avLst/>
@@ -11640,6 +13364,7 @@
                 <a:effectLst/>
                 <a:uFillTx/>
                 <a:latin typeface="Arial"/>
+                <a:ea typeface="Arial"/>
               </a:rPr>
               <a:t>WHAT TO SAY</a:t>
             </a:r>
@@ -11663,7 +13388,7 @@
         <p:spPr>
           <a:xfrm>
             <a:off x="1028880" y="3676680"/>
-            <a:ext cx="85320" cy="85320"/>
+            <a:ext cx="84960" cy="84960"/>
           </a:xfrm>
           <a:prstGeom prst="roundRect">
             <a:avLst>
@@ -11684,7 +13409,7 @@
           <a:fontRef idx="minor"/>
         </p:style>
         <p:txBody>
-          <a:bodyPr lIns="90000" tIns="15840" rIns="90000" bIns="15840" anchor="t">
+          <a:bodyPr lIns="42480" tIns="15840" rIns="42480" bIns="15840" anchor="t">
             <a:noAutofit/>
           </a:bodyPr>
           <a:p>
@@ -11709,7 +13434,7 @@
         <p:spPr>
           <a:xfrm>
             <a:off x="1333440" y="3562200"/>
-            <a:ext cx="8524440" cy="561600"/>
+            <a:ext cx="8524080" cy="561240"/>
           </a:xfrm>
           <a:prstGeom prst="rect">
             <a:avLst/>
@@ -11743,6 +13468,7 @@
                 <a:effectLst/>
                 <a:uFillTx/>
                 <a:latin typeface="Arial"/>
+                <a:ea typeface="Arial"/>
               </a:rPr>
               <a:t>SOC Analyst: monitors systems, investigates alerts, prioritizes risk, communicates findings</a:t>
             </a:r>
@@ -11766,7 +13492,7 @@
         <p:spPr>
           <a:xfrm>
             <a:off x="1028880" y="4276800"/>
-            <a:ext cx="85320" cy="85320"/>
+            <a:ext cx="84960" cy="84960"/>
           </a:xfrm>
           <a:prstGeom prst="roundRect">
             <a:avLst>
@@ -11787,7 +13513,7 @@
           <a:fontRef idx="minor"/>
         </p:style>
         <p:txBody>
-          <a:bodyPr lIns="90000" tIns="15840" rIns="90000" bIns="15840" anchor="t">
+          <a:bodyPr lIns="42480" tIns="15840" rIns="42480" bIns="15840" anchor="t">
             <a:noAutofit/>
           </a:bodyPr>
           <a:p>
@@ -11812,7 +13538,7 @@
         <p:spPr>
           <a:xfrm>
             <a:off x="1333440" y="4162320"/>
-            <a:ext cx="8524440" cy="561600"/>
+            <a:ext cx="8524080" cy="561240"/>
           </a:xfrm>
           <a:prstGeom prst="rect">
             <a:avLst/>
@@ -11846,6 +13572,7 @@
                 <a:effectLst/>
                 <a:uFillTx/>
                 <a:latin typeface="Arial"/>
+                <a:ea typeface="Arial"/>
               </a:rPr>
               <a:t>Projects show risk-based thinking, investigation, and remediation planning</a:t>
             </a:r>
@@ -11869,7 +13596,7 @@
         <p:spPr>
           <a:xfrm>
             <a:off x="1028880" y="4876920"/>
-            <a:ext cx="85320" cy="85320"/>
+            <a:ext cx="84960" cy="84960"/>
           </a:xfrm>
           <a:prstGeom prst="roundRect">
             <a:avLst>
@@ -11890,7 +13617,7 @@
           <a:fontRef idx="minor"/>
         </p:style>
         <p:txBody>
-          <a:bodyPr lIns="90000" tIns="15840" rIns="90000" bIns="15840" anchor="t">
+          <a:bodyPr lIns="42480" tIns="15840" rIns="42480" bIns="15840" anchor="t">
             <a:noAutofit/>
           </a:bodyPr>
           <a:p>
@@ -11915,7 +13642,7 @@
         <p:spPr>
           <a:xfrm>
             <a:off x="1333440" y="4762440"/>
-            <a:ext cx="8524440" cy="561600"/>
+            <a:ext cx="8524080" cy="561240"/>
           </a:xfrm>
           <a:prstGeom prst="rect">
             <a:avLst/>
@@ -11949,6 +13676,7 @@
                 <a:effectLst/>
                 <a:uFillTx/>
                 <a:latin typeface="Arial"/>
+                <a:ea typeface="Arial"/>
               </a:rPr>
               <a:t>8 projects total: 6 cybersecurity case studies + 2 programming/e-commerce projects</a:t>
             </a:r>
@@ -11972,7 +13700,7 @@
         <p:spPr>
           <a:xfrm>
             <a:off x="10001160" y="4467240"/>
-            <a:ext cx="1047240" cy="571320"/>
+            <a:ext cx="1046880" cy="570960"/>
           </a:xfrm>
           <a:prstGeom prst="rect">
             <a:avLst/>
@@ -12006,6 +13734,7 @@
                 <a:effectLst/>
                 <a:uFillTx/>
                 <a:latin typeface="Arial"/>
+                <a:ea typeface="Arial"/>
               </a:rPr>
               <a:t>03 / 14</a:t>
             </a:r>
@@ -12029,7 +13758,7 @@
         <p:spPr>
           <a:xfrm>
             <a:off x="990720" y="5867280"/>
-            <a:ext cx="4571640" cy="171000"/>
+            <a:ext cx="4571280" cy="170640"/>
           </a:xfrm>
           <a:prstGeom prst="rect">
             <a:avLst/>
@@ -12063,6 +13792,7 @@
                 <a:effectLst/>
                 <a:uFillTx/>
                 <a:latin typeface="Arial"/>
+                <a:ea typeface="Arial"/>
               </a:rPr>
               <a:t>Presentation Flashcards  •  10-minute talk</a:t>
             </a:r>
@@ -12123,7 +13853,7 @@
         <p:spPr>
           <a:xfrm>
             <a:off x="571680" y="533520"/>
-            <a:ext cx="11048760" cy="5790960"/>
+            <a:ext cx="11048400" cy="5790600"/>
           </a:xfrm>
           <a:prstGeom prst="roundRect">
             <a:avLst>
@@ -12172,7 +13902,7 @@
         <p:spPr>
           <a:xfrm>
             <a:off x="990720" y="905040"/>
-            <a:ext cx="6048000" cy="209160"/>
+            <a:ext cx="6047640" cy="208800"/>
           </a:xfrm>
           <a:prstGeom prst="rect">
             <a:avLst/>
@@ -12206,6 +13936,7 @@
                 <a:effectLst/>
                 <a:uFillTx/>
                 <a:latin typeface="Arial"/>
+                <a:ea typeface="Arial"/>
               </a:rPr>
               <a:t>AYALEW CHERENET  |  IT &amp; CYBERSECURITY PORTFOLIO</a:t>
             </a:r>
@@ -12229,7 +13960,7 @@
         <p:spPr>
           <a:xfrm>
             <a:off x="990720" y="1276200"/>
-            <a:ext cx="1523520" cy="237600"/>
+            <a:ext cx="1523160" cy="237240"/>
           </a:xfrm>
           <a:prstGeom prst="rect">
             <a:avLst/>
@@ -12263,6 +13994,7 @@
                 <a:effectLst/>
                 <a:uFillTx/>
                 <a:latin typeface="Arial"/>
+                <a:ea typeface="Arial"/>
               </a:rPr>
               <a:t>CARD 04</a:t>
             </a:r>
@@ -12286,7 +14018,7 @@
         <p:spPr>
           <a:xfrm>
             <a:off x="9620280" y="1276200"/>
-            <a:ext cx="1428480" cy="237600"/>
+            <a:ext cx="1428120" cy="237240"/>
           </a:xfrm>
           <a:prstGeom prst="rect">
             <a:avLst/>
@@ -12320,6 +14052,7 @@
                 <a:effectLst/>
                 <a:uFillTx/>
                 <a:latin typeface="Arial"/>
+                <a:ea typeface="Arial"/>
               </a:rPr>
               <a:t>1:52–2:57</a:t>
             </a:r>
@@ -12343,7 +14076,7 @@
         <p:spPr>
           <a:xfrm>
             <a:off x="990720" y="1676520"/>
-            <a:ext cx="590040" cy="47160"/>
+            <a:ext cx="589680" cy="46800"/>
           </a:xfrm>
           <a:prstGeom prst="roundRect">
             <a:avLst>
@@ -12389,7 +14122,7 @@
         <p:spPr>
           <a:xfrm>
             <a:off x="990720" y="1952640"/>
-            <a:ext cx="8762760" cy="952200"/>
+            <a:ext cx="8762400" cy="951840"/>
           </a:xfrm>
           <a:prstGeom prst="rect">
             <a:avLst/>
@@ -12423,6 +14156,7 @@
                 <a:effectLst/>
                 <a:uFillTx/>
                 <a:latin typeface="Arial"/>
+                <a:ea typeface="Arial"/>
               </a:rPr>
               <a:t>Project 1 — Northbridge Logistics Risk Assessment</a:t>
             </a:r>
@@ -12446,7 +14180,7 @@
         <p:spPr>
           <a:xfrm>
             <a:off x="990720" y="3162240"/>
-            <a:ext cx="2476080" cy="237600"/>
+            <a:ext cx="2475720" cy="237240"/>
           </a:xfrm>
           <a:prstGeom prst="rect">
             <a:avLst/>
@@ -12480,6 +14214,7 @@
                 <a:effectLst/>
                 <a:uFillTx/>
                 <a:latin typeface="Arial"/>
+                <a:ea typeface="Arial"/>
               </a:rPr>
               <a:t>WHAT TO SAY</a:t>
             </a:r>
@@ -12503,7 +14238,7 @@
         <p:spPr>
           <a:xfrm>
             <a:off x="1028880" y="3676680"/>
-            <a:ext cx="85320" cy="85320"/>
+            <a:ext cx="84960" cy="84960"/>
           </a:xfrm>
           <a:prstGeom prst="roundRect">
             <a:avLst>
@@ -12524,7 +14259,7 @@
           <a:fontRef idx="minor"/>
         </p:style>
         <p:txBody>
-          <a:bodyPr lIns="90000" tIns="15840" rIns="90000" bIns="15840" anchor="t">
+          <a:bodyPr lIns="42480" tIns="15840" rIns="42480" bIns="15840" anchor="t">
             <a:noAutofit/>
           </a:bodyPr>
           <a:p>
@@ -12549,7 +14284,7 @@
         <p:spPr>
           <a:xfrm>
             <a:off x="1333440" y="3562200"/>
-            <a:ext cx="8524440" cy="475920"/>
+            <a:ext cx="8524080" cy="475560"/>
           </a:xfrm>
           <a:prstGeom prst="rect">
             <a:avLst/>
@@ -12583,6 +14318,7 @@
                 <a:effectLst/>
                 <a:uFillTx/>
                 <a:latin typeface="Arial"/>
+                <a:ea typeface="Arial"/>
               </a:rPr>
               <a:t>Logistics company: 150 employees across 3 office locations</a:t>
             </a:r>
@@ -12606,7 +14342,7 @@
         <p:spPr>
           <a:xfrm>
             <a:off x="1028880" y="4191120"/>
-            <a:ext cx="85320" cy="85320"/>
+            <a:ext cx="84960" cy="84960"/>
           </a:xfrm>
           <a:prstGeom prst="roundRect">
             <a:avLst>
@@ -12627,7 +14363,7 @@
           <a:fontRef idx="minor"/>
         </p:style>
         <p:txBody>
-          <a:bodyPr lIns="90000" tIns="15840" rIns="90000" bIns="15840" anchor="t">
+          <a:bodyPr lIns="42480" tIns="15840" rIns="42480" bIns="15840" anchor="t">
             <a:noAutofit/>
           </a:bodyPr>
           <a:p>
@@ -12652,7 +14388,7 @@
         <p:spPr>
           <a:xfrm>
             <a:off x="1333440" y="4076640"/>
-            <a:ext cx="8524440" cy="475920"/>
+            <a:ext cx="8524080" cy="475560"/>
           </a:xfrm>
           <a:prstGeom prst="rect">
             <a:avLst/>
@@ -12686,6 +14422,7 @@
                 <a:effectLst/>
                 <a:uFillTx/>
                 <a:latin typeface="Arial"/>
+                <a:ea typeface="Arial"/>
               </a:rPr>
               <a:t>Identified assets, threats, vulnerabilities, and business impact</a:t>
             </a:r>
@@ -12709,7 +14446,7 @@
         <p:spPr>
           <a:xfrm>
             <a:off x="1028880" y="4705200"/>
-            <a:ext cx="85320" cy="85320"/>
+            <a:ext cx="84960" cy="84960"/>
           </a:xfrm>
           <a:prstGeom prst="roundRect">
             <a:avLst>
@@ -12730,7 +14467,7 @@
           <a:fontRef idx="minor"/>
         </p:style>
         <p:txBody>
-          <a:bodyPr lIns="90000" tIns="15840" rIns="90000" bIns="15840" anchor="t">
+          <a:bodyPr lIns="42480" tIns="15840" rIns="42480" bIns="15840" anchor="t">
             <a:noAutofit/>
           </a:bodyPr>
           <a:p>
@@ -12755,7 +14492,7 @@
         <p:spPr>
           <a:xfrm>
             <a:off x="1333440" y="4591080"/>
-            <a:ext cx="8524440" cy="475920"/>
+            <a:ext cx="8524080" cy="475560"/>
           </a:xfrm>
           <a:prstGeom prst="rect">
             <a:avLst/>
@@ -12789,6 +14526,7 @@
                 <a:effectLst/>
                 <a:uFillTx/>
                 <a:latin typeface="Arial"/>
+                <a:ea typeface="Arial"/>
               </a:rPr>
               <a:t>Controls: MFA, EDR, network segmentation, SIEM, patching, backup and disaster recovery</a:t>
             </a:r>
@@ -12812,7 +14550,7 @@
         <p:spPr>
           <a:xfrm>
             <a:off x="1028880" y="5219640"/>
-            <a:ext cx="85320" cy="85320"/>
+            <a:ext cx="84960" cy="84960"/>
           </a:xfrm>
           <a:prstGeom prst="roundRect">
             <a:avLst>
@@ -12833,7 +14571,7 @@
           <a:fontRef idx="minor"/>
         </p:style>
         <p:txBody>
-          <a:bodyPr lIns="90000" tIns="15840" rIns="90000" bIns="15840" anchor="t">
+          <a:bodyPr lIns="42480" tIns="15840" rIns="42480" bIns="15840" anchor="t">
             <a:noAutofit/>
           </a:bodyPr>
           <a:p>
@@ -12858,7 +14596,7 @@
         <p:spPr>
           <a:xfrm>
             <a:off x="1333440" y="5105520"/>
-            <a:ext cx="8524440" cy="475920"/>
+            <a:ext cx="8524080" cy="475560"/>
           </a:xfrm>
           <a:prstGeom prst="rect">
             <a:avLst/>
@@ -12892,6 +14630,7 @@
                 <a:effectLst/>
                 <a:uFillTx/>
                 <a:latin typeface="Arial"/>
+                <a:ea typeface="Arial"/>
               </a:rPr>
               <a:t>Key point: prioritizing risk and building a roadmap, not just naming tools</a:t>
             </a:r>
@@ -12915,7 +14654,7 @@
         <p:spPr>
           <a:xfrm>
             <a:off x="1028880" y="5734080"/>
-            <a:ext cx="85320" cy="85320"/>
+            <a:ext cx="84960" cy="84960"/>
           </a:xfrm>
           <a:prstGeom prst="roundRect">
             <a:avLst>
@@ -12936,7 +14675,7 @@
           <a:fontRef idx="minor"/>
         </p:style>
         <p:txBody>
-          <a:bodyPr lIns="90000" tIns="15840" rIns="90000" bIns="15840" anchor="t">
+          <a:bodyPr lIns="42480" tIns="15840" rIns="42480" bIns="15840" anchor="t">
             <a:noAutofit/>
           </a:bodyPr>
           <a:p>
@@ -12961,7 +14700,7 @@
         <p:spPr>
           <a:xfrm>
             <a:off x="1333440" y="5619600"/>
-            <a:ext cx="8524440" cy="475920"/>
+            <a:ext cx="8524080" cy="475560"/>
           </a:xfrm>
           <a:prstGeom prst="rect">
             <a:avLst/>
@@ -12995,6 +14734,7 @@
                 <a:effectLst/>
                 <a:uFillTx/>
                 <a:latin typeface="Arial"/>
+                <a:ea typeface="Arial"/>
               </a:rPr>
               <a:t>Roadmap: contain highest risks → detect and harden → validate controls</a:t>
             </a:r>
@@ -13018,7 +14758,7 @@
         <p:spPr>
           <a:xfrm>
             <a:off x="10001160" y="4467240"/>
-            <a:ext cx="1047240" cy="571320"/>
+            <a:ext cx="1046880" cy="570960"/>
           </a:xfrm>
           <a:prstGeom prst="rect">
             <a:avLst/>
@@ -13052,6 +14792,7 @@
                 <a:effectLst/>
                 <a:uFillTx/>
                 <a:latin typeface="Arial"/>
+                <a:ea typeface="Arial"/>
               </a:rPr>
               <a:t>04 / 14</a:t>
             </a:r>
@@ -13075,7 +14816,7 @@
         <p:spPr>
           <a:xfrm>
             <a:off x="990720" y="5867280"/>
-            <a:ext cx="4571640" cy="171000"/>
+            <a:ext cx="4571280" cy="170640"/>
           </a:xfrm>
           <a:prstGeom prst="rect">
             <a:avLst/>
@@ -13109,6 +14850,7 @@
                 <a:effectLst/>
                 <a:uFillTx/>
                 <a:latin typeface="Arial"/>
+                <a:ea typeface="Arial"/>
               </a:rPr>
               <a:t>Presentation Flashcards  •  10-minute talk</a:t>
             </a:r>
@@ -13169,7 +14911,7 @@
         <p:spPr>
           <a:xfrm>
             <a:off x="571680" y="533520"/>
-            <a:ext cx="11048760" cy="5790960"/>
+            <a:ext cx="11048400" cy="5790600"/>
           </a:xfrm>
           <a:prstGeom prst="roundRect">
             <a:avLst>
@@ -13218,7 +14960,7 @@
         <p:spPr>
           <a:xfrm>
             <a:off x="990720" y="905040"/>
-            <a:ext cx="6048000" cy="209160"/>
+            <a:ext cx="6047640" cy="208800"/>
           </a:xfrm>
           <a:prstGeom prst="rect">
             <a:avLst/>
@@ -13252,6 +14994,7 @@
                 <a:effectLst/>
                 <a:uFillTx/>
                 <a:latin typeface="Arial"/>
+                <a:ea typeface="Arial"/>
               </a:rPr>
               <a:t>AYALEW CHERENET  |  IT &amp; CYBERSECURITY PORTFOLIO</a:t>
             </a:r>
@@ -13275,7 +15018,7 @@
         <p:spPr>
           <a:xfrm>
             <a:off x="990720" y="1276200"/>
-            <a:ext cx="1523520" cy="237600"/>
+            <a:ext cx="1523160" cy="237240"/>
           </a:xfrm>
           <a:prstGeom prst="rect">
             <a:avLst/>
@@ -13309,6 +15052,7 @@
                 <a:effectLst/>
                 <a:uFillTx/>
                 <a:latin typeface="Arial"/>
+                <a:ea typeface="Arial"/>
               </a:rPr>
               <a:t>CARD 05</a:t>
             </a:r>
@@ -13332,7 +15076,7 @@
         <p:spPr>
           <a:xfrm>
             <a:off x="9620280" y="1276200"/>
-            <a:ext cx="1428480" cy="237600"/>
+            <a:ext cx="1428120" cy="237240"/>
           </a:xfrm>
           <a:prstGeom prst="rect">
             <a:avLst/>
@@ -13366,6 +15110,7 @@
                 <a:effectLst/>
                 <a:uFillTx/>
                 <a:latin typeface="Arial"/>
+                <a:ea typeface="Arial"/>
               </a:rPr>
               <a:t>2:57–3:48</a:t>
             </a:r>
@@ -13389,7 +15134,7 @@
         <p:spPr>
           <a:xfrm>
             <a:off x="990720" y="1676520"/>
-            <a:ext cx="590040" cy="47160"/>
+            <a:ext cx="589680" cy="46800"/>
           </a:xfrm>
           <a:prstGeom prst="roundRect">
             <a:avLst>
@@ -13435,7 +15180,7 @@
         <p:spPr>
           <a:xfrm>
             <a:off x="990720" y="1952640"/>
-            <a:ext cx="8762760" cy="952200"/>
+            <a:ext cx="8762400" cy="951840"/>
           </a:xfrm>
           <a:prstGeom prst="rect">
             <a:avLst/>
@@ -13469,6 +15214,7 @@
                 <a:effectLst/>
                 <a:uFillTx/>
                 <a:latin typeface="Arial"/>
+                <a:ea typeface="Arial"/>
               </a:rPr>
               <a:t>Project 2 — SecureHealth Cryptography &amp; Network Security</a:t>
             </a:r>
@@ -13492,7 +15238,7 @@
         <p:spPr>
           <a:xfrm>
             <a:off x="990720" y="3162240"/>
-            <a:ext cx="2476080" cy="237600"/>
+            <a:ext cx="2475720" cy="237240"/>
           </a:xfrm>
           <a:prstGeom prst="rect">
             <a:avLst/>
@@ -13526,6 +15272,7 @@
                 <a:effectLst/>
                 <a:uFillTx/>
                 <a:latin typeface="Arial"/>
+                <a:ea typeface="Arial"/>
               </a:rPr>
               <a:t>WHAT TO SAY</a:t>
             </a:r>
@@ -13549,7 +15296,7 @@
         <p:spPr>
           <a:xfrm>
             <a:off x="1028880" y="3676680"/>
-            <a:ext cx="85320" cy="85320"/>
+            <a:ext cx="84960" cy="84960"/>
           </a:xfrm>
           <a:prstGeom prst="roundRect">
             <a:avLst>
@@ -13570,7 +15317,7 @@
           <a:fontRef idx="minor"/>
         </p:style>
         <p:txBody>
-          <a:bodyPr lIns="90000" tIns="15840" rIns="90000" bIns="15840" anchor="t">
+          <a:bodyPr lIns="42480" tIns="15840" rIns="42480" bIns="15840" anchor="t">
             <a:noAutofit/>
           </a:bodyPr>
           <a:p>
@@ -13595,7 +15342,7 @@
         <p:spPr>
           <a:xfrm>
             <a:off x="1333440" y="3562200"/>
-            <a:ext cx="8524440" cy="475920"/>
+            <a:ext cx="8524080" cy="475560"/>
           </a:xfrm>
           <a:prstGeom prst="rect">
             <a:avLst/>
@@ -13629,6 +15376,7 @@
                 <a:effectLst/>
                 <a:uFillTx/>
                 <a:latin typeface="Arial"/>
+                <a:ea typeface="Arial"/>
               </a:rPr>
               <a:t>Protecting healthcare information: confidentiality, integrity, and availability</a:t>
             </a:r>
@@ -13652,7 +15400,7 @@
         <p:spPr>
           <a:xfrm>
             <a:off x="1028880" y="4191120"/>
-            <a:ext cx="85320" cy="85320"/>
+            <a:ext cx="84960" cy="84960"/>
           </a:xfrm>
           <a:prstGeom prst="roundRect">
             <a:avLst>
@@ -13673,7 +15421,7 @@
           <a:fontRef idx="minor"/>
         </p:style>
         <p:txBody>
-          <a:bodyPr lIns="90000" tIns="15840" rIns="90000" bIns="15840" anchor="t">
+          <a:bodyPr lIns="42480" tIns="15840" rIns="42480" bIns="15840" anchor="t">
             <a:noAutofit/>
           </a:bodyPr>
           <a:p>
@@ -13698,7 +15446,7 @@
         <p:spPr>
           <a:xfrm>
             <a:off x="1333440" y="4076640"/>
-            <a:ext cx="8524440" cy="475920"/>
+            <a:ext cx="8524080" cy="475560"/>
           </a:xfrm>
           <a:prstGeom prst="rect">
             <a:avLst/>
@@ -13732,6 +15480,7 @@
                 <a:effectLst/>
                 <a:uFillTx/>
                 <a:latin typeface="Arial"/>
+                <a:ea typeface="Arial"/>
               </a:rPr>
               <a:t>TLS 1.3 for data in transit; AES-256-GCM for sensitive data</a:t>
             </a:r>
@@ -13755,7 +15504,7 @@
         <p:spPr>
           <a:xfrm>
             <a:off x="1028880" y="4705200"/>
-            <a:ext cx="85320" cy="85320"/>
+            <a:ext cx="84960" cy="84960"/>
           </a:xfrm>
           <a:prstGeom prst="roundRect">
             <a:avLst>
@@ -13776,7 +15525,7 @@
           <a:fontRef idx="minor"/>
         </p:style>
         <p:txBody>
-          <a:bodyPr lIns="90000" tIns="15840" rIns="90000" bIns="15840" anchor="t">
+          <a:bodyPr lIns="42480" tIns="15840" rIns="42480" bIns="15840" anchor="t">
             <a:noAutofit/>
           </a:bodyPr>
           <a:p>
@@ -13801,7 +15550,7 @@
         <p:spPr>
           <a:xfrm>
             <a:off x="1333440" y="4591080"/>
-            <a:ext cx="8524440" cy="475920"/>
+            <a:ext cx="8524080" cy="475560"/>
           </a:xfrm>
           <a:prstGeom prst="rect">
             <a:avLst/>
@@ -13835,6 +15584,7 @@
                 <a:effectLst/>
                 <a:uFillTx/>
                 <a:latin typeface="Arial"/>
+                <a:ea typeface="Arial"/>
               </a:rPr>
               <a:t>PKI for certificates, secure key management, and IPsec VPN between locations</a:t>
             </a:r>
@@ -13858,7 +15608,7 @@
         <p:spPr>
           <a:xfrm>
             <a:off x="1028880" y="5219640"/>
-            <a:ext cx="85320" cy="85320"/>
+            <a:ext cx="84960" cy="84960"/>
           </a:xfrm>
           <a:prstGeom prst="roundRect">
             <a:avLst>
@@ -13879,7 +15629,7 @@
           <a:fontRef idx="minor"/>
         </p:style>
         <p:txBody>
-          <a:bodyPr lIns="90000" tIns="15840" rIns="90000" bIns="15840" anchor="t">
+          <a:bodyPr lIns="42480" tIns="15840" rIns="42480" bIns="15840" anchor="t">
             <a:noAutofit/>
           </a:bodyPr>
           <a:p>
@@ -13904,7 +15654,7 @@
         <p:spPr>
           <a:xfrm>
             <a:off x="1333440" y="5105520"/>
-            <a:ext cx="8524440" cy="475920"/>
+            <a:ext cx="8524080" cy="475560"/>
           </a:xfrm>
           <a:prstGeom prst="rect">
             <a:avLst/>
@@ -13938,6 +15688,7 @@
                 <a:effectLst/>
                 <a:uFillTx/>
                 <a:latin typeface="Arial"/>
+                <a:ea typeface="Arial"/>
               </a:rPr>
               <a:t>Tied to HIPAA and HITECH requirements</a:t>
             </a:r>
@@ -13961,7 +15712,7 @@
         <p:spPr>
           <a:xfrm>
             <a:off x="1028880" y="5734080"/>
-            <a:ext cx="85320" cy="85320"/>
+            <a:ext cx="84960" cy="84960"/>
           </a:xfrm>
           <a:prstGeom prst="roundRect">
             <a:avLst>
@@ -13982,7 +15733,7 @@
           <a:fontRef idx="minor"/>
         </p:style>
         <p:txBody>
-          <a:bodyPr lIns="90000" tIns="15840" rIns="90000" bIns="15840" anchor="t">
+          <a:bodyPr lIns="42480" tIns="15840" rIns="42480" bIns="15840" anchor="t">
             <a:noAutofit/>
           </a:bodyPr>
           <a:p>
@@ -14007,7 +15758,7 @@
         <p:spPr>
           <a:xfrm>
             <a:off x="1333440" y="5619600"/>
-            <a:ext cx="8524440" cy="475920"/>
+            <a:ext cx="8524080" cy="475560"/>
           </a:xfrm>
           <a:prstGeom prst="rect">
             <a:avLst/>
@@ -14041,6 +15792,7 @@
                 <a:effectLst/>
                 <a:uFillTx/>
                 <a:latin typeface="Arial"/>
+                <a:ea typeface="Arial"/>
               </a:rPr>
               <a:t>Lesson: encryption must be managed through the full key and certificate lifecycle</a:t>
             </a:r>
@@ -14064,7 +15816,7 @@
         <p:spPr>
           <a:xfrm>
             <a:off x="10001160" y="4467240"/>
-            <a:ext cx="1047240" cy="571320"/>
+            <a:ext cx="1046880" cy="570960"/>
           </a:xfrm>
           <a:prstGeom prst="rect">
             <a:avLst/>
@@ -14098,6 +15850,7 @@
                 <a:effectLst/>
                 <a:uFillTx/>
                 <a:latin typeface="Arial"/>
+                <a:ea typeface="Arial"/>
               </a:rPr>
               <a:t>05 / 14</a:t>
             </a:r>
@@ -14121,7 +15874,7 @@
         <p:spPr>
           <a:xfrm>
             <a:off x="990720" y="5867280"/>
-            <a:ext cx="4571640" cy="171000"/>
+            <a:ext cx="4571280" cy="170640"/>
           </a:xfrm>
           <a:prstGeom prst="rect">
             <a:avLst/>
@@ -14155,6 +15908,7 @@
                 <a:effectLst/>
                 <a:uFillTx/>
                 <a:latin typeface="Arial"/>
+                <a:ea typeface="Arial"/>
               </a:rPr>
               <a:t>Presentation Flashcards  •  10-minute talk</a:t>
             </a:r>
@@ -14215,7 +15969,7 @@
         <p:spPr>
           <a:xfrm>
             <a:off x="571680" y="533520"/>
-            <a:ext cx="11048760" cy="5790960"/>
+            <a:ext cx="11048400" cy="5790600"/>
           </a:xfrm>
           <a:prstGeom prst="roundRect">
             <a:avLst>
@@ -14264,7 +16018,7 @@
         <p:spPr>
           <a:xfrm>
             <a:off x="990720" y="905040"/>
-            <a:ext cx="6048000" cy="209160"/>
+            <a:ext cx="6047640" cy="208800"/>
           </a:xfrm>
           <a:prstGeom prst="rect">
             <a:avLst/>
@@ -14298,6 +16052,7 @@
                 <a:effectLst/>
                 <a:uFillTx/>
                 <a:latin typeface="Arial"/>
+                <a:ea typeface="Arial"/>
               </a:rPr>
               <a:t>AYALEW CHERENET  |  IT &amp; CYBERSECURITY PORTFOLIO</a:t>
             </a:r>
@@ -14321,7 +16076,7 @@
         <p:spPr>
           <a:xfrm>
             <a:off x="990720" y="1276200"/>
-            <a:ext cx="1523520" cy="237600"/>
+            <a:ext cx="1523160" cy="237240"/>
           </a:xfrm>
           <a:prstGeom prst="rect">
             <a:avLst/>
@@ -14355,6 +16110,7 @@
                 <a:effectLst/>
                 <a:uFillTx/>
                 <a:latin typeface="Arial"/>
+                <a:ea typeface="Arial"/>
               </a:rPr>
               <a:t>CARD 06</a:t>
             </a:r>
@@ -14378,7 +16134,7 @@
         <p:spPr>
           <a:xfrm>
             <a:off x="9620280" y="1276200"/>
-            <a:ext cx="1428480" cy="237600"/>
+            <a:ext cx="1428120" cy="237240"/>
           </a:xfrm>
           <a:prstGeom prst="rect">
             <a:avLst/>
@@ -14412,6 +16168,7 @@
                 <a:effectLst/>
                 <a:uFillTx/>
                 <a:latin typeface="Arial"/>
+                <a:ea typeface="Arial"/>
               </a:rPr>
               <a:t>3:48–4:35</a:t>
             </a:r>
@@ -14435,7 +16192,7 @@
         <p:spPr>
           <a:xfrm>
             <a:off x="990720" y="1676520"/>
-            <a:ext cx="590040" cy="47160"/>
+            <a:ext cx="589680" cy="46800"/>
           </a:xfrm>
           <a:prstGeom prst="roundRect">
             <a:avLst>
@@ -14481,7 +16238,7 @@
         <p:spPr>
           <a:xfrm>
             <a:off x="990720" y="1952640"/>
-            <a:ext cx="8762760" cy="952200"/>
+            <a:ext cx="8762400" cy="951840"/>
           </a:xfrm>
           <a:prstGeom prst="rect">
             <a:avLst/>
@@ -14515,6 +16272,7 @@
                 <a:effectLst/>
                 <a:uFillTx/>
                 <a:latin typeface="Arial"/>
+                <a:ea typeface="Arial"/>
               </a:rPr>
               <a:t>Project 3 — Healthcare Clinic Secure Database Design</a:t>
             </a:r>
@@ -14538,7 +16296,7 @@
         <p:spPr>
           <a:xfrm>
             <a:off x="990720" y="3162240"/>
-            <a:ext cx="2476080" cy="237600"/>
+            <a:ext cx="2475720" cy="237240"/>
           </a:xfrm>
           <a:prstGeom prst="rect">
             <a:avLst/>
@@ -14572,6 +16330,7 @@
                 <a:effectLst/>
                 <a:uFillTx/>
                 <a:latin typeface="Arial"/>
+                <a:ea typeface="Arial"/>
               </a:rPr>
               <a:t>WHAT TO SAY</a:t>
             </a:r>
@@ -14595,7 +16354,7 @@
         <p:spPr>
           <a:xfrm>
             <a:off x="1028880" y="3676680"/>
-            <a:ext cx="85320" cy="85320"/>
+            <a:ext cx="84960" cy="84960"/>
           </a:xfrm>
           <a:prstGeom prst="roundRect">
             <a:avLst>
@@ -14616,7 +16375,7 @@
           <a:fontRef idx="minor"/>
         </p:style>
         <p:txBody>
-          <a:bodyPr lIns="90000" tIns="15840" rIns="90000" bIns="15840" anchor="t">
+          <a:bodyPr lIns="42480" tIns="15840" rIns="42480" bIns="15840" anchor="t">
             <a:noAutofit/>
           </a:bodyPr>
           <a:p>
@@ -14641,7 +16400,7 @@
         <p:spPr>
           <a:xfrm>
             <a:off x="1333440" y="3562200"/>
-            <a:ext cx="8524440" cy="475920"/>
+            <a:ext cx="8524080" cy="475560"/>
           </a:xfrm>
           <a:prstGeom prst="rect">
             <a:avLst/>
@@ -14675,6 +16434,7 @@
                 <a:effectLst/>
                 <a:uFillTx/>
                 <a:latin typeface="Arial"/>
+                <a:ea typeface="Arial"/>
               </a:rPr>
               <a:t>Secure PostgreSQL database for a healthcare clinic</a:t>
             </a:r>
@@ -14698,7 +16458,7 @@
         <p:spPr>
           <a:xfrm>
             <a:off x="1028880" y="4191120"/>
-            <a:ext cx="85320" cy="85320"/>
+            <a:ext cx="84960" cy="84960"/>
           </a:xfrm>
           <a:prstGeom prst="roundRect">
             <a:avLst>
@@ -14719,7 +16479,7 @@
           <a:fontRef idx="minor"/>
         </p:style>
         <p:txBody>
-          <a:bodyPr lIns="90000" tIns="15840" rIns="90000" bIns="15840" anchor="t">
+          <a:bodyPr lIns="42480" tIns="15840" rIns="42480" bIns="15840" anchor="t">
             <a:noAutofit/>
           </a:bodyPr>
           <a:p>
@@ -14744,7 +16504,7 @@
         <p:spPr>
           <a:xfrm>
             <a:off x="1333440" y="4076640"/>
-            <a:ext cx="8524440" cy="475920"/>
+            <a:ext cx="8524080" cy="475560"/>
           </a:xfrm>
           <a:prstGeom prst="rect">
             <a:avLst/>
@@ -14778,6 +16538,7 @@
                 <a:effectLst/>
                 <a:uFillTx/>
                 <a:latin typeface="Arial"/>
+                <a:ea typeface="Arial"/>
               </a:rPr>
               <a:t>RBAC and least privilege, encryption at rest, and encrypted connections</a:t>
             </a:r>
@@ -14801,7 +16562,7 @@
         <p:spPr>
           <a:xfrm>
             <a:off x="1028880" y="4705200"/>
-            <a:ext cx="85320" cy="85320"/>
+            <a:ext cx="84960" cy="84960"/>
           </a:xfrm>
           <a:prstGeom prst="roundRect">
             <a:avLst>
@@ -14822,7 +16583,7 @@
           <a:fontRef idx="minor"/>
         </p:style>
         <p:txBody>
-          <a:bodyPr lIns="90000" tIns="15840" rIns="90000" bIns="15840" anchor="t">
+          <a:bodyPr lIns="42480" tIns="15840" rIns="42480" bIns="15840" anchor="t">
             <a:noAutofit/>
           </a:bodyPr>
           <a:p>
@@ -14847,7 +16608,7 @@
         <p:spPr>
           <a:xfrm>
             <a:off x="1333440" y="4591080"/>
-            <a:ext cx="8524440" cy="475920"/>
+            <a:ext cx="8524080" cy="475560"/>
           </a:xfrm>
           <a:prstGeom prst="rect">
             <a:avLst/>
@@ -14881,6 +16642,7 @@
                 <a:effectLst/>
                 <a:uFillTx/>
                 <a:latin typeface="Arial"/>
+                <a:ea typeface="Arial"/>
               </a:rPr>
               <a:t>Audit logging, backups, and recovery planning</a:t>
             </a:r>
@@ -14904,7 +16666,7 @@
         <p:spPr>
           <a:xfrm>
             <a:off x="1028880" y="5219640"/>
-            <a:ext cx="85320" cy="85320"/>
+            <a:ext cx="84960" cy="84960"/>
           </a:xfrm>
           <a:prstGeom prst="roundRect">
             <a:avLst>
@@ -14925,7 +16687,7 @@
           <a:fontRef idx="minor"/>
         </p:style>
         <p:txBody>
-          <a:bodyPr lIns="90000" tIns="15840" rIns="90000" bIns="15840" anchor="t">
+          <a:bodyPr lIns="42480" tIns="15840" rIns="42480" bIns="15840" anchor="t">
             <a:noAutofit/>
           </a:bodyPr>
           <a:p>
@@ -14950,7 +16712,7 @@
         <p:spPr>
           <a:xfrm>
             <a:off x="1333440" y="5105520"/>
-            <a:ext cx="8524440" cy="475920"/>
+            <a:ext cx="8524080" cy="475560"/>
           </a:xfrm>
           <a:prstGeom prst="rect">
             <a:avLst/>
@@ -14984,6 +16746,7 @@
                 <a:effectLst/>
                 <a:uFillTx/>
                 <a:latin typeface="Arial"/>
+                <a:ea typeface="Arial"/>
               </a:rPr>
               <a:t>Staff access only what their job needs — reduces risk and supports privacy</a:t>
             </a:r>
@@ -15007,7 +16770,7 @@
         <p:spPr>
           <a:xfrm>
             <a:off x="1028880" y="5734080"/>
-            <a:ext cx="85320" cy="85320"/>
+            <a:ext cx="84960" cy="84960"/>
           </a:xfrm>
           <a:prstGeom prst="roundRect">
             <a:avLst>
@@ -15028,7 +16791,7 @@
           <a:fontRef idx="minor"/>
         </p:style>
         <p:txBody>
-          <a:bodyPr lIns="90000" tIns="15840" rIns="90000" bIns="15840" anchor="t">
+          <a:bodyPr lIns="42480" tIns="15840" rIns="42480" bIns="15840" anchor="t">
             <a:noAutofit/>
           </a:bodyPr>
           <a:p>
@@ -15053,7 +16816,7 @@
         <p:spPr>
           <a:xfrm>
             <a:off x="1333440" y="5619600"/>
-            <a:ext cx="8524440" cy="475920"/>
+            <a:ext cx="8524080" cy="475560"/>
           </a:xfrm>
           <a:prstGeom prst="rect">
             <a:avLst/>
@@ -15087,6 +16850,7 @@
                 <a:effectLst/>
                 <a:uFillTx/>
                 <a:latin typeface="Arial"/>
+                <a:ea typeface="Arial"/>
               </a:rPr>
               <a:t>Lesson: weak access control and poor logging can lead to incidents</a:t>
             </a:r>
@@ -15110,7 +16874,7 @@
         <p:spPr>
           <a:xfrm>
             <a:off x="10001160" y="4467240"/>
-            <a:ext cx="1047240" cy="571320"/>
+            <a:ext cx="1046880" cy="570960"/>
           </a:xfrm>
           <a:prstGeom prst="rect">
             <a:avLst/>
@@ -15144,6 +16908,7 @@
                 <a:effectLst/>
                 <a:uFillTx/>
                 <a:latin typeface="Arial"/>
+                <a:ea typeface="Arial"/>
               </a:rPr>
               <a:t>06 / 14</a:t>
             </a:r>
@@ -15167,7 +16932,7 @@
         <p:spPr>
           <a:xfrm>
             <a:off x="990720" y="5867280"/>
-            <a:ext cx="4571640" cy="171000"/>
+            <a:ext cx="4571280" cy="170640"/>
           </a:xfrm>
           <a:prstGeom prst="rect">
             <a:avLst/>
@@ -15201,6 +16966,7 @@
                 <a:effectLst/>
                 <a:uFillTx/>
                 <a:latin typeface="Arial"/>
+                <a:ea typeface="Arial"/>
               </a:rPr>
               <a:t>Presentation Flashcards  •  10-minute talk</a:t>
             </a:r>
@@ -15261,7 +17027,7 @@
         <p:spPr>
           <a:xfrm>
             <a:off x="571680" y="533520"/>
-            <a:ext cx="11048760" cy="5790960"/>
+            <a:ext cx="11048400" cy="5790600"/>
           </a:xfrm>
           <a:prstGeom prst="roundRect">
             <a:avLst>
@@ -15310,7 +17076,7 @@
         <p:spPr>
           <a:xfrm>
             <a:off x="990720" y="905040"/>
-            <a:ext cx="6048000" cy="209160"/>
+            <a:ext cx="6047640" cy="208800"/>
           </a:xfrm>
           <a:prstGeom prst="rect">
             <a:avLst/>
@@ -15344,6 +17110,7 @@
                 <a:effectLst/>
                 <a:uFillTx/>
                 <a:latin typeface="Arial"/>
+                <a:ea typeface="Arial"/>
               </a:rPr>
               <a:t>AYALEW CHERENET  |  IT &amp; CYBERSECURITY PORTFOLIO</a:t>
             </a:r>
@@ -15367,7 +17134,7 @@
         <p:spPr>
           <a:xfrm>
             <a:off x="990720" y="1276200"/>
-            <a:ext cx="1523520" cy="237600"/>
+            <a:ext cx="1523160" cy="237240"/>
           </a:xfrm>
           <a:prstGeom prst="rect">
             <a:avLst/>
@@ -15401,6 +17168,7 @@
                 <a:effectLst/>
                 <a:uFillTx/>
                 <a:latin typeface="Arial"/>
+                <a:ea typeface="Arial"/>
               </a:rPr>
               <a:t>CARD 07</a:t>
             </a:r>
@@ -15424,7 +17192,7 @@
         <p:spPr>
           <a:xfrm>
             <a:off x="9620280" y="1276200"/>
-            <a:ext cx="1428480" cy="237600"/>
+            <a:ext cx="1428120" cy="237240"/>
           </a:xfrm>
           <a:prstGeom prst="rect">
             <a:avLst/>
@@ -15458,6 +17226,7 @@
                 <a:effectLst/>
                 <a:uFillTx/>
                 <a:latin typeface="Arial"/>
+                <a:ea typeface="Arial"/>
               </a:rPr>
               <a:t>4:35–5:28</a:t>
             </a:r>
@@ -15481,7 +17250,7 @@
         <p:spPr>
           <a:xfrm>
             <a:off x="990720" y="1676520"/>
-            <a:ext cx="590040" cy="47160"/>
+            <a:ext cx="589680" cy="46800"/>
           </a:xfrm>
           <a:prstGeom prst="roundRect">
             <a:avLst>
@@ -15527,7 +17296,7 @@
         <p:spPr>
           <a:xfrm>
             <a:off x="990720" y="1952640"/>
-            <a:ext cx="8762760" cy="952200"/>
+            <a:ext cx="8762400" cy="951840"/>
           </a:xfrm>
           <a:prstGeom prst="rect">
             <a:avLst/>
@@ -15561,6 +17330,7 @@
                 <a:effectLst/>
                 <a:uFillTx/>
                 <a:latin typeface="Arial"/>
+                <a:ea typeface="Arial"/>
               </a:rPr>
               <a:t>Project 4 — RetailHub OWASP Web App Assessment</a:t>
             </a:r>
@@ -15584,7 +17354,7 @@
         <p:spPr>
           <a:xfrm>
             <a:off x="990720" y="3162240"/>
-            <a:ext cx="2476080" cy="237600"/>
+            <a:ext cx="2475720" cy="237240"/>
           </a:xfrm>
           <a:prstGeom prst="rect">
             <a:avLst/>
@@ -15618,6 +17388,7 @@
                 <a:effectLst/>
                 <a:uFillTx/>
                 <a:latin typeface="Arial"/>
+                <a:ea typeface="Arial"/>
               </a:rPr>
               <a:t>WHAT TO SAY</a:t>
             </a:r>
@@ -15641,7 +17412,7 @@
         <p:spPr>
           <a:xfrm>
             <a:off x="1028880" y="3676680"/>
-            <a:ext cx="85320" cy="85320"/>
+            <a:ext cx="84960" cy="84960"/>
           </a:xfrm>
           <a:prstGeom prst="roundRect">
             <a:avLst>
@@ -15662,7 +17433,7 @@
           <a:fontRef idx="minor"/>
         </p:style>
         <p:txBody>
-          <a:bodyPr lIns="90000" tIns="15840" rIns="90000" bIns="15840" anchor="t">
+          <a:bodyPr lIns="42480" tIns="15840" rIns="42480" bIns="15840" anchor="t">
             <a:noAutofit/>
           </a:bodyPr>
           <a:p>
@@ -15687,7 +17458,7 @@
         <p:spPr>
           <a:xfrm>
             <a:off x="1333440" y="3562200"/>
-            <a:ext cx="8524440" cy="475920"/>
+            <a:ext cx="8524080" cy="475560"/>
           </a:xfrm>
           <a:prstGeom prst="rect">
             <a:avLst/>
@@ -15721,6 +17492,7 @@
                 <a:effectLst/>
                 <a:uFillTx/>
                 <a:latin typeface="Arial"/>
+                <a:ea typeface="Arial"/>
               </a:rPr>
               <a:t>E-commerce app reviewed against the OWASP Top 10</a:t>
             </a:r>
@@ -15744,7 +17516,7 @@
         <p:spPr>
           <a:xfrm>
             <a:off x="1028880" y="4191120"/>
-            <a:ext cx="85320" cy="85320"/>
+            <a:ext cx="84960" cy="84960"/>
           </a:xfrm>
           <a:prstGeom prst="roundRect">
             <a:avLst>
@@ -15765,7 +17537,7 @@
           <a:fontRef idx="minor"/>
         </p:style>
         <p:txBody>
-          <a:bodyPr lIns="90000" tIns="15840" rIns="90000" bIns="15840" anchor="t">
+          <a:bodyPr lIns="42480" tIns="15840" rIns="42480" bIns="15840" anchor="t">
             <a:noAutofit/>
           </a:bodyPr>
           <a:p>
@@ -15790,7 +17562,7 @@
         <p:spPr>
           <a:xfrm>
             <a:off x="1333440" y="4076640"/>
-            <a:ext cx="8524440" cy="475920"/>
+            <a:ext cx="8524080" cy="475560"/>
           </a:xfrm>
           <a:prstGeom prst="rect">
             <a:avLst/>
@@ -15824,6 +17596,7 @@
                 <a:effectLst/>
                 <a:uFillTx/>
                 <a:latin typeface="Arial"/>
+                <a:ea typeface="Arial"/>
               </a:rPr>
               <a:t>Risks: broken access control, injection, XSS, weak authentication, insufficient logging</a:t>
             </a:r>
@@ -15847,7 +17620,7 @@
         <p:spPr>
           <a:xfrm>
             <a:off x="1028880" y="4705200"/>
-            <a:ext cx="85320" cy="85320"/>
+            <a:ext cx="84960" cy="84960"/>
           </a:xfrm>
           <a:prstGeom prst="roundRect">
             <a:avLst>
@@ -15868,7 +17641,7 @@
           <a:fontRef idx="minor"/>
         </p:style>
         <p:txBody>
-          <a:bodyPr lIns="90000" tIns="15840" rIns="90000" bIns="15840" anchor="t">
+          <a:bodyPr lIns="42480" tIns="15840" rIns="42480" bIns="15840" anchor="t">
             <a:noAutofit/>
           </a:bodyPr>
           <a:p>
@@ -15893,7 +17666,7 @@
         <p:spPr>
           <a:xfrm>
             <a:off x="1333440" y="4591080"/>
-            <a:ext cx="8524440" cy="475920"/>
+            <a:ext cx="8524080" cy="475560"/>
           </a:xfrm>
           <a:prstGeom prst="rect">
             <a:avLst/>
@@ -15927,6 +17700,7 @@
                 <a:effectLst/>
                 <a:uFillTx/>
                 <a:latin typeface="Arial"/>
+                <a:ea typeface="Arial"/>
               </a:rPr>
               <a:t>Remediation: MFA, stronger access controls, input validation, SAST/DAST</a:t>
             </a:r>
@@ -15950,7 +17724,7 @@
         <p:spPr>
           <a:xfrm>
             <a:off x="1028880" y="5219640"/>
-            <a:ext cx="85320" cy="85320"/>
+            <a:ext cx="84960" cy="84960"/>
           </a:xfrm>
           <a:prstGeom prst="roundRect">
             <a:avLst>
@@ -15971,7 +17745,7 @@
           <a:fontRef idx="minor"/>
         </p:style>
         <p:txBody>
-          <a:bodyPr lIns="90000" tIns="15840" rIns="90000" bIns="15840" anchor="t">
+          <a:bodyPr lIns="42480" tIns="15840" rIns="42480" bIns="15840" anchor="t">
             <a:noAutofit/>
           </a:bodyPr>
           <a:p>
@@ -15996,7 +17770,7 @@
         <p:spPr>
           <a:xfrm>
             <a:off x="1333440" y="5105520"/>
-            <a:ext cx="8524440" cy="475920"/>
+            <a:ext cx="8524080" cy="475560"/>
           </a:xfrm>
           <a:prstGeom prst="rect">
             <a:avLst/>
@@ -16030,6 +17804,7 @@
                 <a:effectLst/>
                 <a:uFillTx/>
                 <a:latin typeface="Arial"/>
+                <a:ea typeface="Arial"/>
               </a:rPr>
               <a:t>Also: logging, monitoring, and a web application firewall</a:t>
             </a:r>
@@ -16053,7 +17828,7 @@
         <p:spPr>
           <a:xfrm>
             <a:off x="1028880" y="5734080"/>
-            <a:ext cx="85320" cy="85320"/>
+            <a:ext cx="84960" cy="84960"/>
           </a:xfrm>
           <a:prstGeom prst="roundRect">
             <a:avLst>
@@ -16074,7 +17849,7 @@
           <a:fontRef idx="minor"/>
         </p:style>
         <p:txBody>
-          <a:bodyPr lIns="90000" tIns="15840" rIns="90000" bIns="15840" anchor="t">
+          <a:bodyPr lIns="42480" tIns="15840" rIns="42480" bIns="15840" anchor="t">
             <a:noAutofit/>
           </a:bodyPr>
           <a:p>
@@ -16099,7 +17874,7 @@
         <p:spPr>
           <a:xfrm>
             <a:off x="1333440" y="5619600"/>
-            <a:ext cx="8524440" cy="475920"/>
+            <a:ext cx="8524080" cy="475560"/>
           </a:xfrm>
           <a:prstGeom prst="rect">
             <a:avLst/>
@@ -16133,6 +17908,7 @@
                 <a:effectLst/>
                 <a:uFillTx/>
                 <a:latin typeface="Arial"/>
+                <a:ea typeface="Arial"/>
               </a:rPr>
               <a:t>Why it matters for SOC: web weaknesses lead to alerts, incidents, and business impact</a:t>
             </a:r>
@@ -16156,7 +17932,7 @@
         <p:spPr>
           <a:xfrm>
             <a:off x="10001160" y="4467240"/>
-            <a:ext cx="1047240" cy="571320"/>
+            <a:ext cx="1046880" cy="570960"/>
           </a:xfrm>
           <a:prstGeom prst="rect">
             <a:avLst/>
@@ -16190,6 +17966,7 @@
                 <a:effectLst/>
                 <a:uFillTx/>
                 <a:latin typeface="Arial"/>
+                <a:ea typeface="Arial"/>
               </a:rPr>
               <a:t>07 / 14</a:t>
             </a:r>
@@ -16213,7 +17990,7 @@
         <p:spPr>
           <a:xfrm>
             <a:off x="990720" y="5867280"/>
-            <a:ext cx="4571640" cy="171000"/>
+            <a:ext cx="4571280" cy="170640"/>
           </a:xfrm>
           <a:prstGeom prst="rect">
             <a:avLst/>
@@ -16247,6 +18024,7 @@
                 <a:effectLst/>
                 <a:uFillTx/>
                 <a:latin typeface="Arial"/>
+                <a:ea typeface="Arial"/>
               </a:rPr>
               <a:t>Presentation Flashcards  •  10-minute talk</a:t>
             </a:r>
@@ -16307,7 +18085,7 @@
         <p:spPr>
           <a:xfrm>
             <a:off x="571680" y="533520"/>
-            <a:ext cx="11048760" cy="5790960"/>
+            <a:ext cx="11048400" cy="5790600"/>
           </a:xfrm>
           <a:prstGeom prst="roundRect">
             <a:avLst>
@@ -16356,7 +18134,7 @@
         <p:spPr>
           <a:xfrm>
             <a:off x="990720" y="905040"/>
-            <a:ext cx="6048000" cy="209160"/>
+            <a:ext cx="6047640" cy="208800"/>
           </a:xfrm>
           <a:prstGeom prst="rect">
             <a:avLst/>
@@ -16390,6 +18168,7 @@
                 <a:effectLst/>
                 <a:uFillTx/>
                 <a:latin typeface="Arial"/>
+                <a:ea typeface="Arial"/>
               </a:rPr>
               <a:t>AYALEW CHERENET  |  IT &amp; CYBERSECURITY PORTFOLIO</a:t>
             </a:r>
@@ -16413,7 +18192,7 @@
         <p:spPr>
           <a:xfrm>
             <a:off x="990720" y="1276200"/>
-            <a:ext cx="1523520" cy="237600"/>
+            <a:ext cx="1523160" cy="237240"/>
           </a:xfrm>
           <a:prstGeom prst="rect">
             <a:avLst/>
@@ -16447,6 +18226,7 @@
                 <a:effectLst/>
                 <a:uFillTx/>
                 <a:latin typeface="Arial"/>
+                <a:ea typeface="Arial"/>
               </a:rPr>
               <a:t>CARD 08</a:t>
             </a:r>
@@ -16470,7 +18250,7 @@
         <p:spPr>
           <a:xfrm>
             <a:off x="9620280" y="1276200"/>
-            <a:ext cx="1428480" cy="237600"/>
+            <a:ext cx="1428120" cy="237240"/>
           </a:xfrm>
           <a:prstGeom prst="rect">
             <a:avLst/>
@@ -16504,6 +18284,7 @@
                 <a:effectLst/>
                 <a:uFillTx/>
                 <a:latin typeface="Arial"/>
+                <a:ea typeface="Arial"/>
               </a:rPr>
               <a:t>5:28–6:19</a:t>
             </a:r>
@@ -16527,7 +18308,7 @@
         <p:spPr>
           <a:xfrm>
             <a:off x="990720" y="1676520"/>
-            <a:ext cx="590040" cy="47160"/>
+            <a:ext cx="589680" cy="46800"/>
           </a:xfrm>
           <a:prstGeom prst="roundRect">
             <a:avLst>
@@ -16573,7 +18354,7 @@
         <p:spPr>
           <a:xfrm>
             <a:off x="990720" y="1952640"/>
-            <a:ext cx="8762760" cy="952200"/>
+            <a:ext cx="8762400" cy="951840"/>
           </a:xfrm>
           <a:prstGeom prst="rect">
             <a:avLst/>
@@ -16607,6 +18388,7 @@
                 <a:effectLst/>
                 <a:uFillTx/>
                 <a:latin typeface="Arial"/>
+                <a:ea typeface="Arial"/>
               </a:rPr>
               <a:t>Project 5 — ABC Logistics Threat &amp; Vulnerability Management</a:t>
             </a:r>
@@ -16630,7 +18412,7 @@
         <p:spPr>
           <a:xfrm>
             <a:off x="990720" y="3162240"/>
-            <a:ext cx="2476080" cy="237600"/>
+            <a:ext cx="2475720" cy="237240"/>
           </a:xfrm>
           <a:prstGeom prst="rect">
             <a:avLst/>
@@ -16664,6 +18446,7 @@
                 <a:effectLst/>
                 <a:uFillTx/>
                 <a:latin typeface="Arial"/>
+                <a:ea typeface="Arial"/>
               </a:rPr>
               <a:t>WHAT TO SAY</a:t>
             </a:r>
@@ -16687,7 +18470,7 @@
         <p:spPr>
           <a:xfrm>
             <a:off x="1028880" y="3676680"/>
-            <a:ext cx="85320" cy="85320"/>
+            <a:ext cx="84960" cy="84960"/>
           </a:xfrm>
           <a:prstGeom prst="roundRect">
             <a:avLst>
@@ -16708,7 +18491,7 @@
           <a:fontRef idx="minor"/>
         </p:style>
         <p:txBody>
-          <a:bodyPr lIns="90000" tIns="15840" rIns="90000" bIns="15840" anchor="t">
+          <a:bodyPr lIns="42480" tIns="15840" rIns="42480" bIns="15840" anchor="t">
             <a:noAutofit/>
           </a:bodyPr>
           <a:p>
@@ -16733,7 +18516,7 @@
         <p:spPr>
           <a:xfrm>
             <a:off x="1333440" y="3562200"/>
-            <a:ext cx="8524440" cy="561600"/>
+            <a:ext cx="8524080" cy="561240"/>
           </a:xfrm>
           <a:prstGeom prst="rect">
             <a:avLst/>
@@ -16767,6 +18550,7 @@
                 <a:effectLst/>
                 <a:uFillTx/>
                 <a:latin typeface="Arial"/>
+                <a:ea typeface="Arial"/>
               </a:rPr>
               <a:t>Full lifecycle: discover → prioritize → remediate → verify → report</a:t>
             </a:r>
@@ -16790,7 +18574,7 @@
         <p:spPr>
           <a:xfrm>
             <a:off x="1028880" y="4276800"/>
-            <a:ext cx="85320" cy="85320"/>
+            <a:ext cx="84960" cy="84960"/>
           </a:xfrm>
           <a:prstGeom prst="roundRect">
             <a:avLst>
@@ -16811,7 +18595,7 @@
           <a:fontRef idx="minor"/>
         </p:style>
         <p:txBody>
-          <a:bodyPr lIns="90000" tIns="15840" rIns="90000" bIns="15840" anchor="t">
+          <a:bodyPr lIns="42480" tIns="15840" rIns="42480" bIns="15840" anchor="t">
             <a:noAutofit/>
           </a:bodyPr>
           <a:p>
@@ -16836,7 +18620,7 @@
         <p:spPr>
           <a:xfrm>
             <a:off x="1333440" y="4162320"/>
-            <a:ext cx="8524440" cy="561600"/>
+            <a:ext cx="8524080" cy="561240"/>
           </a:xfrm>
           <a:prstGeom prst="rect">
             <a:avLst/>
@@ -16870,6 +18654,7 @@
                 <a:effectLst/>
                 <a:uFillTx/>
                 <a:latin typeface="Arial"/>
+                <a:ea typeface="Arial"/>
               </a:rPr>
               <a:t>Prioritized with CVSS scoring, asset importance, exploitability, and business impact</a:t>
             </a:r>
@@ -16893,7 +18678,7 @@
         <p:spPr>
           <a:xfrm>
             <a:off x="1028880" y="4876920"/>
-            <a:ext cx="85320" cy="85320"/>
+            <a:ext cx="84960" cy="84960"/>
           </a:xfrm>
           <a:prstGeom prst="roundRect">
             <a:avLst>
@@ -16914,7 +18699,7 @@
           <a:fontRef idx="minor"/>
         </p:style>
         <p:txBody>
-          <a:bodyPr lIns="90000" tIns="15840" rIns="90000" bIns="15840" anchor="t">
+          <a:bodyPr lIns="42480" tIns="15840" rIns="42480" bIns="15840" anchor="t">
             <a:noAutofit/>
           </a:bodyPr>
           <a:p>
@@ -16939,7 +18724,7 @@
         <p:spPr>
           <a:xfrm>
             <a:off x="1333440" y="4762440"/>
-            <a:ext cx="8524440" cy="561600"/>
+            <a:ext cx="8524080" cy="561240"/>
           </a:xfrm>
           <a:prstGeom prst="rect">
             <a:avLst/>
@@ -16973,6 +18758,7 @@
                 <a:effectLst/>
                 <a:uFillTx/>
                 <a:latin typeface="Arial"/>
+                <a:ea typeface="Arial"/>
               </a:rPr>
               <a:t>Not every vulnerability is equal — a repeatable process focuses on what matters most</a:t>
             </a:r>
@@ -16996,7 +18782,7 @@
         <p:spPr>
           <a:xfrm>
             <a:off x="1028880" y="5477040"/>
-            <a:ext cx="85320" cy="85320"/>
+            <a:ext cx="84960" cy="84960"/>
           </a:xfrm>
           <a:prstGeom prst="roundRect">
             <a:avLst>
@@ -17017,7 +18803,7 @@
           <a:fontRef idx="minor"/>
         </p:style>
         <p:txBody>
-          <a:bodyPr lIns="90000" tIns="15840" rIns="90000" bIns="15840" anchor="t">
+          <a:bodyPr lIns="42480" tIns="15840" rIns="42480" bIns="15840" anchor="t">
             <a:noAutofit/>
           </a:bodyPr>
           <a:p>
@@ -17042,7 +18828,7 @@
         <p:spPr>
           <a:xfrm>
             <a:off x="1333440" y="5362560"/>
-            <a:ext cx="8524440" cy="561600"/>
+            <a:ext cx="8524080" cy="561240"/>
           </a:xfrm>
           <a:prstGeom prst="rect">
             <a:avLst/>
@@ -17076,6 +18862,7 @@
                 <a:effectLst/>
                 <a:uFillTx/>
                 <a:latin typeface="Arial"/>
+                <a:ea typeface="Arial"/>
               </a:rPr>
               <a:t>Closest project to day-to-day SOC work</a:t>
             </a:r>
@@ -17099,7 +18886,7 @@
         <p:spPr>
           <a:xfrm>
             <a:off x="10001160" y="4467240"/>
-            <a:ext cx="1047240" cy="571320"/>
+            <a:ext cx="1046880" cy="570960"/>
           </a:xfrm>
           <a:prstGeom prst="rect">
             <a:avLst/>
@@ -17133,6 +18920,7 @@
                 <a:effectLst/>
                 <a:uFillTx/>
                 <a:latin typeface="Arial"/>
+                <a:ea typeface="Arial"/>
               </a:rPr>
               <a:t>08 / 14</a:t>
             </a:r>
@@ -17156,7 +18944,7 @@
         <p:spPr>
           <a:xfrm>
             <a:off x="990720" y="5867280"/>
-            <a:ext cx="4571640" cy="171000"/>
+            <a:ext cx="4571280" cy="170640"/>
           </a:xfrm>
           <a:prstGeom prst="rect">
             <a:avLst/>
@@ -17190,6 +18978,7 @@
                 <a:effectLst/>
                 <a:uFillTx/>
                 <a:latin typeface="Arial"/>
+                <a:ea typeface="Arial"/>
               </a:rPr>
               <a:t>Presentation Flashcards  •  10-minute talk</a:t>
             </a:r>
@@ -17250,7 +19039,7 @@
         <p:spPr>
           <a:xfrm>
             <a:off x="571680" y="533520"/>
-            <a:ext cx="11048760" cy="5790960"/>
+            <a:ext cx="11048400" cy="5790600"/>
           </a:xfrm>
           <a:prstGeom prst="roundRect">
             <a:avLst>
@@ -17299,7 +19088,7 @@
         <p:spPr>
           <a:xfrm>
             <a:off x="990720" y="905040"/>
-            <a:ext cx="6048000" cy="209160"/>
+            <a:ext cx="6047640" cy="208800"/>
           </a:xfrm>
           <a:prstGeom prst="rect">
             <a:avLst/>
@@ -17333,6 +19122,7 @@
                 <a:effectLst/>
                 <a:uFillTx/>
                 <a:latin typeface="Arial"/>
+                <a:ea typeface="Arial"/>
               </a:rPr>
               <a:t>AYALEW CHERENET  |  IT &amp; CYBERSECURITY PORTFOLIO</a:t>
             </a:r>
@@ -17356,7 +19146,7 @@
         <p:spPr>
           <a:xfrm>
             <a:off x="990720" y="1276200"/>
-            <a:ext cx="1523520" cy="237600"/>
+            <a:ext cx="1523160" cy="237240"/>
           </a:xfrm>
           <a:prstGeom prst="rect">
             <a:avLst/>
@@ -17390,6 +19180,7 @@
                 <a:effectLst/>
                 <a:uFillTx/>
                 <a:latin typeface="Arial"/>
+                <a:ea typeface="Arial"/>
               </a:rPr>
               <a:t>CARD 09</a:t>
             </a:r>
@@ -17413,7 +19204,7 @@
         <p:spPr>
           <a:xfrm>
             <a:off x="9620280" y="1276200"/>
-            <a:ext cx="1428480" cy="237600"/>
+            <a:ext cx="1428120" cy="237240"/>
           </a:xfrm>
           <a:prstGeom prst="rect">
             <a:avLst/>
@@ -17447,6 +19238,7 @@
                 <a:effectLst/>
                 <a:uFillTx/>
                 <a:latin typeface="Arial"/>
+                <a:ea typeface="Arial"/>
               </a:rPr>
               <a:t>6:19–7:09</a:t>
             </a:r>
@@ -17470,7 +19262,7 @@
         <p:spPr>
           <a:xfrm>
             <a:off x="990720" y="1676520"/>
-            <a:ext cx="590040" cy="47160"/>
+            <a:ext cx="589680" cy="46800"/>
           </a:xfrm>
           <a:prstGeom prst="roundRect">
             <a:avLst>
@@ -17516,7 +19308,7 @@
         <p:spPr>
           <a:xfrm>
             <a:off x="990720" y="1952640"/>
-            <a:ext cx="8762760" cy="952200"/>
+            <a:ext cx="8762400" cy="951840"/>
           </a:xfrm>
           <a:prstGeom prst="rect">
             <a:avLst/>
@@ -17550,6 +19342,7 @@
                 <a:effectLst/>
                 <a:uFillTx/>
                 <a:latin typeface="Arial"/>
+                <a:ea typeface="Arial"/>
               </a:rPr>
               <a:t>Project 6 — IoT Smart Home Monitoring System</a:t>
             </a:r>
@@ -17573,7 +19366,7 @@
         <p:spPr>
           <a:xfrm>
             <a:off x="990720" y="3162240"/>
-            <a:ext cx="2476080" cy="237600"/>
+            <a:ext cx="2475720" cy="237240"/>
           </a:xfrm>
           <a:prstGeom prst="rect">
             <a:avLst/>
@@ -17607,6 +19400,7 @@
                 <a:effectLst/>
                 <a:uFillTx/>
                 <a:latin typeface="Arial"/>
+                <a:ea typeface="Arial"/>
               </a:rPr>
               <a:t>WHAT TO SAY</a:t>
             </a:r>
@@ -17630,7 +19424,7 @@
         <p:spPr>
           <a:xfrm>
             <a:off x="1028880" y="3676680"/>
-            <a:ext cx="85320" cy="85320"/>
+            <a:ext cx="84960" cy="84960"/>
           </a:xfrm>
           <a:prstGeom prst="roundRect">
             <a:avLst>
@@ -17651,7 +19445,7 @@
           <a:fontRef idx="minor"/>
         </p:style>
         <p:txBody>
-          <a:bodyPr lIns="90000" tIns="15840" rIns="90000" bIns="15840" anchor="t">
+          <a:bodyPr lIns="42480" tIns="15840" rIns="42480" bIns="15840" anchor="t">
             <a:noAutofit/>
           </a:bodyPr>
           <a:p>
@@ -17676,7 +19470,7 @@
         <p:spPr>
           <a:xfrm>
             <a:off x="1333440" y="3562200"/>
-            <a:ext cx="8524440" cy="561600"/>
+            <a:ext cx="8524080" cy="561240"/>
           </a:xfrm>
           <a:prstGeom prst="rect">
             <a:avLst/>
@@ -17710,6 +19504,7 @@
                 <a:effectLst/>
                 <a:uFillTx/>
                 <a:latin typeface="Arial"/>
+                <a:ea typeface="Arial"/>
               </a:rPr>
               <a:t>Raspberry Pi + sensors, MQTT over TLS, and a cloud dashboard</a:t>
             </a:r>
@@ -17733,7 +19528,7 @@
         <p:spPr>
           <a:xfrm>
             <a:off x="1028880" y="4276800"/>
-            <a:ext cx="85320" cy="85320"/>
+            <a:ext cx="84960" cy="84960"/>
           </a:xfrm>
           <a:prstGeom prst="roundRect">
             <a:avLst>
@@ -17754,7 +19549,7 @@
           <a:fontRef idx="minor"/>
         </p:style>
         <p:txBody>
-          <a:bodyPr lIns="90000" tIns="15840" rIns="90000" bIns="15840" anchor="t">
+          <a:bodyPr lIns="42480" tIns="15840" rIns="42480" bIns="15840" anchor="t">
             <a:noAutofit/>
           </a:bodyPr>
           <a:p>
@@ -17779,7 +19574,7 @@
         <p:spPr>
           <a:xfrm>
             <a:off x="1333440" y="4162320"/>
-            <a:ext cx="8524440" cy="561600"/>
+            <a:ext cx="8524080" cy="561240"/>
           </a:xfrm>
           <a:prstGeom prst="rect">
             <a:avLst/>
@@ -17813,6 +19608,7 @@
                 <a:effectLst/>
                 <a:uFillTx/>
                 <a:latin typeface="Arial"/>
+                <a:ea typeface="Arial"/>
               </a:rPr>
               <a:t>Threshold-based alerts when values leave a safe range</a:t>
             </a:r>
@@ -17836,7 +19632,7 @@
         <p:spPr>
           <a:xfrm>
             <a:off x="1028880" y="4876920"/>
-            <a:ext cx="85320" cy="85320"/>
+            <a:ext cx="84960" cy="84960"/>
           </a:xfrm>
           <a:prstGeom prst="roundRect">
             <a:avLst>
@@ -17857,7 +19653,7 @@
           <a:fontRef idx="minor"/>
         </p:style>
         <p:txBody>
-          <a:bodyPr lIns="90000" tIns="15840" rIns="90000" bIns="15840" anchor="t">
+          <a:bodyPr lIns="42480" tIns="15840" rIns="42480" bIns="15840" anchor="t">
             <a:noAutofit/>
           </a:bodyPr>
           <a:p>
@@ -17882,7 +19678,7 @@
         <p:spPr>
           <a:xfrm>
             <a:off x="1333440" y="4762440"/>
-            <a:ext cx="8524440" cy="561600"/>
+            <a:ext cx="8524080" cy="561240"/>
           </a:xfrm>
           <a:prstGeom prst="rect">
             <a:avLst/>
@@ -17916,6 +19712,7 @@
                 <a:effectLst/>
                 <a:uFillTx/>
                 <a:latin typeface="Arial"/>
+                <a:ea typeface="Arial"/>
               </a:rPr>
               <a:t>Security focus: data in transit, secure device communication, encrypted alerts</a:t>
             </a:r>
@@ -17939,7 +19736,7 @@
         <p:spPr>
           <a:xfrm>
             <a:off x="1028880" y="5477040"/>
-            <a:ext cx="85320" cy="85320"/>
+            <a:ext cx="84960" cy="84960"/>
           </a:xfrm>
           <a:prstGeom prst="roundRect">
             <a:avLst>
@@ -17960,7 +19757,7 @@
           <a:fontRef idx="minor"/>
         </p:style>
         <p:txBody>
-          <a:bodyPr lIns="90000" tIns="15840" rIns="90000" bIns="15840" anchor="t">
+          <a:bodyPr lIns="42480" tIns="15840" rIns="42480" bIns="15840" anchor="t">
             <a:noAutofit/>
           </a:bodyPr>
           <a:p>
@@ -17985,7 +19782,7 @@
         <p:spPr>
           <a:xfrm>
             <a:off x="1333440" y="5362560"/>
-            <a:ext cx="8524440" cy="561600"/>
+            <a:ext cx="8524080" cy="561240"/>
           </a:xfrm>
           <a:prstGeom prst="rect">
             <a:avLst/>
@@ -18019,6 +19816,7 @@
                 <a:effectLst/>
                 <a:uFillTx/>
                 <a:latin typeface="Arial"/>
+                <a:ea typeface="Arial"/>
               </a:rPr>
               <a:t>Lesson: every connected device is useful data and a new security risk</a:t>
             </a:r>
@@ -18042,7 +19840,7 @@
         <p:spPr>
           <a:xfrm>
             <a:off x="10001160" y="4467240"/>
-            <a:ext cx="1047240" cy="571320"/>
+            <a:ext cx="1046880" cy="570960"/>
           </a:xfrm>
           <a:prstGeom prst="rect">
             <a:avLst/>
@@ -18076,6 +19874,7 @@
                 <a:effectLst/>
                 <a:uFillTx/>
                 <a:latin typeface="Arial"/>
+                <a:ea typeface="Arial"/>
               </a:rPr>
               <a:t>09 / 14</a:t>
             </a:r>
@@ -18099,7 +19898,7 @@
         <p:spPr>
           <a:xfrm>
             <a:off x="990720" y="5867280"/>
-            <a:ext cx="4571640" cy="171000"/>
+            <a:ext cx="4571280" cy="170640"/>
           </a:xfrm>
           <a:prstGeom prst="rect">
             <a:avLst/>
@@ -18133,6 +19932,7 @@
                 <a:effectLst/>
                 <a:uFillTx/>
                 <a:latin typeface="Arial"/>
+                <a:ea typeface="Arial"/>
               </a:rPr>
               <a:t>Presentation Flashcards  •  10-minute talk</a:t>
             </a:r>

--- a/assets/Ayalew_Cherenet_Portfolio_Presentation_Flashcards.pptx
+++ b/assets/Ayalew_Cherenet_Portfolio_Presentation_Flashcards.pptx
@@ -2638,39 +2638,6 @@
       </p:sp>
       <p:sp>
         <p:nvSpPr>
-          <p:cNvPr id="3" name="accent-rule-01">
-            <a:extLst xmlns:a="http://schemas.openxmlformats.org/drawingml/2006/main">
-              <a:ext uri="{FF2B5EF4-FFF2-40B4-BE49-F238E27FC236}">
-                <a16:creationId xmlns:a16="http://schemas.microsoft.com/office/drawing/2014/main" id="{A2ACE0B5-41D1-4C3D-BB56-1A87B0C6FD69}"/>
-              </a:ext>
-            </a:extLst>
-          </p:cNvPr>
-          <p:cNvSpPr>
-            <a:spLocks xmlns:a="http://schemas.openxmlformats.org/drawingml/2006/main" noGrp="1"/>
-          </p:cNvSpPr>
-          <p:nvPr/>
-        </p:nvSpPr>
-        <p:spPr>
-          <a:xfrm xmlns:a="http://schemas.openxmlformats.org/drawingml/2006/main">
-            <a:off x="762000" y="704850"/>
-            <a:ext cx="876300" cy="57150"/>
-          </a:xfrm>
-          <a:prstGeom xmlns:a="http://schemas.openxmlformats.org/drawingml/2006/main" prst="roundRect">
-            <a:avLst>
-              <a:gd name="adj" fmla="val 50000"/>
-            </a:avLst>
-          </a:prstGeom>
-          <a:solidFill xmlns:a="http://schemas.openxmlformats.org/drawingml/2006/main">
-            <a:srgbClr val="34D4B4"/>
-          </a:solidFill>
-          <a:ln xmlns:a="http://schemas.openxmlformats.org/drawingml/2006/main" w="0">
-            <a:noFill/>
-            <a:prstDash val="solid"/>
-          </a:ln>
-        </p:spPr>
-      </p:sp>
-      <p:sp>
-        <p:nvSpPr>
           <p:cNvPr id="4" name="footer-01">
             <a:extLst xmlns:a="http://schemas.openxmlformats.org/drawingml/2006/main">
               <a:ext uri="{FF2B5EF4-FFF2-40B4-BE49-F238E27FC236}">
@@ -3328,39 +3295,6 @@
       </p:sp>
       <p:sp>
         <p:nvSpPr>
-          <p:cNvPr id="3" name="accent-rule-10">
-            <a:extLst xmlns:a="http://schemas.openxmlformats.org/drawingml/2006/main">
-              <a:ext uri="{FF2B5EF4-FFF2-40B4-BE49-F238E27FC236}">
-                <a16:creationId xmlns:a16="http://schemas.microsoft.com/office/drawing/2014/main" id="{EE9408A1-BD46-43BD-B790-ED54531BB979}"/>
-              </a:ext>
-            </a:extLst>
-          </p:cNvPr>
-          <p:cNvSpPr>
-            <a:spLocks xmlns:a="http://schemas.openxmlformats.org/drawingml/2006/main" noGrp="1"/>
-          </p:cNvSpPr>
-          <p:nvPr/>
-        </p:nvSpPr>
-        <p:spPr>
-          <a:xfrm xmlns:a="http://schemas.openxmlformats.org/drawingml/2006/main">
-            <a:off x="762000" y="704850"/>
-            <a:ext cx="876300" cy="57150"/>
-          </a:xfrm>
-          <a:prstGeom xmlns:a="http://schemas.openxmlformats.org/drawingml/2006/main" prst="roundRect">
-            <a:avLst>
-              <a:gd name="adj" fmla="val 50000"/>
-            </a:avLst>
-          </a:prstGeom>
-          <a:solidFill xmlns:a="http://schemas.openxmlformats.org/drawingml/2006/main">
-            <a:srgbClr val="34D4B4"/>
-          </a:solidFill>
-          <a:ln xmlns:a="http://schemas.openxmlformats.org/drawingml/2006/main" w="0">
-            <a:noFill/>
-            <a:prstDash val="solid"/>
-          </a:ln>
-        </p:spPr>
-      </p:sp>
-      <p:sp>
-        <p:nvSpPr>
           <p:cNvPr id="4" name="footer-10">
             <a:extLst xmlns:a="http://schemas.openxmlformats.org/drawingml/2006/main">
               <a:ext uri="{FF2B5EF4-FFF2-40B4-BE49-F238E27FC236}">
@@ -3963,39 +3897,6 @@
       </p:sp>
       <p:sp>
         <p:nvSpPr>
-          <p:cNvPr id="3" name="accent-rule-11">
-            <a:extLst xmlns:a="http://schemas.openxmlformats.org/drawingml/2006/main">
-              <a:ext uri="{FF2B5EF4-FFF2-40B4-BE49-F238E27FC236}">
-                <a16:creationId xmlns:a16="http://schemas.microsoft.com/office/drawing/2014/main" id="{61951E47-BB02-4EE1-96B1-5A1F60310478}"/>
-              </a:ext>
-            </a:extLst>
-          </p:cNvPr>
-          <p:cNvSpPr>
-            <a:spLocks xmlns:a="http://schemas.openxmlformats.org/drawingml/2006/main" noGrp="1"/>
-          </p:cNvSpPr>
-          <p:nvPr/>
-        </p:nvSpPr>
-        <p:spPr>
-          <a:xfrm xmlns:a="http://schemas.openxmlformats.org/drawingml/2006/main">
-            <a:off x="762000" y="704850"/>
-            <a:ext cx="876300" cy="57150"/>
-          </a:xfrm>
-          <a:prstGeom xmlns:a="http://schemas.openxmlformats.org/drawingml/2006/main" prst="roundRect">
-            <a:avLst>
-              <a:gd name="adj" fmla="val 50000"/>
-            </a:avLst>
-          </a:prstGeom>
-          <a:solidFill xmlns:a="http://schemas.openxmlformats.org/drawingml/2006/main">
-            <a:srgbClr val="34D4B4"/>
-          </a:solidFill>
-          <a:ln xmlns:a="http://schemas.openxmlformats.org/drawingml/2006/main" w="0">
-            <a:noFill/>
-            <a:prstDash val="solid"/>
-          </a:ln>
-        </p:spPr>
-      </p:sp>
-      <p:sp>
-        <p:nvSpPr>
           <p:cNvPr id="4" name="footer-11">
             <a:extLst xmlns:a="http://schemas.openxmlformats.org/drawingml/2006/main">
               <a:ext uri="{FF2B5EF4-FFF2-40B4-BE49-F238E27FC236}">
@@ -4576,39 +4477,6 @@
       </p:sp>
       <p:sp>
         <p:nvSpPr>
-          <p:cNvPr id="3" name="accent-rule-12">
-            <a:extLst xmlns:a="http://schemas.openxmlformats.org/drawingml/2006/main">
-              <a:ext uri="{FF2B5EF4-FFF2-40B4-BE49-F238E27FC236}">
-                <a16:creationId xmlns:a16="http://schemas.microsoft.com/office/drawing/2014/main" id="{F960DA29-FCDE-4D35-8EBC-E5E8DD51743A}"/>
-              </a:ext>
-            </a:extLst>
-          </p:cNvPr>
-          <p:cNvSpPr>
-            <a:spLocks xmlns:a="http://schemas.openxmlformats.org/drawingml/2006/main" noGrp="1"/>
-          </p:cNvSpPr>
-          <p:nvPr/>
-        </p:nvSpPr>
-        <p:spPr>
-          <a:xfrm xmlns:a="http://schemas.openxmlformats.org/drawingml/2006/main">
-            <a:off x="762000" y="704850"/>
-            <a:ext cx="876300" cy="57150"/>
-          </a:xfrm>
-          <a:prstGeom xmlns:a="http://schemas.openxmlformats.org/drawingml/2006/main" prst="roundRect">
-            <a:avLst>
-              <a:gd name="adj" fmla="val 50000"/>
-            </a:avLst>
-          </a:prstGeom>
-          <a:solidFill xmlns:a="http://schemas.openxmlformats.org/drawingml/2006/main">
-            <a:srgbClr val="34D4B4"/>
-          </a:solidFill>
-          <a:ln xmlns:a="http://schemas.openxmlformats.org/drawingml/2006/main" w="0">
-            <a:noFill/>
-            <a:prstDash val="solid"/>
-          </a:ln>
-        </p:spPr>
-      </p:sp>
-      <p:sp>
-        <p:nvSpPr>
           <p:cNvPr id="4" name="footer-12">
             <a:extLst xmlns:a="http://schemas.openxmlformats.org/drawingml/2006/main">
               <a:ext uri="{FF2B5EF4-FFF2-40B4-BE49-F238E27FC236}">
@@ -5200,39 +5068,6 @@
       </p:sp>
       <p:sp>
         <p:nvSpPr>
-          <p:cNvPr id="3" name="accent-rule-13">
-            <a:extLst xmlns:a="http://schemas.openxmlformats.org/drawingml/2006/main">
-              <a:ext uri="{FF2B5EF4-FFF2-40B4-BE49-F238E27FC236}">
-                <a16:creationId xmlns:a16="http://schemas.microsoft.com/office/drawing/2014/main" id="{F27362B3-923D-4CC0-81B6-8B4DEBC53913}"/>
-              </a:ext>
-            </a:extLst>
-          </p:cNvPr>
-          <p:cNvSpPr>
-            <a:spLocks xmlns:a="http://schemas.openxmlformats.org/drawingml/2006/main" noGrp="1"/>
-          </p:cNvSpPr>
-          <p:nvPr/>
-        </p:nvSpPr>
-        <p:spPr>
-          <a:xfrm xmlns:a="http://schemas.openxmlformats.org/drawingml/2006/main">
-            <a:off x="762000" y="704850"/>
-            <a:ext cx="876300" cy="57150"/>
-          </a:xfrm>
-          <a:prstGeom xmlns:a="http://schemas.openxmlformats.org/drawingml/2006/main" prst="roundRect">
-            <a:avLst>
-              <a:gd name="adj" fmla="val 50000"/>
-            </a:avLst>
-          </a:prstGeom>
-          <a:solidFill xmlns:a="http://schemas.openxmlformats.org/drawingml/2006/main">
-            <a:srgbClr val="34D4B4"/>
-          </a:solidFill>
-          <a:ln xmlns:a="http://schemas.openxmlformats.org/drawingml/2006/main" w="0">
-            <a:noFill/>
-            <a:prstDash val="solid"/>
-          </a:ln>
-        </p:spPr>
-      </p:sp>
-      <p:sp>
-        <p:nvSpPr>
           <p:cNvPr id="4" name="footer-13">
             <a:extLst xmlns:a="http://schemas.openxmlformats.org/drawingml/2006/main">
               <a:ext uri="{FF2B5EF4-FFF2-40B4-BE49-F238E27FC236}">
@@ -5846,39 +5681,6 @@
       </p:sp>
       <p:sp>
         <p:nvSpPr>
-          <p:cNvPr id="3" name="accent-rule-14">
-            <a:extLst xmlns:a="http://schemas.openxmlformats.org/drawingml/2006/main">
-              <a:ext uri="{FF2B5EF4-FFF2-40B4-BE49-F238E27FC236}">
-                <a16:creationId xmlns:a16="http://schemas.microsoft.com/office/drawing/2014/main" id="{9D9F9E12-9F67-483F-A622-6173B3F84B72}"/>
-              </a:ext>
-            </a:extLst>
-          </p:cNvPr>
-          <p:cNvSpPr>
-            <a:spLocks xmlns:a="http://schemas.openxmlformats.org/drawingml/2006/main" noGrp="1"/>
-          </p:cNvSpPr>
-          <p:nvPr/>
-        </p:nvSpPr>
-        <p:spPr>
-          <a:xfrm xmlns:a="http://schemas.openxmlformats.org/drawingml/2006/main">
-            <a:off x="762000" y="704850"/>
-            <a:ext cx="876300" cy="57150"/>
-          </a:xfrm>
-          <a:prstGeom xmlns:a="http://schemas.openxmlformats.org/drawingml/2006/main" prst="roundRect">
-            <a:avLst>
-              <a:gd name="adj" fmla="val 50000"/>
-            </a:avLst>
-          </a:prstGeom>
-          <a:solidFill xmlns:a="http://schemas.openxmlformats.org/drawingml/2006/main">
-            <a:srgbClr val="34D4B4"/>
-          </a:solidFill>
-          <a:ln xmlns:a="http://schemas.openxmlformats.org/drawingml/2006/main" w="0">
-            <a:noFill/>
-            <a:prstDash val="solid"/>
-          </a:ln>
-        </p:spPr>
-      </p:sp>
-      <p:sp>
-        <p:nvSpPr>
           <p:cNvPr id="4" name="footer-14">
             <a:extLst xmlns:a="http://schemas.openxmlformats.org/drawingml/2006/main">
               <a:ext uri="{FF2B5EF4-FFF2-40B4-BE49-F238E27FC236}">
@@ -6459,39 +6261,6 @@
       </p:sp>
       <p:sp>
         <p:nvSpPr>
-          <p:cNvPr id="3" name="accent-rule-15">
-            <a:extLst xmlns:a="http://schemas.openxmlformats.org/drawingml/2006/main">
-              <a:ext uri="{FF2B5EF4-FFF2-40B4-BE49-F238E27FC236}">
-                <a16:creationId xmlns:a16="http://schemas.microsoft.com/office/drawing/2014/main" id="{80181B1E-CAA8-4AA0-B35E-61D7647316F3}"/>
-              </a:ext>
-            </a:extLst>
-          </p:cNvPr>
-          <p:cNvSpPr>
-            <a:spLocks xmlns:a="http://schemas.openxmlformats.org/drawingml/2006/main" noGrp="1"/>
-          </p:cNvSpPr>
-          <p:nvPr/>
-        </p:nvSpPr>
-        <p:spPr>
-          <a:xfrm xmlns:a="http://schemas.openxmlformats.org/drawingml/2006/main">
-            <a:off x="762000" y="704850"/>
-            <a:ext cx="876300" cy="57150"/>
-          </a:xfrm>
-          <a:prstGeom xmlns:a="http://schemas.openxmlformats.org/drawingml/2006/main" prst="roundRect">
-            <a:avLst>
-              <a:gd name="adj" fmla="val 50000"/>
-            </a:avLst>
-          </a:prstGeom>
-          <a:solidFill xmlns:a="http://schemas.openxmlformats.org/drawingml/2006/main">
-            <a:srgbClr val="34D4B4"/>
-          </a:solidFill>
-          <a:ln xmlns:a="http://schemas.openxmlformats.org/drawingml/2006/main" w="0">
-            <a:noFill/>
-            <a:prstDash val="solid"/>
-          </a:ln>
-        </p:spPr>
-      </p:sp>
-      <p:sp>
-        <p:nvSpPr>
           <p:cNvPr id="4" name="footer-15">
             <a:extLst xmlns:a="http://schemas.openxmlformats.org/drawingml/2006/main">
               <a:ext uri="{FF2B5EF4-FFF2-40B4-BE49-F238E27FC236}">
@@ -7649,39 +7418,6 @@
       </p:sp>
       <p:sp>
         <p:nvSpPr>
-          <p:cNvPr id="3" name="accent-rule-02">
-            <a:extLst xmlns:a="http://schemas.openxmlformats.org/drawingml/2006/main">
-              <a:ext uri="{FF2B5EF4-FFF2-40B4-BE49-F238E27FC236}">
-                <a16:creationId xmlns:a16="http://schemas.microsoft.com/office/drawing/2014/main" id="{642A2A71-D68D-43A1-BD24-44A4D084A4FE}"/>
-              </a:ext>
-            </a:extLst>
-          </p:cNvPr>
-          <p:cNvSpPr>
-            <a:spLocks xmlns:a="http://schemas.openxmlformats.org/drawingml/2006/main" noGrp="1"/>
-          </p:cNvSpPr>
-          <p:nvPr/>
-        </p:nvSpPr>
-        <p:spPr>
-          <a:xfrm xmlns:a="http://schemas.openxmlformats.org/drawingml/2006/main">
-            <a:off x="762000" y="704850"/>
-            <a:ext cx="876300" cy="57150"/>
-          </a:xfrm>
-          <a:prstGeom xmlns:a="http://schemas.openxmlformats.org/drawingml/2006/main" prst="roundRect">
-            <a:avLst>
-              <a:gd name="adj" fmla="val 50000"/>
-            </a:avLst>
-          </a:prstGeom>
-          <a:solidFill xmlns:a="http://schemas.openxmlformats.org/drawingml/2006/main">
-            <a:srgbClr val="34D4B4"/>
-          </a:solidFill>
-          <a:ln xmlns:a="http://schemas.openxmlformats.org/drawingml/2006/main" w="0">
-            <a:noFill/>
-            <a:prstDash val="solid"/>
-          </a:ln>
-        </p:spPr>
-      </p:sp>
-      <p:sp>
-        <p:nvSpPr>
           <p:cNvPr id="4" name="footer-02">
             <a:extLst xmlns:a="http://schemas.openxmlformats.org/drawingml/2006/main">
               <a:ext uri="{FF2B5EF4-FFF2-40B4-BE49-F238E27FC236}">
@@ -8262,39 +7998,6 @@
       </p:sp>
       <p:sp>
         <p:nvSpPr>
-          <p:cNvPr id="3" name="accent-rule-03">
-            <a:extLst xmlns:a="http://schemas.openxmlformats.org/drawingml/2006/main">
-              <a:ext uri="{FF2B5EF4-FFF2-40B4-BE49-F238E27FC236}">
-                <a16:creationId xmlns:a16="http://schemas.microsoft.com/office/drawing/2014/main" id="{62B00C5F-B586-41A9-B217-0977B82D0A4B}"/>
-              </a:ext>
-            </a:extLst>
-          </p:cNvPr>
-          <p:cNvSpPr>
-            <a:spLocks xmlns:a="http://schemas.openxmlformats.org/drawingml/2006/main" noGrp="1"/>
-          </p:cNvSpPr>
-          <p:nvPr/>
-        </p:nvSpPr>
-        <p:spPr>
-          <a:xfrm xmlns:a="http://schemas.openxmlformats.org/drawingml/2006/main">
-            <a:off x="762000" y="704850"/>
-            <a:ext cx="876300" cy="57150"/>
-          </a:xfrm>
-          <a:prstGeom xmlns:a="http://schemas.openxmlformats.org/drawingml/2006/main" prst="roundRect">
-            <a:avLst>
-              <a:gd name="adj" fmla="val 50000"/>
-            </a:avLst>
-          </a:prstGeom>
-          <a:solidFill xmlns:a="http://schemas.openxmlformats.org/drawingml/2006/main">
-            <a:srgbClr val="34D4B4"/>
-          </a:solidFill>
-          <a:ln xmlns:a="http://schemas.openxmlformats.org/drawingml/2006/main" w="0">
-            <a:noFill/>
-            <a:prstDash val="solid"/>
-          </a:ln>
-        </p:spPr>
-      </p:sp>
-      <p:sp>
-        <p:nvSpPr>
           <p:cNvPr id="4" name="footer-03">
             <a:extLst xmlns:a="http://schemas.openxmlformats.org/drawingml/2006/main">
               <a:ext uri="{FF2B5EF4-FFF2-40B4-BE49-F238E27FC236}">
@@ -8845,39 +8548,6 @@
       </p:sp>
       <p:sp>
         <p:nvSpPr>
-          <p:cNvPr id="3" name="accent-rule-04">
-            <a:extLst xmlns:a="http://schemas.openxmlformats.org/drawingml/2006/main">
-              <a:ext uri="{FF2B5EF4-FFF2-40B4-BE49-F238E27FC236}">
-                <a16:creationId xmlns:a16="http://schemas.microsoft.com/office/drawing/2014/main" id="{0C257A50-093F-4CB2-BB3A-D11A8DBA5971}"/>
-              </a:ext>
-            </a:extLst>
-          </p:cNvPr>
-          <p:cNvSpPr>
-            <a:spLocks xmlns:a="http://schemas.openxmlformats.org/drawingml/2006/main" noGrp="1"/>
-          </p:cNvSpPr>
-          <p:nvPr/>
-        </p:nvSpPr>
-        <p:spPr>
-          <a:xfrm xmlns:a="http://schemas.openxmlformats.org/drawingml/2006/main">
-            <a:off x="762000" y="704850"/>
-            <a:ext cx="876300" cy="57150"/>
-          </a:xfrm>
-          <a:prstGeom xmlns:a="http://schemas.openxmlformats.org/drawingml/2006/main" prst="roundRect">
-            <a:avLst>
-              <a:gd name="adj" fmla="val 50000"/>
-            </a:avLst>
-          </a:prstGeom>
-          <a:solidFill xmlns:a="http://schemas.openxmlformats.org/drawingml/2006/main">
-            <a:srgbClr val="34D4B4"/>
-          </a:solidFill>
-          <a:ln xmlns:a="http://schemas.openxmlformats.org/drawingml/2006/main" w="0">
-            <a:noFill/>
-            <a:prstDash val="solid"/>
-          </a:ln>
-        </p:spPr>
-      </p:sp>
-      <p:sp>
-        <p:nvSpPr>
           <p:cNvPr id="4" name="footer-04">
             <a:extLst xmlns:a="http://schemas.openxmlformats.org/drawingml/2006/main">
               <a:ext uri="{FF2B5EF4-FFF2-40B4-BE49-F238E27FC236}">
@@ -9469,39 +9139,6 @@
       </p:sp>
       <p:sp>
         <p:nvSpPr>
-          <p:cNvPr id="3" name="accent-rule-05">
-            <a:extLst xmlns:a="http://schemas.openxmlformats.org/drawingml/2006/main">
-              <a:ext uri="{FF2B5EF4-FFF2-40B4-BE49-F238E27FC236}">
-                <a16:creationId xmlns:a16="http://schemas.microsoft.com/office/drawing/2014/main" id="{74C92762-7DA8-4D0B-A64C-09A66B3641D3}"/>
-              </a:ext>
-            </a:extLst>
-          </p:cNvPr>
-          <p:cNvSpPr>
-            <a:spLocks xmlns:a="http://schemas.openxmlformats.org/drawingml/2006/main" noGrp="1"/>
-          </p:cNvSpPr>
-          <p:nvPr/>
-        </p:nvSpPr>
-        <p:spPr>
-          <a:xfrm xmlns:a="http://schemas.openxmlformats.org/drawingml/2006/main">
-            <a:off x="762000" y="704850"/>
-            <a:ext cx="876300" cy="57150"/>
-          </a:xfrm>
-          <a:prstGeom xmlns:a="http://schemas.openxmlformats.org/drawingml/2006/main" prst="roundRect">
-            <a:avLst>
-              <a:gd name="adj" fmla="val 50000"/>
-            </a:avLst>
-          </a:prstGeom>
-          <a:solidFill xmlns:a="http://schemas.openxmlformats.org/drawingml/2006/main">
-            <a:srgbClr val="34D4B4"/>
-          </a:solidFill>
-          <a:ln xmlns:a="http://schemas.openxmlformats.org/drawingml/2006/main" w="0">
-            <a:noFill/>
-            <a:prstDash val="solid"/>
-          </a:ln>
-        </p:spPr>
-      </p:sp>
-      <p:sp>
-        <p:nvSpPr>
           <p:cNvPr id="4" name="footer-05">
             <a:extLst xmlns:a="http://schemas.openxmlformats.org/drawingml/2006/main">
               <a:ext uri="{FF2B5EF4-FFF2-40B4-BE49-F238E27FC236}">
@@ -10137,39 +9774,6 @@
       </p:sp>
       <p:sp>
         <p:nvSpPr>
-          <p:cNvPr id="3" name="accent-rule-06">
-            <a:extLst xmlns:a="http://schemas.openxmlformats.org/drawingml/2006/main">
-              <a:ext uri="{FF2B5EF4-FFF2-40B4-BE49-F238E27FC236}">
-                <a16:creationId xmlns:a16="http://schemas.microsoft.com/office/drawing/2014/main" id="{C9A478B3-DDBF-4C66-A81A-892B978FA36A}"/>
-              </a:ext>
-            </a:extLst>
-          </p:cNvPr>
-          <p:cNvSpPr>
-            <a:spLocks xmlns:a="http://schemas.openxmlformats.org/drawingml/2006/main" noGrp="1"/>
-          </p:cNvSpPr>
-          <p:nvPr/>
-        </p:nvSpPr>
-        <p:spPr>
-          <a:xfrm xmlns:a="http://schemas.openxmlformats.org/drawingml/2006/main">
-            <a:off x="762000" y="704850"/>
-            <a:ext cx="876300" cy="57150"/>
-          </a:xfrm>
-          <a:prstGeom xmlns:a="http://schemas.openxmlformats.org/drawingml/2006/main" prst="roundRect">
-            <a:avLst>
-              <a:gd name="adj" fmla="val 50000"/>
-            </a:avLst>
-          </a:prstGeom>
-          <a:solidFill xmlns:a="http://schemas.openxmlformats.org/drawingml/2006/main">
-            <a:srgbClr val="34D4B4"/>
-          </a:solidFill>
-          <a:ln xmlns:a="http://schemas.openxmlformats.org/drawingml/2006/main" w="0">
-            <a:noFill/>
-            <a:prstDash val="solid"/>
-          </a:ln>
-        </p:spPr>
-      </p:sp>
-      <p:sp>
-        <p:nvSpPr>
           <p:cNvPr id="4" name="footer-06">
             <a:extLst xmlns:a="http://schemas.openxmlformats.org/drawingml/2006/main">
               <a:ext uri="{FF2B5EF4-FFF2-40B4-BE49-F238E27FC236}">
@@ -10761,39 +10365,6 @@
       </p:sp>
       <p:sp>
         <p:nvSpPr>
-          <p:cNvPr id="3" name="accent-rule-07">
-            <a:extLst xmlns:a="http://schemas.openxmlformats.org/drawingml/2006/main">
-              <a:ext uri="{FF2B5EF4-FFF2-40B4-BE49-F238E27FC236}">
-                <a16:creationId xmlns:a16="http://schemas.microsoft.com/office/drawing/2014/main" id="{B7136DA3-E521-4ADC-879B-0C059195FFA8}"/>
-              </a:ext>
-            </a:extLst>
-          </p:cNvPr>
-          <p:cNvSpPr>
-            <a:spLocks xmlns:a="http://schemas.openxmlformats.org/drawingml/2006/main" noGrp="1"/>
-          </p:cNvSpPr>
-          <p:nvPr/>
-        </p:nvSpPr>
-        <p:spPr>
-          <a:xfrm xmlns:a="http://schemas.openxmlformats.org/drawingml/2006/main">
-            <a:off x="762000" y="704850"/>
-            <a:ext cx="876300" cy="57150"/>
-          </a:xfrm>
-          <a:prstGeom xmlns:a="http://schemas.openxmlformats.org/drawingml/2006/main" prst="roundRect">
-            <a:avLst>
-              <a:gd name="adj" fmla="val 50000"/>
-            </a:avLst>
-          </a:prstGeom>
-          <a:solidFill xmlns:a="http://schemas.openxmlformats.org/drawingml/2006/main">
-            <a:srgbClr val="34D4B4"/>
-          </a:solidFill>
-          <a:ln xmlns:a="http://schemas.openxmlformats.org/drawingml/2006/main" w="0">
-            <a:noFill/>
-            <a:prstDash val="solid"/>
-          </a:ln>
-        </p:spPr>
-      </p:sp>
-      <p:sp>
-        <p:nvSpPr>
           <p:cNvPr id="4" name="footer-07">
             <a:extLst xmlns:a="http://schemas.openxmlformats.org/drawingml/2006/main">
               <a:ext uri="{FF2B5EF4-FFF2-40B4-BE49-F238E27FC236}">
@@ -11407,39 +10978,6 @@
       </p:sp>
       <p:sp>
         <p:nvSpPr>
-          <p:cNvPr id="3" name="accent-rule-08">
-            <a:extLst xmlns:a="http://schemas.openxmlformats.org/drawingml/2006/main">
-              <a:ext uri="{FF2B5EF4-FFF2-40B4-BE49-F238E27FC236}">
-                <a16:creationId xmlns:a16="http://schemas.microsoft.com/office/drawing/2014/main" id="{E0C51719-DCB2-482A-86DD-778FEBB2ECB5}"/>
-              </a:ext>
-            </a:extLst>
-          </p:cNvPr>
-          <p:cNvSpPr>
-            <a:spLocks xmlns:a="http://schemas.openxmlformats.org/drawingml/2006/main" noGrp="1"/>
-          </p:cNvSpPr>
-          <p:nvPr/>
-        </p:nvSpPr>
-        <p:spPr>
-          <a:xfrm xmlns:a="http://schemas.openxmlformats.org/drawingml/2006/main">
-            <a:off x="762000" y="704850"/>
-            <a:ext cx="876300" cy="57150"/>
-          </a:xfrm>
-          <a:prstGeom xmlns:a="http://schemas.openxmlformats.org/drawingml/2006/main" prst="roundRect">
-            <a:avLst>
-              <a:gd name="adj" fmla="val 50000"/>
-            </a:avLst>
-          </a:prstGeom>
-          <a:solidFill xmlns:a="http://schemas.openxmlformats.org/drawingml/2006/main">
-            <a:srgbClr val="34D4B4"/>
-          </a:solidFill>
-          <a:ln xmlns:a="http://schemas.openxmlformats.org/drawingml/2006/main" w="0">
-            <a:noFill/>
-            <a:prstDash val="solid"/>
-          </a:ln>
-        </p:spPr>
-      </p:sp>
-      <p:sp>
-        <p:nvSpPr>
           <p:cNvPr id="4" name="footer-08">
             <a:extLst xmlns:a="http://schemas.openxmlformats.org/drawingml/2006/main">
               <a:ext uri="{FF2B5EF4-FFF2-40B4-BE49-F238E27FC236}">
@@ -12028,39 +11566,6 @@
             </a:r>
           </a:p>
         </p:txBody>
-      </p:sp>
-      <p:sp>
-        <p:nvSpPr>
-          <p:cNvPr id="3" name="accent-rule-09">
-            <a:extLst xmlns:a="http://schemas.openxmlformats.org/drawingml/2006/main">
-              <a:ext uri="{FF2B5EF4-FFF2-40B4-BE49-F238E27FC236}">
-                <a16:creationId xmlns:a16="http://schemas.microsoft.com/office/drawing/2014/main" id="{FA09F15B-2F32-4010-A35E-D3485C9DFC00}"/>
-              </a:ext>
-            </a:extLst>
-          </p:cNvPr>
-          <p:cNvSpPr>
-            <a:spLocks xmlns:a="http://schemas.openxmlformats.org/drawingml/2006/main" noGrp="1"/>
-          </p:cNvSpPr>
-          <p:nvPr/>
-        </p:nvSpPr>
-        <p:spPr>
-          <a:xfrm xmlns:a="http://schemas.openxmlformats.org/drawingml/2006/main">
-            <a:off x="762000" y="704850"/>
-            <a:ext cx="876300" cy="57150"/>
-          </a:xfrm>
-          <a:prstGeom xmlns:a="http://schemas.openxmlformats.org/drawingml/2006/main" prst="roundRect">
-            <a:avLst>
-              <a:gd name="adj" fmla="val 50000"/>
-            </a:avLst>
-          </a:prstGeom>
-          <a:solidFill xmlns:a="http://schemas.openxmlformats.org/drawingml/2006/main">
-            <a:srgbClr val="34D4B4"/>
-          </a:solidFill>
-          <a:ln xmlns:a="http://schemas.openxmlformats.org/drawingml/2006/main" w="0">
-            <a:noFill/>
-            <a:prstDash val="solid"/>
-          </a:ln>
-        </p:spPr>
       </p:sp>
       <p:sp>
         <p:nvSpPr>
